--- a/marketing/training/Mini-Importation-Training-with-scripts.pptx
+++ b/marketing/training/Mini-Importation-Training-with-scripts.pptx
@@ -4,6 +4,9 @@
   <p:sldMasterIdLst>
     <p:sldMasterId id="2147483648" r:id="rId1"/>
   </p:sldMasterIdLst>
+  <p:notesMasterIdLst>
+    <p:notesMasterId r:id="rId30"/>
+  </p:notesMasterIdLst>
   <p:sldIdLst>
     <p:sldId id="256" r:id="rId2"/>
     <p:sldId id="257" r:id="rId3"/>
@@ -34,10 +37,7 @@
     <p:sldId id="282" r:id="rId28"/>
     <p:sldId id="283" r:id="rId29"/>
   </p:sldIdLst>
-  <p:notesMasterIdLst>
-    <p:notesMasterId r:id="rId30"/>
-  </p:notesMasterIdLst>
-  <p:sldSz cx="9144000" cy="5143500"/>
+  <p:sldSz cx="9144000" cy="5143500" type="screen16x9"/>
   <p:notesSz cx="5143500" cy="9144000"/>
   <p:defaultTextStyle>
     <a:lvl1pPr marL="0" algn="l" defTabSz="914400" rtl="0" eaLnBrk="1" latinLnBrk="0" hangingPunct="1">
@@ -131,13 +131,20 @@
       </a:defRPr>
     </a:lvl9pPr>
   </p:defaultTextStyle>
+  <p:extLst>
+    <p:ext uri="{EFAFB233-063F-42B5-8137-9DF3F51BA10A}">
+      <p15:sldGuideLst xmlns:p15="http://schemas.microsoft.com/office/powerpoint/2012/main"/>
+    </p:ext>
+  </p:extLst>
 </p:presentation>
 </file>
 
 <file path=ppt/charts/chart1.xml><?xml version="1.0" encoding="utf-8"?>
-<c:chartSpace xmlns:c="http://schemas.openxmlformats.org/drawingml/2006/chart" xmlns:a="http://schemas.openxmlformats.org/drawingml/2006/main" xmlns:r="http://schemas.openxmlformats.org/officeDocument/2006/relationships">
+<c:chartSpace xmlns:c="http://schemas.openxmlformats.org/drawingml/2006/chart" xmlns:a="http://schemas.openxmlformats.org/drawingml/2006/main" xmlns:r="http://schemas.openxmlformats.org/officeDocument/2006/relationships" xmlns:c16r2="http://schemas.microsoft.com/office/drawing/2015/06/chart">
   <c:date1904 val="0"/>
+  <c:lang val="en-US"/>
   <c:roundedCorners val="1"/>
+  <c:style val="2"/>
   <c:chart>
     <c:title>
       <c:tx>
@@ -154,7 +161,7 @@
               </a:defRPr>
             </a:pPr>
             <a:r>
-              <a:rPr sz="1300" b="0" i="0" u="none" strike="noStrike">
+              <a:rPr lang="en-US" sz="1300" b="0" i="0" u="none" strike="noStrike">
                 <a:solidFill>
                   <a:srgbClr val="0B1F3A"/>
                 </a:solidFill>
@@ -165,7 +172,6 @@
           </a:p>
         </c:rich>
       </c:tx>
-      <c:layout/>
       <c:overlay val="0"/>
     </c:title>
     <c:autoTitleDeleted val="0"/>
@@ -196,51 +202,25 @@
             <a:effectLst/>
           </c:spPr>
           <c:invertIfNegative val="0"/>
-          <c:dLbls>
-            <c:numFmt formatCode="#,##0" sourceLinked="0"/>
-            <c:txPr>
-              <a:bodyPr/>
-              <a:lstStyle/>
-              <a:p>
-                <a:pPr>
-                  <a:defRPr b="0" i="0" strike="noStrike" sz="1100" u="none">
-                    <a:solidFill>
-                      <a:srgbClr val="0B1F3A"/>
-                    </a:solidFill>
-                    <a:latin typeface="+mn-lt"/>
-                  </a:defRPr>
-                </a:pPr>
-              </a:p>
-            </c:txPr>
-            <c:showLegendKey val="0"/>
-            <c:showVal val="1"/>
-            <c:showCatName val="0"/>
-            <c:showSerName val="0"/>
-            <c:showPercent val="0"/>
-            <c:showBubbleSize val="0"/>
-            <c:showLeaderLines val="0"/>
-          </c:dLbls>
           <c:dPt>
             <c:idx val="0"/>
             <c:invertIfNegative val="0"/>
             <c:bubble3D val="0"/>
-            <c:spPr>
-              <a:solidFill>
-                <a:srgbClr val="F2A541"/>
-              </a:solidFill>
-              <a:effectLst/>
-            </c:spPr>
+            <c:extLst>
+              <c:ext xmlns:c16="http://schemas.microsoft.com/office/drawing/2014/chart" uri="{C3380CC4-5D6E-409C-BE32-E72D297353CC}">
+                <c16:uniqueId val="{00000001-3354-42B5-B244-9C8F96117357}"/>
+              </c:ext>
+            </c:extLst>
           </c:dPt>
           <c:dPt>
             <c:idx val="1"/>
             <c:invertIfNegative val="0"/>
             <c:bubble3D val="0"/>
-            <c:spPr>
-              <a:solidFill>
-                <a:srgbClr val="F2A541"/>
-              </a:solidFill>
-              <a:effectLst/>
-            </c:spPr>
+            <c:extLst>
+              <c:ext xmlns:c16="http://schemas.microsoft.com/office/drawing/2014/chart" uri="{C3380CC4-5D6E-409C-BE32-E72D297353CC}">
+                <c16:uniqueId val="{00000003-3354-42B5-B244-9C8F96117357}"/>
+              </c:ext>
+            </c:extLst>
           </c:dPt>
           <c:dPt>
             <c:idx val="2"/>
@@ -252,6 +232,11 @@
               </a:solidFill>
               <a:effectLst/>
             </c:spPr>
+            <c:extLst>
+              <c:ext xmlns:c16="http://schemas.microsoft.com/office/drawing/2014/chart" uri="{C3380CC4-5D6E-409C-BE32-E72D297353CC}">
+                <c16:uniqueId val="{00000005-3354-42B5-B244-9C8F96117357}"/>
+              </c:ext>
+            </c:extLst>
           </c:dPt>
           <c:dPt>
             <c:idx val="3"/>
@@ -263,6 +248,11 @@
               </a:solidFill>
               <a:effectLst/>
             </c:spPr>
+            <c:extLst>
+              <c:ext xmlns:c16="http://schemas.microsoft.com/office/drawing/2014/chart" uri="{C3380CC4-5D6E-409C-BE32-E72D297353CC}">
+                <c16:uniqueId val="{00000007-3354-42B5-B244-9C8F96117357}"/>
+              </c:ext>
+            </c:extLst>
           </c:dPt>
           <c:dPt>
             <c:idx val="4"/>
@@ -274,6 +264,11 @@
               </a:solidFill>
               <a:effectLst/>
             </c:spPr>
+            <c:extLst>
+              <c:ext xmlns:c16="http://schemas.microsoft.com/office/drawing/2014/chart" uri="{C3380CC4-5D6E-409C-BE32-E72D297353CC}">
+                <c16:uniqueId val="{00000009-3354-42B5-B244-9C8F96117357}"/>
+              </c:ext>
+            </c:extLst>
           </c:dPt>
           <c:dPt>
             <c:idx val="5"/>
@@ -285,6 +280,11 @@
               </a:solidFill>
               <a:effectLst/>
             </c:spPr>
+            <c:extLst>
+              <c:ext xmlns:c16="http://schemas.microsoft.com/office/drawing/2014/chart" uri="{C3380CC4-5D6E-409C-BE32-E72D297353CC}">
+                <c16:uniqueId val="{0000000B-3354-42B5-B244-9C8F96117357}"/>
+              </c:ext>
+            </c:extLst>
           </c:dPt>
           <c:dPt>
             <c:idx val="6"/>
@@ -296,37 +296,77 @@
               </a:solidFill>
               <a:effectLst/>
             </c:spPr>
+            <c:extLst>
+              <c:ext xmlns:c16="http://schemas.microsoft.com/office/drawing/2014/chart" uri="{C3380CC4-5D6E-409C-BE32-E72D297353CC}">
+                <c16:uniqueId val="{0000000D-3354-42B5-B244-9C8F96117357}"/>
+              </c:ext>
+            </c:extLst>
           </c:dPt>
+          <c:dLbls>
+            <c:numFmt formatCode="#,##0" sourceLinked="0"/>
+            <c:spPr>
+              <a:noFill/>
+              <a:ln>
+                <a:noFill/>
+              </a:ln>
+              <a:effectLst/>
+            </c:spPr>
+            <c:txPr>
+              <a:bodyPr/>
+              <a:lstStyle/>
+              <a:p>
+                <a:pPr>
+                  <a:defRPr sz="1100" b="0" i="0" u="none" strike="noStrike">
+                    <a:solidFill>
+                      <a:srgbClr val="0B1F3A"/>
+                    </a:solidFill>
+                    <a:latin typeface="+mn-lt"/>
+                  </a:defRPr>
+                </a:pPr>
+                <a:endParaRPr lang="en-US"/>
+              </a:p>
+            </c:txPr>
+            <c:showLegendKey val="0"/>
+            <c:showVal val="1"/>
+            <c:showCatName val="0"/>
+            <c:showSerName val="0"/>
+            <c:showPercent val="0"/>
+            <c:showBubbleSize val="0"/>
+            <c:showLeaderLines val="0"/>
+            <c:extLst>
+              <c:ext xmlns:c15="http://schemas.microsoft.com/office/drawing/2012/chart" uri="{CE6537A1-D6FC-4f65-9D91-7224C49458BB}">
+                <c15:showLeaderLines val="0"/>
+              </c:ext>
+            </c:extLst>
+          </c:dLbls>
           <c:cat>
-            <c:multiLvlStrRef>
+            <c:strRef>
               <c:f>Sheet1!$A$2:$A$8</c:f>
-              <c:multiLvlStrCache>
+              <c:strCache>
                 <c:ptCount val="7"/>
-                <c:lvl>
-                  <c:pt idx="0">
-                    <c:v>Product</c:v>
-                  </c:pt>
-                  <c:pt idx="1">
-                    <c:v>Freight and insurance</c:v>
-                  </c:pt>
-                  <c:pt idx="2">
-                    <c:v>Duty (20%)</c:v>
-                  </c:pt>
-                  <c:pt idx="3">
-                    <c:v>VAT (7.5%)</c:v>
-                  </c:pt>
-                  <c:pt idx="4">
-                    <c:v>Clearing and port</c:v>
-                  </c:pt>
-                  <c:pt idx="5">
-                    <c:v>Local transport</c:v>
-                  </c:pt>
-                  <c:pt idx="6">
-                    <c:v>Bank charges</c:v>
-                  </c:pt>
-                </c:lvl>
-              </c:multiLvlStrCache>
-            </c:multiLvlStrRef>
+                <c:pt idx="0">
+                  <c:v>Product</c:v>
+                </c:pt>
+                <c:pt idx="1">
+                  <c:v>Freight and insurance</c:v>
+                </c:pt>
+                <c:pt idx="2">
+                  <c:v>Duty (20%)</c:v>
+                </c:pt>
+                <c:pt idx="3">
+                  <c:v>VAT (7.5%)</c:v>
+                </c:pt>
+                <c:pt idx="4">
+                  <c:v>Clearing and port</c:v>
+                </c:pt>
+                <c:pt idx="5">
+                  <c:v>Local transport</c:v>
+                </c:pt>
+                <c:pt idx="6">
+                  <c:v>Bank charges</c:v>
+                </c:pt>
+              </c:strCache>
+            </c:strRef>
           </c:cat>
           <c:val>
             <c:numRef>
@@ -358,36 +398,23 @@
               </c:numCache>
             </c:numRef>
           </c:val>
+          <c:extLst>
+            <c:ext xmlns:c16="http://schemas.microsoft.com/office/drawing/2014/chart" uri="{C3380CC4-5D6E-409C-BE32-E72D297353CC}">
+              <c16:uniqueId val="{0000000E-3354-42B5-B244-9C8F96117357}"/>
+            </c:ext>
+          </c:extLst>
         </c:ser>
         <c:dLbls>
-          <c:numFmt formatCode="#,##0" sourceLinked="0"/>
-          <c:txPr>
-            <a:bodyPr/>
-            <a:lstStyle/>
-            <a:p>
-              <a:pPr>
-                <a:defRPr b="0" i="0" strike="noStrike" sz="1100" u="none">
-                  <a:solidFill>
-                    <a:srgbClr val="0B1F3A"/>
-                  </a:solidFill>
-                  <a:latin typeface="+mn-lt"/>
-                </a:defRPr>
-              </a:pPr>
-            </a:p>
-          </c:txPr>
           <c:showLegendKey val="0"/>
           <c:showVal val="1"/>
           <c:showCatName val="0"/>
           <c:showSerName val="0"/>
           <c:showPercent val="0"/>
           <c:showBubbleSize val="0"/>
-          <c:showLeaderLines val="0"/>
         </c:dLbls>
         <c:gapWidth val="35"/>
-        <c:overlap val="0"/>
         <c:axId val="2094734554"/>
         <c:axId val="2094734552"/>
-        <c:axId val="2094734556"/>
       </c:barChart>
       <c:catAx>
         <c:axId val="2094734554"/>
@@ -428,6 +455,7 @@
         <c:crosses val="autoZero"/>
         <c:auto val="1"/>
         <c:lblAlgn val="ctr"/>
+        <c:lblOffset val="100"/>
         <c:noMultiLvlLbl val="1"/>
       </c:catAx>
       <c:valAx>
@@ -437,35 +465,11 @@
           <c:max val="1750000"/>
         </c:scaling>
         <c:delete val="1"/>
-        <c:axPos val="b"/>
+        <c:axPos val="t"/>
         <c:numFmt formatCode="General" sourceLinked="0"/>
         <c:majorTickMark val="out"/>
         <c:minorTickMark val="none"/>
         <c:tickLblPos val="low"/>
-        <c:spPr>
-          <a:ln w="12700" cap="flat">
-            <a:solidFill>
-              <a:srgbClr val="888888"/>
-            </a:solidFill>
-            <a:prstDash val="solid"/>
-            <a:round/>
-          </a:ln>
-        </c:spPr>
-        <c:txPr>
-          <a:bodyPr/>
-          <a:lstStyle/>
-          <a:p>
-            <a:pPr>
-              <a:defRPr sz="1200" b="0" i="0" u="none" strike="noStrike">
-                <a:solidFill>
-                  <a:srgbClr val="000000"/>
-                </a:solidFill>
-                <a:latin typeface="Arial"/>
-              </a:defRPr>
-            </a:pPr>
-            <a:endParaRPr lang="en-US"/>
-          </a:p>
-        </c:txPr>
         <c:crossAx val="2094734554"/>
         <c:crosses val="autoZero"/>
         <c:crossBetween val="between"/>
@@ -480,6 +484,7 @@
     </c:plotArea>
     <c:plotVisOnly val="1"/>
     <c:dispBlanksAs val="span"/>
+    <c:showDLblsOverMax val="1"/>
   </c:chart>
   <c:spPr>
     <a:noFill/>
@@ -516,234 +521,10 @@
           <a:chExt cx="0" cy="0"/>
         </a:xfrm>
       </p:grpSpPr>
-      <p:sp>
-        <p:nvSpPr>
-          <p:cNvPr id="2" name="Header Placeholder 1"/>
-          <p:cNvSpPr>
-            <a:spLocks noGrp="1"/>
-          </p:cNvSpPr>
-          <p:nvPr>
-            <p:ph type="hdr" sz="quarter"/>
-          </p:nvPr>
-        </p:nvSpPr>
-        <p:spPr>
-          <a:xfrm>
-            <a:off x="0" y="0"/>
-            <a:ext cx="2971800" cy="458788"/>
-          </a:xfrm>
-          <a:prstGeom prst="rect">
-            <a:avLst/>
-          </a:prstGeom>
-        </p:spPr>
-        <p:txBody>
-          <a:bodyPr vert="horz" lIns="91440" tIns="45720" rIns="91440" bIns="45720" rtlCol="0"/>
-          <a:lstStyle>
-            <a:lvl1pPr algn="l">
-              <a:defRPr sz="1200"/>
-            </a:lvl1pPr>
-          </a:lstStyle>
-          <a:p>
-            <a:endParaRPr lang="en-US"/>
-          </a:p>
-        </p:txBody>
-      </p:sp>
-      <p:sp>
-        <p:nvSpPr>
-          <p:cNvPr id="3" name="Date Placeholder 2"/>
-          <p:cNvSpPr>
-            <a:spLocks noGrp="1"/>
-          </p:cNvSpPr>
-          <p:nvPr>
-            <p:ph type="dt" idx="1"/>
-          </p:nvPr>
-        </p:nvSpPr>
-        <p:spPr>
-          <a:xfrm>
-            <a:off x="3884613" y="0"/>
-            <a:ext cx="2971800" cy="458788"/>
-          </a:xfrm>
-          <a:prstGeom prst="rect">
-            <a:avLst/>
-          </a:prstGeom>
-        </p:spPr>
-        <p:txBody>
-          <a:bodyPr vert="horz" lIns="91440" tIns="45720" rIns="91440" bIns="45720" rtlCol="0"/>
-          <a:lstStyle>
-            <a:lvl1pPr algn="r">
-              <a:defRPr sz="1200"/>
-            </a:lvl1pPr>
-          </a:lstStyle>
-          <a:p>
-            <a:fld id="{5282F153-3F37-0F45-9E97-73ACFA13230C}" type="datetimeFigureOut">
-              <a:rPr lang="en-US"/>
-              <a:t>7/23/19</a:t>
-            </a:fld>
-            <a:endParaRPr lang="en-US"/>
-          </a:p>
-        </p:txBody>
-      </p:sp>
-      <p:sp>
-        <p:nvSpPr>
-          <p:cNvPr id="4" name="Slide Image Placeholder 3"/>
-          <p:cNvSpPr>
-            <a:spLocks noGrp="1" noRot="1" noChangeAspect="1"/>
-          </p:cNvSpPr>
-          <p:nvPr>
-            <p:ph type="sldImg" idx="2"/>
-          </p:nvPr>
-        </p:nvSpPr>
-        <p:spPr>
-          <a:xfrm>
-            <a:off x="685800" y="1143000"/>
-            <a:ext cx="5486400" cy="3086100"/>
-          </a:xfrm>
-          <a:prstGeom prst="rect">
-            <a:avLst/>
-          </a:prstGeom>
-          <a:noFill/>
-          <a:ln w="12700">
-            <a:solidFill>
-              <a:prstClr val="black"/>
-            </a:solidFill>
-          </a:ln>
-        </p:spPr>
-        <p:txBody>
-          <a:bodyPr vert="horz" lIns="91440" tIns="45720" rIns="91440" bIns="45720" rtlCol="0" anchor="ctr"/>
-          <a:lstStyle/>
-          <a:p>
-            <a:endParaRPr lang="en-US"/>
-          </a:p>
-        </p:txBody>
-      </p:sp>
-      <p:sp>
-        <p:nvSpPr>
-          <p:cNvPr id="5" name="Notes Placeholder 4"/>
-          <p:cNvSpPr>
-            <a:spLocks noGrp="1"/>
-          </p:cNvSpPr>
-          <p:nvPr>
-            <p:ph type="body" sz="quarter" idx="3"/>
-          </p:nvPr>
-        </p:nvSpPr>
-        <p:spPr>
-          <a:xfrm>
-            <a:off x="685800" y="4400550"/>
-            <a:ext cx="5486400" cy="3600450"/>
-          </a:xfrm>
-          <a:prstGeom prst="rect">
-            <a:avLst/>
-          </a:prstGeom>
-        </p:spPr>
-        <p:txBody>
-          <a:bodyPr vert="horz" lIns="91440" tIns="45720" rIns="91440" bIns="45720" rtlCol="0"/>
-          <a:lstStyle/>
-          <a:p>
-            <a:pPr lvl="0"/>
-            <a:r>
-              <a:rPr lang="en-US"/>
-              <a:t>Click to edit Master text styles</a:t>
-            </a:r>
-          </a:p>
-          <a:p>
-            <a:pPr lvl="1"/>
-            <a:r>
-              <a:rPr lang="en-US"/>
-              <a:t>Second level</a:t>
-            </a:r>
-          </a:p>
-          <a:p>
-            <a:pPr lvl="2"/>
-            <a:r>
-              <a:rPr lang="en-US"/>
-              <a:t>Third level</a:t>
-            </a:r>
-          </a:p>
-          <a:p>
-            <a:pPr lvl="3"/>
-            <a:r>
-              <a:rPr lang="en-US"/>
-              <a:t>Fourth level</a:t>
-            </a:r>
-          </a:p>
-          <a:p>
-            <a:pPr lvl="4"/>
-            <a:r>
-              <a:rPr lang="en-US"/>
-              <a:t>Fifth level</a:t>
-            </a:r>
-          </a:p>
-        </p:txBody>
-      </p:sp>
-      <p:sp>
-        <p:nvSpPr>
-          <p:cNvPr id="6" name="Footer Placeholder 5"/>
-          <p:cNvSpPr>
-            <a:spLocks noGrp="1"/>
-          </p:cNvSpPr>
-          <p:nvPr>
-            <p:ph type="ftr" sz="quarter" idx="4"/>
-          </p:nvPr>
-        </p:nvSpPr>
-        <p:spPr>
-          <a:xfrm>
-            <a:off x="0" y="8685213"/>
-            <a:ext cx="2971800" cy="458787"/>
-          </a:xfrm>
-          <a:prstGeom prst="rect">
-            <a:avLst/>
-          </a:prstGeom>
-        </p:spPr>
-        <p:txBody>
-          <a:bodyPr vert="horz" lIns="91440" tIns="45720" rIns="91440" bIns="45720" rtlCol="0" anchor="b"/>
-          <a:lstStyle>
-            <a:lvl1pPr algn="l">
-              <a:defRPr sz="1200"/>
-            </a:lvl1pPr>
-          </a:lstStyle>
-          <a:p>
-            <a:endParaRPr lang="en-US"/>
-          </a:p>
-        </p:txBody>
-      </p:sp>
-      <p:sp>
-        <p:nvSpPr>
-          <p:cNvPr id="7" name="Slide Number Placeholder 6"/>
-          <p:cNvSpPr>
-            <a:spLocks noGrp="1"/>
-          </p:cNvSpPr>
-          <p:nvPr>
-            <p:ph type="sldNum" sz="quarter" idx="5"/>
-          </p:nvPr>
-        </p:nvSpPr>
-        <p:spPr>
-          <a:xfrm>
-            <a:off x="3884613" y="8685213"/>
-            <a:ext cx="2971800" cy="458787"/>
-          </a:xfrm>
-          <a:prstGeom prst="rect">
-            <a:avLst/>
-          </a:prstGeom>
-        </p:spPr>
-        <p:txBody>
-          <a:bodyPr vert="horz" lIns="91440" tIns="45720" rIns="91440" bIns="45720" rtlCol="0" anchor="b"/>
-          <a:lstStyle>
-            <a:lvl1pPr algn="r">
-              <a:defRPr sz="1200"/>
-            </a:lvl1pPr>
-          </a:lstStyle>
-          <a:p>
-            <a:fld id="{CE5E9CC1-C706-0F49-92D6-E571CC5EEA8F}" type="slidenum">
-              <a:rPr lang="en-US"/>
-              <a:t>‹#›</a:t>
-            </a:fld>
-            <a:endParaRPr lang="en-US"/>
-          </a:p>
-        </p:txBody>
-      </p:sp>
     </p:spTree>
     <p:extLst>
       <p:ext uri="{BB962C8B-B14F-4D97-AF65-F5344CB8AC3E}">
-        <p14:creationId xmlns:p14="http://schemas.microsoft.com/office/powerpoint/2010/main" val="1024086991"/>
+        <p14:creationId xmlns:p14="http://schemas.microsoft.com/office/powerpoint/2010/main" val="3944118223"/>
       </p:ext>
     </p:extLst>
   </p:cSld>
@@ -899,7 +680,6 @@
 So, are we ready? Let us begin with a story.
 [Click to the next slide.]</a:t>
             </a:r>
-            <a:endParaRPr lang="en-US" dirty="0"/>
           </a:p>
         </p:txBody>
       </p:sp>
@@ -993,7 +773,6 @@
 Here is my advice. For your first mini import, start with Alibaba and a small sample order. But treat Alibaba as a directory, not a guarantee. The platform lists suppliers. It does not make every one of them honest or good.
 And look at the line at the bottom. Shortlist three to five suppliers, and send every one of them the same enquiry. That way you can compare them fairly. Never message one supplier and accept the first price.</a:t>
             </a:r>
-            <a:endParaRPr lang="en-US" dirty="0"/>
           </a:p>
         </p:txBody>
       </p:sp>
@@ -1090,7 +869,6 @@
 [Pause.]
 Remember, always open the company profile, not just the product page.</a:t>
             </a:r>
-            <a:endParaRPr lang="en-US" dirty="0"/>
           </a:p>
         </p:txBody>
       </p:sp>
@@ -1185,7 +963,6 @@
 [Pause. Look around the room.]
 I would rather you lose a week asking questions than lose your savings in one transfer. A good supplier will never be offended by careful questions.</a:t>
             </a:r>
-            <a:endParaRPr lang="en-US" dirty="0"/>
           </a:p>
         </p:txBody>
       </p:sp>
@@ -1280,7 +1057,6 @@
 And look at typical payment terms: thirty percent deposit, and seventy percent before shipment, or against a copy of the bill of lading. That way, you can inspect or see proof of shipment before you pay the balance.
 One last tip: be polite and patient. Pressure often makes suppliers cut quality instead of price.</a:t>
             </a:r>
-            <a:endParaRPr lang="en-US" dirty="0"/>
           </a:p>
         </p:txBody>
       </p:sp>
@@ -1375,7 +1151,6 @@
 For your first mini import of light goods, air cargo is often the practical choice. As your volumes grow, sea freight will bring your cost per unit down.
 Two cautions. First, prices and times change often, so always get a current quote. Second, make sure that when you compare quotes from different freight forwarders, they are built the same way. One may include delivery to your door and another may stop at the airport. If you compare those two, you are not comparing like with like.</a:t>
             </a:r>
-            <a:endParaRPr lang="en-US" dirty="0"/>
           </a:p>
         </p:txBody>
       </p:sp>
@@ -1474,7 +1249,6 @@
 [Pause.]
 One more point. Some carriers use slightly different divisors, so always ask how your quote is calculated. If time allows, ask people to try it now with a box they know.</a:t>
             </a:r>
-            <a:endParaRPr lang="en-US" dirty="0"/>
           </a:p>
         </p:txBody>
       </p:sp>
@@ -1569,7 +1343,6 @@
 Now the golden rule, and it is at the bottom. All the documents must match. The names, the addresses, the quantities, the weights, the descriptions and the values. The most common reason for delay and fines is a mismatch.
 And please hear this clearly. Never agree to understate the value of your goods, or to change the description on an invoice, to pay less duty. That is an offence. It can lead to seizure of your goods and penalties, and it makes every future shipment harder.</a:t>
             </a:r>
-            <a:endParaRPr lang="en-US" dirty="0"/>
           </a:p>
         </p:txBody>
       </p:sp>
@@ -1664,7 +1437,6 @@
 One warning. Rates change. In today's examples I am using teaching rates. For your real goods, always confirm the current rate for your HS code, and do not trust a number from a video or a friend.
 And the photo on the right is a customs officer inspecting goods. Some shipments are examined when they arrive, so be ready and answer your agent quickly.</a:t>
             </a:r>
-            <a:endParaRPr lang="en-US" dirty="0"/>
           </a:p>
         </p:txBody>
       </p:sp>
@@ -1761,7 +1533,6 @@
 [Pause.]
 And please remember, requirements change. Always confirm the current rules with Customs and the agency that covers your product before you ship.</a:t>
             </a:r>
-            <a:endParaRPr lang="en-US" dirty="0"/>
           </a:p>
         </p:txBody>
       </p:sp>
@@ -1861,7 +1632,6 @@
 Remember the number we saw on the supplier's page? About four thousand, five hundred. The real cost is about sixty-five percent higher. That is why we count.
 And a reminder: these rates are for teaching. For your own goods, use the current rates.</a:t>
             </a:r>
-            <a:endParaRPr lang="en-US" dirty="0"/>
           </a:p>
         </p:txBody>
       </p:sp>
@@ -1958,7 +1728,6 @@
 [Ask the room. Take three or four answers. Thank each person. Write the answers on a board if you have one: fraud, delay, customs, damage, wrong product.]
 Good. Hold on to all of those answers. By the end of today, we will have an answer to every one of them. Let us move on.</a:t>
             </a:r>
-            <a:endParaRPr lang="en-US" dirty="0"/>
           </a:p>
         </p:txBody>
       </p:sp>
@@ -2054,7 +1823,6 @@
 You are right. First, compare freight quotes from several forwarders. Second, confirm the HS code, so you do not pay the wrong duty. Third, order enough units to spread the fixed charges, like clearing fees, over more items. And fourth, collect your goods before storage fees start.
 Notice that you cannot change the product cost much, and you cannot change the tax rate. But you can control the freight, the delays and the planning. That is where smart importers save money.</a:t>
             </a:r>
-            <a:endParaRPr lang="en-US" dirty="0"/>
           </a:p>
         </p:txBody>
       </p:sp>
@@ -2150,7 +1918,6 @@
 [Point to the pink bar.]
 And one important warning. A thirty-five percent margin is not thirty-five percent profit in your pocket. You still have to pay for marketing, packaging, delivery and your own time. So keep some room.</a:t>
             </a:r>
-            <a:endParaRPr lang="en-US" dirty="0"/>
           </a:p>
         </p:txBody>
       </p:sp>
@@ -2246,7 +2013,6 @@
 So wholesale moves stock fast and frees up your money, so you can reorder. Retail earns more per unit but is slower. A smart importer uses both.
 And one last thing. Do not put all your profit back into one slow product. Keep some cash ready for the next order.</a:t>
             </a:r>
-            <a:endParaRPr lang="en-US" dirty="0"/>
           </a:p>
         </p:txBody>
       </p:sp>
@@ -2341,7 +2107,6 @@
 If you are making any of these, you are already halfway there.
 One note. Export rules, agencies and incentives change. So before you ship anything out, confirm the current requirements with the Nigerian Export Promotion Council and with Customs. We have a full lesson on this in the course.</a:t>
             </a:r>
-            <a:endParaRPr lang="en-US" dirty="0"/>
           </a:p>
         </p:txBody>
       </p:sp>
@@ -2437,7 +2202,6 @@
 [Look around the room.]
 The people who fail at importing are usually not the ones who made small mistakes. They are the ones who went big before they understood the process.</a:t>
             </a:r>
-            <a:endParaRPr lang="en-US" dirty="0"/>
           </a:p>
         </p:txBody>
       </p:sp>
@@ -2536,7 +2300,6 @@
 When you finish, swap with the person next to you. Your job is to find the weakest assumption in their plan. Is the competitor price realistic? Did they forget a cost? This is how professionals check each other.
 [After thirty minutes, ask two or three people to share.] Who would like to tell us: did your margin survive? Was there a surprise?</a:t>
             </a:r>
-            <a:endParaRPr lang="en-US" dirty="0"/>
           </a:p>
         </p:txBody>
       </p:sp>
@@ -2633,7 +2396,6 @@
 So be brave enough to test, and wise enough to stop when the numbers say stop.
 I believe many of you in this room can do this. You do not need to be rich or to know everyone. You need to be careful, to count everything, and to start small.</a:t>
             </a:r>
-            <a:endParaRPr lang="en-US" dirty="0"/>
           </a:p>
         </p:txBody>
       </p:sp>
@@ -2732,7 +2494,6 @@
 And if you want the lesson-by-lesson version, with practice tasks, calculators and a final business plan, the full course is at academy dot cloudtech analytics dot com. Everything we did today is in it, with more detail.
 Thank you, everyone. Well done today.</a:t>
             </a:r>
-            <a:endParaRPr lang="en-US" dirty="0"/>
           </a:p>
         </p:txBody>
       </p:sp>
@@ -2820,7 +2581,6 @@
               <a:rPr lang="en-US" dirty="0"/>
               <a:t>[This slide is not read aloud. It keeps the licence information for the photographs: all are from Wikimedia Commons, used under the licences shown, and the diagrams are original to CloudTech Academy. Leave it on screen at the end if anyone asks where the photos came from.]</a:t>
             </a:r>
-            <a:endParaRPr lang="en-US" dirty="0"/>
           </a:p>
         </p:txBody>
       </p:sp>
@@ -2917,7 +2677,6 @@
 If something I say is not clear, please stop me and ask. Somebody else is wondering the same thing, I promise you.
 Alright, let us start with the very basics.</a:t>
             </a:r>
-            <a:endParaRPr lang="en-US" dirty="0"/>
           </a:p>
         </p:txBody>
       </p:sp>
@@ -3013,7 +2772,6 @@
 [Pause.]
 If you remember one sentence from today, make it this one: the price on the supplier's page is never your real cost. We are going to come back to that sentence again and again.</a:t>
             </a:r>
-            <a:endParaRPr lang="en-US" dirty="0"/>
           </a:p>
         </p:txBody>
       </p:sp>
@@ -3107,7 +2865,6 @@
 Now look at the orange bar at the bottom. It is important. Mini does not mean exempt. Some beginners think, "My goods are small, so the rules do not apply to me." That is not true. Even small commercial imports for resale still need correct declarations.
 The good news is that a small first order is the best classroom you can have. In this business, we say your first order is tuition. You are going to learn, and you want to pay for that learning in small amounts, not big ones.</a:t>
             </a:r>
-            <a:endParaRPr lang="en-US" dirty="0"/>
           </a:p>
         </p:txBody>
       </p:sp>
@@ -3204,7 +2961,6 @@
 [Wait. Smile. Many hands will go up.]
 That is completely normal, and that is exactly why we are here. Later today, we will build this seven thousand, four hundred and twenty naira number line by line, so you can do it yourself.</a:t>
             </a:r>
-            <a:endParaRPr lang="en-US" dirty="0"/>
           </a:p>
         </p:txBody>
       </p:sp>
@@ -3299,7 +3055,6 @@
 [Pause.]
 So today, we are going to go through these steps in order, one at a time, and at each one I will tell you what to do and what usually goes wrong.</a:t>
             </a:r>
-            <a:endParaRPr lang="en-US" dirty="0"/>
           </a:p>
         </p:txBody>
       </p:sp>
@@ -3394,7 +3149,6 @@
 [Pause.]
 If nobody wants to pay a deposit, you have just saved yourself a lot of money.</a:t>
             </a:r>
-            <a:endParaRPr lang="en-US" dirty="0"/>
           </a:p>
         </p:txBody>
       </p:sp>
@@ -3487,7 +3241,6 @@
 [Point to the dark bar at the bottom.]
 And look at this note. Tunde's power banks contain lithium batteries. Airlines have strict rules about those. So before Tunde ships anything by air, he must ask his freight forwarder what is allowed. This is the kind of detail that nobody mentions on the supplier's website, and it can stop a shipment completely.</a:t>
             </a:r>
-            <a:endParaRPr lang="en-US" dirty="0"/>
           </a:p>
         </p:txBody>
       </p:sp>
@@ -3565,6 +3318,7 @@
         <a:solidFill>
           <a:srgbClr val="FFFFFF"/>
         </a:solidFill>
+        <a:effectLst/>
       </p:bgPr>
     </p:bg>
     <p:spTree>
@@ -3584,9 +3338,11 @@
       <p:sp>
         <p:nvSpPr>
           <p:cNvPr id="2" name="Text 0"/>
-          <p:cNvSpPr/>
+          <p:cNvSpPr>
+            <a:spLocks noGrp="1"/>
+          </p:cNvSpPr>
           <p:nvPr>
-            <p:ph idx="100" type="title" hasCustomPrompt="1"/>
+            <p:ph type="title" idx="100" hasCustomPrompt="1"/>
           </p:nvPr>
         </p:nvSpPr>
         <p:spPr>
@@ -3603,7 +3359,7 @@
         <p:txBody>
           <a:bodyPr wrap="square" rtlCol="0"/>
           <a:lstStyle>
-            <a:lvl1pPr algn="l" indent="0" marL="0">
+            <a:lvl1pPr marL="0" indent="0" algn="l">
               <a:buNone/>
               <a:defRPr lang="en-US" sz="2800" b="1" dirty="0">
                 <a:solidFill>
@@ -3613,7 +3369,7 @@
             </a:lvl1pPr>
           </a:lstStyle>
           <a:p>
-            <a:pPr algn="l" indent="0" marL="0">
+            <a:pPr marL="0" indent="0" algn="l">
               <a:buNone/>
             </a:pPr>
             <a:endParaRPr lang="en-US" sz="2800" dirty="0"/>
@@ -3641,7 +3397,7 @@
           <a:bodyPr wrap="square" lIns="0" tIns="0" rIns="0" bIns="0" rtlCol="0" anchor="ctr"/>
           <a:lstStyle/>
           <a:p>
-            <a:pPr indent="0" marL="0">
+            <a:pPr marL="0" indent="0">
               <a:buNone/>
             </a:pPr>
             <a:r>
@@ -3676,7 +3432,7 @@
           </a:prstGeom>
           <a:extLst>
             <a:ext uri="{C572A759-6A51-4108-AA02-DFA0A04FC94B}">
-              <ma14:wrappingTextBoxFlag xmlns:ma14="http://schemas.microsoft.com/office/mac/drawingml/2011/main" val="0"/>
+              <ma14:wrappingTextBoxFlag xmlns:ma14="http://schemas.microsoft.com/office/mac/drawingml/2011/main" xmlns="" val="0"/>
             </a:ext>
           </a:extLst>
         </p:spPr>
@@ -3694,8 +3450,8 @@
           <a:p>
             <a:pPr algn="r"/>
             <a:fld id="{F7021451-1387-4CA6-816F-3879F97B5CBC}" type="slidenum">
-              <a:rPr b="0" lang="en-US"/>
-              <a:t>1002</a:t>
+              <a:rPr lang="en-US" b="0"/>
+              <a:t>‹#›</a:t>
             </a:fld>
             <a:endParaRPr lang="en-US"/>
           </a:p>
@@ -3717,6 +3473,7 @@
         <a:solidFill>
           <a:srgbClr val="0B1F3A"/>
         </a:solidFill>
+        <a:effectLst/>
       </p:bgPr>
     </p:bg>
     <p:spTree>
@@ -3736,9 +3493,11 @@
       <p:sp>
         <p:nvSpPr>
           <p:cNvPr id="2" name="Text 0"/>
-          <p:cNvSpPr/>
+          <p:cNvSpPr>
+            <a:spLocks noGrp="1"/>
+          </p:cNvSpPr>
           <p:nvPr>
-            <p:ph idx="100" type="title" hasCustomPrompt="1"/>
+            <p:ph type="title" idx="100" hasCustomPrompt="1"/>
           </p:nvPr>
         </p:nvSpPr>
         <p:spPr>
@@ -3755,7 +3514,7 @@
         <p:txBody>
           <a:bodyPr wrap="square" rtlCol="0"/>
           <a:lstStyle>
-            <a:lvl1pPr algn="l" indent="0" marL="0">
+            <a:lvl1pPr marL="0" indent="0" algn="l">
               <a:buNone/>
               <a:defRPr lang="en-US" sz="2800" b="1" dirty="0">
                 <a:solidFill>
@@ -3765,7 +3524,7 @@
             </a:lvl1pPr>
           </a:lstStyle>
           <a:p>
-            <a:pPr algn="l" indent="0" marL="0">
+            <a:pPr marL="0" indent="0" algn="l">
               <a:buNone/>
             </a:pPr>
             <a:endParaRPr lang="en-US" sz="2800" dirty="0"/>
@@ -3793,7 +3552,7 @@
           <a:bodyPr wrap="square" lIns="0" tIns="0" rIns="0" bIns="0" rtlCol="0" anchor="ctr"/>
           <a:lstStyle/>
           <a:p>
-            <a:pPr indent="0" marL="0">
+            <a:pPr marL="0" indent="0">
               <a:buNone/>
             </a:pPr>
             <a:r>
@@ -3828,7 +3587,7 @@
           </a:prstGeom>
           <a:extLst>
             <a:ext uri="{C572A759-6A51-4108-AA02-DFA0A04FC94B}">
-              <ma14:wrappingTextBoxFlag xmlns:ma14="http://schemas.microsoft.com/office/mac/drawingml/2011/main" val="0"/>
+              <ma14:wrappingTextBoxFlag xmlns:ma14="http://schemas.microsoft.com/office/mac/drawingml/2011/main" xmlns="" val="0"/>
             </a:ext>
           </a:extLst>
         </p:spPr>
@@ -3846,8 +3605,8 @@
           <a:p>
             <a:pPr algn="r"/>
             <a:fld id="{F7021451-1387-4CA6-816F-3879F97B5CBC}" type="slidenum">
-              <a:rPr b="0" lang="en-US"/>
-              <a:t>1003</a:t>
+              <a:rPr lang="en-US" b="0"/>
+              <a:t>‹#›</a:t>
             </a:fld>
             <a:endParaRPr lang="en-US"/>
           </a:p>
@@ -3869,6 +3628,7 @@
         <a:solidFill>
           <a:srgbClr val="FFFFFF"/>
         </a:solidFill>
+        <a:effectLst/>
       </p:bgPr>
     </p:bg>
     <p:spTree>
@@ -3888,9 +3648,11 @@
       <p:sp>
         <p:nvSpPr>
           <p:cNvPr id="2" name="Text 0"/>
-          <p:cNvSpPr/>
+          <p:cNvSpPr>
+            <a:spLocks noGrp="1"/>
+          </p:cNvSpPr>
           <p:nvPr>
-            <p:ph idx="100" type="title" hasCustomPrompt="1"/>
+            <p:ph type="title" idx="100" hasCustomPrompt="1"/>
           </p:nvPr>
         </p:nvSpPr>
         <p:spPr>
@@ -3907,7 +3669,7 @@
         <p:txBody>
           <a:bodyPr wrap="square" rtlCol="0"/>
           <a:lstStyle>
-            <a:lvl1pPr algn="l" indent="0" marL="0">
+            <a:lvl1pPr marL="0" indent="0" algn="l">
               <a:buNone/>
               <a:defRPr lang="en-US" sz="2800" b="1" dirty="0">
                 <a:solidFill>
@@ -3917,7 +3679,7 @@
             </a:lvl1pPr>
           </a:lstStyle>
           <a:p>
-            <a:pPr algn="l" indent="0" marL="0">
+            <a:pPr marL="0" indent="0" algn="l">
               <a:buNone/>
             </a:pPr>
             <a:endParaRPr lang="en-US" sz="2800" dirty="0"/>
@@ -3944,7 +3706,7 @@
           </a:prstGeom>
           <a:extLst>
             <a:ext uri="{C572A759-6A51-4108-AA02-DFA0A04FC94B}">
-              <ma14:wrappingTextBoxFlag xmlns:ma14="http://schemas.microsoft.com/office/mac/drawingml/2011/main" val="0"/>
+              <ma14:wrappingTextBoxFlag xmlns:ma14="http://schemas.microsoft.com/office/mac/drawingml/2011/main" xmlns="" val="0"/>
             </a:ext>
           </a:extLst>
         </p:spPr>
@@ -3962,8 +3724,8 @@
           <a:p>
             <a:pPr algn="r"/>
             <a:fld id="{F7021451-1387-4CA6-816F-3879F97B5CBC}" type="slidenum">
-              <a:rPr b="0" lang="en-US"/>
-              <a:t>1004</a:t>
+              <a:rPr lang="en-US" b="0"/>
+              <a:t>‹#›</a:t>
             </a:fld>
             <a:endParaRPr lang="en-US"/>
           </a:p>
@@ -3985,6 +3747,7 @@
         <a:solidFill>
           <a:srgbClr val="0B1F3A"/>
         </a:solidFill>
+        <a:effectLst/>
       </p:bgPr>
     </p:bg>
     <p:spTree>
@@ -4012,6 +3775,11 @@
 <file path=ppt/slideMasters/slideMaster1.xml><?xml version="1.0" encoding="utf-8"?>
 <p:sldMaster xmlns:a="http://schemas.openxmlformats.org/drawingml/2006/main" xmlns:r="http://schemas.openxmlformats.org/officeDocument/2006/relationships" xmlns:p="http://schemas.openxmlformats.org/presentationml/2006/main">
   <p:cSld>
+    <p:bg>
+      <p:bgRef idx="1001">
+        <a:schemeClr val="bg1"/>
+      </p:bgRef>
+    </p:bg>
     <p:spTree>
       <p:nvGrpSpPr>
         <p:cNvPr id="1" name=""/>
@@ -4046,7 +3814,7 @@
           </a:prstGeom>
           <a:extLst>
             <a:ext uri="{C572A759-6A51-4108-AA02-DFA0A04FC94B}">
-              <ma14:wrappingTextBoxFlag xmlns:ma14="http://schemas.microsoft.com/office/mac/drawingml/2011/main" val="0"/>
+              <ma14:wrappingTextBoxFlag xmlns:ma14="http://schemas.microsoft.com/office/mac/drawingml/2011/main" xmlns="" val="0"/>
             </a:ext>
           </a:extLst>
         </p:spPr>
@@ -4064,8 +3832,8 @@
           <a:p>
             <a:pPr algn="r"/>
             <a:fld id="{F7021451-1387-4CA6-816F-3879F97B5CBC}" type="slidenum">
-              <a:rPr b="0" lang="en-US"/>
-              <a:t>null</a:t>
+              <a:rPr lang="en-US" b="0"/>
+              <a:t>‹#›</a:t>
             </a:fld>
             <a:endParaRPr lang="en-US"/>
           </a:p>
@@ -4354,14 +4122,14 @@
       </p:grpSpPr>
       <p:pic>
         <p:nvPicPr>
-          <p:cNvPr id="3" name="Container terminal seen from the air" descr="Container terminal seen from the air">    </p:cNvPr>
+          <p:cNvPr id="3" name="Container terminal seen from the air" descr="Container terminal seen from the air"/>
           <p:cNvPicPr>
             <a:picLocks noChangeAspect="1"/>
           </p:cNvPicPr>
           <p:nvPr/>
         </p:nvPicPr>
         <p:blipFill>
-          <a:blip r:embed="rId1"/>
+          <a:blip r:embed="rId3"/>
           <a:stretch>
             <a:fillRect/>
           </a:stretch>
@@ -4424,11 +4192,11 @@
           <a:bodyPr wrap="square" lIns="0" tIns="0" rIns="0" bIns="0" rtlCol="0" anchor="t"/>
           <a:lstStyle/>
           <a:p>
-            <a:pPr indent="0" marL="0">
-              <a:buNone/>
-            </a:pPr>
-            <a:r>
-              <a:rPr lang="en-US" sz="1400" b="1" spc="400" kern="0" dirty="0">
+            <a:pPr marL="0" indent="0">
+              <a:buNone/>
+            </a:pPr>
+            <a:r>
+              <a:rPr lang="en-US" sz="1400" b="1" kern="0" spc="400" dirty="0">
                 <a:solidFill>
                   <a:schemeClr val="accent1"/>
                 </a:solidFill>
@@ -4460,7 +4228,7 @@
           <a:bodyPr wrap="square" lIns="0" tIns="0" rIns="0" bIns="0" rtlCol="0" anchor="t"/>
           <a:lstStyle/>
           <a:p>
-            <a:pPr indent="0" marL="0">
+            <a:pPr marL="0" indent="0">
               <a:buNone/>
             </a:pPr>
             <a:r>
@@ -4499,7 +4267,7 @@
           <a:bodyPr wrap="square" lIns="0" tIns="0" rIns="0" bIns="0" rtlCol="0" anchor="t"/>
           <a:lstStyle/>
           <a:p>
-            <a:pPr indent="0" marL="0">
+            <a:pPr marL="0" indent="0">
               <a:buNone/>
             </a:pPr>
             <a:r>
@@ -4538,7 +4306,7 @@
           <a:bodyPr wrap="square" lIns="0" tIns="0" rIns="0" bIns="0" rtlCol="0" anchor="t"/>
           <a:lstStyle/>
           <a:p>
-            <a:pPr indent="0" marL="0">
+            <a:pPr marL="0" indent="0">
               <a:buNone/>
             </a:pPr>
             <a:r>
@@ -4581,9 +4349,11 @@
       <p:sp>
         <p:nvSpPr>
           <p:cNvPr id="2" name="Text 0"/>
-          <p:cNvSpPr/>
+          <p:cNvSpPr>
+            <a:spLocks noGrp="1"/>
+          </p:cNvSpPr>
           <p:nvPr>
-            <p:ph idx="100" type="title" hasCustomPrompt="1"/>
+            <p:ph type="title" idx="100" hasCustomPrompt="1"/>
           </p:nvPr>
         </p:nvSpPr>
         <p:spPr>
@@ -4601,7 +4371,7 @@
           <a:bodyPr wrap="square" lIns="0" tIns="0" rIns="0" bIns="0" rtlCol="0" anchor="ctr"/>
           <a:lstStyle/>
           <a:p>
-            <a:pPr algn="l" indent="0" marL="0">
+            <a:pPr marL="0" indent="0" algn="l">
               <a:buNone/>
             </a:pPr>
             <a:r>
@@ -4618,14 +4388,14 @@
       </p:sp>
       <p:pic>
         <p:nvPicPr>
-          <p:cNvPr id="4" name="Yiwu International Trade Market, China" descr="Yiwu International Trade Market, China">    </p:cNvPr>
+          <p:cNvPr id="4" name="Yiwu International Trade Market, China" descr="Yiwu International Trade Market, China"/>
           <p:cNvPicPr>
             <a:picLocks noChangeAspect="1"/>
           </p:cNvPicPr>
           <p:nvPr/>
         </p:nvPicPr>
         <p:blipFill>
-          <a:blip r:embed="rId1"/>
+          <a:blip r:embed="rId3"/>
           <a:stretch>
             <a:fillRect/>
           </a:stretch>
@@ -4661,7 +4431,7 @@
           <a:bodyPr wrap="square" lIns="0" tIns="0" rIns="0" bIns="0" rtlCol="0" anchor="t"/>
           <a:lstStyle/>
           <a:p>
-            <a:pPr indent="0" marL="0">
+            <a:pPr marL="0" indent="0">
               <a:buNone/>
             </a:pPr>
             <a:r>
@@ -4724,7 +4494,7 @@
           <a:bodyPr wrap="square" lIns="0" tIns="0" rIns="0" bIns="0" rtlCol="0" anchor="ctr"/>
           <a:lstStyle/>
           <a:p>
-            <a:pPr indent="0" marL="0">
+            <a:pPr marL="0" indent="0">
               <a:buNone/>
             </a:pPr>
             <a:r>
@@ -4760,7 +4530,7 @@
           <a:bodyPr wrap="square" lIns="0" tIns="0" rIns="0" bIns="0" rtlCol="0" anchor="ctr"/>
           <a:lstStyle/>
           <a:p>
-            <a:pPr indent="0" marL="0">
+            <a:pPr marL="0" indent="0">
               <a:buNone/>
             </a:pPr>
             <a:r>
@@ -4823,7 +4593,7 @@
           <a:bodyPr wrap="square" lIns="0" tIns="0" rIns="0" bIns="0" rtlCol="0" anchor="ctr"/>
           <a:lstStyle/>
           <a:p>
-            <a:pPr indent="0" marL="0">
+            <a:pPr marL="0" indent="0">
               <a:buNone/>
             </a:pPr>
             <a:r>
@@ -4859,7 +4629,7 @@
           <a:bodyPr wrap="square" lIns="0" tIns="0" rIns="0" bIns="0" rtlCol="0" anchor="ctr"/>
           <a:lstStyle/>
           <a:p>
-            <a:pPr indent="0" marL="0">
+            <a:pPr marL="0" indent="0">
               <a:buNone/>
             </a:pPr>
             <a:r>
@@ -4922,7 +4692,7 @@
           <a:bodyPr wrap="square" lIns="0" tIns="0" rIns="0" bIns="0" rtlCol="0" anchor="ctr"/>
           <a:lstStyle/>
           <a:p>
-            <a:pPr indent="0" marL="0">
+            <a:pPr marL="0" indent="0">
               <a:buNone/>
             </a:pPr>
             <a:r>
@@ -4958,7 +4728,7 @@
           <a:bodyPr wrap="square" lIns="0" tIns="0" rIns="0" bIns="0" rtlCol="0" anchor="ctr"/>
           <a:lstStyle/>
           <a:p>
-            <a:pPr indent="0" marL="0">
+            <a:pPr marL="0" indent="0">
               <a:buNone/>
             </a:pPr>
             <a:r>
@@ -5021,7 +4791,7 @@
           <a:bodyPr wrap="square" lIns="0" tIns="0" rIns="0" bIns="0" rtlCol="0" anchor="ctr"/>
           <a:lstStyle/>
           <a:p>
-            <a:pPr indent="0" marL="0">
+            <a:pPr marL="0" indent="0">
               <a:buNone/>
             </a:pPr>
             <a:r>
@@ -5057,7 +4827,7 @@
           <a:bodyPr wrap="square" lIns="0" tIns="0" rIns="0" bIns="0" rtlCol="0" anchor="ctr"/>
           <a:lstStyle/>
           <a:p>
-            <a:pPr indent="0" marL="0">
+            <a:pPr marL="0" indent="0">
               <a:buNone/>
             </a:pPr>
             <a:r>
@@ -5120,7 +4890,7 @@
           <a:bodyPr wrap="square" lIns="0" tIns="0" rIns="0" bIns="0" rtlCol="0" anchor="ctr"/>
           <a:lstStyle/>
           <a:p>
-            <a:pPr indent="0" marL="0">
+            <a:pPr marL="0" indent="0">
               <a:buNone/>
             </a:pPr>
             <a:r>
@@ -5156,7 +4926,7 @@
           <a:bodyPr wrap="square" lIns="0" tIns="0" rIns="0" bIns="0" rtlCol="0" anchor="ctr"/>
           <a:lstStyle/>
           <a:p>
-            <a:pPr indent="0" marL="0">
+            <a:pPr marL="0" indent="0">
               <a:buNone/>
             </a:pPr>
             <a:r>
@@ -5219,7 +4989,7 @@
           <a:bodyPr wrap="square" lIns="0" tIns="0" rIns="0" bIns="0" rtlCol="0" anchor="ctr"/>
           <a:lstStyle/>
           <a:p>
-            <a:pPr indent="0" marL="0">
+            <a:pPr marL="0" indent="0">
               <a:buNone/>
             </a:pPr>
             <a:r>
@@ -5255,7 +5025,7 @@
           <a:bodyPr wrap="square" lIns="0" tIns="0" rIns="0" bIns="0" rtlCol="0" anchor="ctr"/>
           <a:lstStyle/>
           <a:p>
-            <a:pPr indent="0" marL="0">
+            <a:pPr marL="0" indent="0">
               <a:buNone/>
             </a:pPr>
             <a:r>
@@ -5291,7 +5061,7 @@
           <a:bodyPr wrap="square" lIns="0" tIns="0" rIns="0" bIns="0" rtlCol="0" anchor="t"/>
           <a:lstStyle/>
           <a:p>
-            <a:pPr indent="0" marL="0">
+            <a:pPr marL="0" indent="0">
               <a:buNone/>
             </a:pPr>
             <a:r>
@@ -5326,7 +5096,7 @@
           </a:prstGeom>
           <a:extLst>
             <a:ext uri="{C572A759-6A51-4108-AA02-DFA0A04FC94B}">
-              <ma14:wrappingTextBoxFlag xmlns:ma14="http://schemas.microsoft.com/office/mac/drawingml/2011/main" val="0"/>
+              <ma14:wrappingTextBoxFlag xmlns:ma14="http://schemas.microsoft.com/office/mac/drawingml/2011/main" xmlns="" val="0"/>
             </a:ext>
           </a:extLst>
         </p:spPr>
@@ -5344,7 +5114,7 @@
           <a:p>
             <a:pPr algn="r"/>
             <a:fld id="{F7021451-1387-4CA6-816F-3879F97B5CBC}" type="slidenum">
-              <a:rPr b="0" lang="en-US"/>
+              <a:rPr lang="en-US" b="0"/>
               <a:t>10</a:t>
             </a:fld>
             <a:endParaRPr lang="en-US"/>
@@ -5379,9 +5149,11 @@
       <p:sp>
         <p:nvSpPr>
           <p:cNvPr id="2" name="Text 0"/>
-          <p:cNvSpPr/>
+          <p:cNvSpPr>
+            <a:spLocks noGrp="1"/>
+          </p:cNvSpPr>
           <p:nvPr>
-            <p:ph idx="100" type="title" hasCustomPrompt="1"/>
+            <p:ph type="title" idx="100" hasCustomPrompt="1"/>
           </p:nvPr>
         </p:nvSpPr>
         <p:spPr>
@@ -5399,7 +5171,7 @@
           <a:bodyPr wrap="square" lIns="0" tIns="0" rIns="0" bIns="0" rtlCol="0" anchor="ctr"/>
           <a:lstStyle/>
           <a:p>
-            <a:pPr algn="l" indent="0" marL="0">
+            <a:pPr marL="0" indent="0" algn="l">
               <a:buNone/>
             </a:pPr>
             <a:r>
@@ -5489,7 +5261,7 @@
           <a:bodyPr wrap="square" lIns="0" tIns="0" rIns="0" bIns="0" rtlCol="0" anchor="t"/>
           <a:lstStyle/>
           <a:p>
-            <a:pPr algn="ctr" indent="0" marL="0">
+            <a:pPr marL="0" indent="0" algn="ctr">
               <a:buNone/>
             </a:pPr>
             <a:r>
@@ -5525,7 +5297,7 @@
           <a:bodyPr wrap="square" lIns="0" tIns="0" rIns="0" bIns="0" rtlCol="0" anchor="t"/>
           <a:lstStyle/>
           <a:p>
-            <a:pPr indent="0" marL="0">
+            <a:pPr marL="0" indent="0">
               <a:buNone/>
             </a:pPr>
             <a:r>
@@ -5588,7 +5360,7 @@
           <a:bodyPr wrap="square" lIns="0" tIns="0" rIns="0" bIns="0" rtlCol="0" anchor="t"/>
           <a:lstStyle/>
           <a:p>
-            <a:pPr indent="0" marL="0">
+            <a:pPr marL="0" indent="0">
               <a:buNone/>
             </a:pPr>
             <a:r>
@@ -5624,7 +5396,7 @@
           <a:bodyPr wrap="square" lIns="0" tIns="0" rIns="0" bIns="0" rtlCol="0" anchor="t"/>
           <a:lstStyle/>
           <a:p>
-            <a:pPr algn="r" indent="0" marL="0">
+            <a:pPr marL="0" indent="0" algn="r">
               <a:buNone/>
             </a:pPr>
             <a:r>
@@ -5660,7 +5432,7 @@
           <a:bodyPr wrap="square" lIns="0" tIns="0" rIns="0" bIns="0" rtlCol="0" anchor="t"/>
           <a:lstStyle/>
           <a:p>
-            <a:pPr indent="0" marL="0">
+            <a:pPr marL="0" indent="0">
               <a:buNone/>
             </a:pPr>
             <a:r>
@@ -5696,7 +5468,7 @@
           <a:bodyPr wrap="square" lIns="0" tIns="0" rIns="0" bIns="0" rtlCol="0" anchor="t"/>
           <a:lstStyle/>
           <a:p>
-            <a:pPr algn="r" indent="0" marL="0">
+            <a:pPr marL="0" indent="0" algn="r">
               <a:buNone/>
             </a:pPr>
             <a:r>
@@ -5732,7 +5504,7 @@
           <a:bodyPr wrap="square" lIns="0" tIns="0" rIns="0" bIns="0" rtlCol="0" anchor="t"/>
           <a:lstStyle/>
           <a:p>
-            <a:pPr indent="0" marL="0">
+            <a:pPr marL="0" indent="0">
               <a:buNone/>
             </a:pPr>
             <a:r>
@@ -5768,7 +5540,7 @@
           <a:bodyPr wrap="square" lIns="0" tIns="0" rIns="0" bIns="0" rtlCol="0" anchor="t"/>
           <a:lstStyle/>
           <a:p>
-            <a:pPr algn="r" indent="0" marL="0">
+            <a:pPr marL="0" indent="0" algn="r">
               <a:buNone/>
             </a:pPr>
             <a:r>
@@ -5804,7 +5576,7 @@
           <a:bodyPr wrap="square" lIns="0" tIns="0" rIns="0" bIns="0" rtlCol="0" anchor="t"/>
           <a:lstStyle/>
           <a:p>
-            <a:pPr indent="0" marL="0">
+            <a:pPr marL="0" indent="0">
               <a:buNone/>
             </a:pPr>
             <a:r>
@@ -5840,7 +5612,7 @@
           <a:bodyPr wrap="square" lIns="0" tIns="0" rIns="0" bIns="0" rtlCol="0" anchor="t"/>
           <a:lstStyle/>
           <a:p>
-            <a:pPr indent="0" marL="0">
+            <a:pPr marL="0" indent="0">
               <a:buNone/>
             </a:pPr>
             <a:r>
@@ -5854,7 +5626,7 @@
             <a:endParaRPr lang="en-US" sz="1200" dirty="0"/>
           </a:p>
           <a:p>
-            <a:pPr indent="0" marL="0">
+            <a:pPr marL="0" indent="0">
               <a:buNone/>
             </a:pPr>
             <a:r>
@@ -5890,7 +5662,7 @@
           <a:bodyPr wrap="square" lIns="0" tIns="0" rIns="0" bIns="0" rtlCol="0" anchor="t"/>
           <a:lstStyle/>
           <a:p>
-            <a:pPr indent="0" marL="0">
+            <a:pPr marL="0" indent="0">
               <a:buNone/>
             </a:pPr>
             <a:r>
@@ -5926,7 +5698,7 @@
           <a:bodyPr wrap="square" lIns="0" tIns="0" rIns="0" bIns="0" rtlCol="0" anchor="t"/>
           <a:lstStyle/>
           <a:p>
-            <a:pPr indent="0" marL="0">
+            <a:pPr marL="0" indent="0">
               <a:buNone/>
             </a:pPr>
             <a:r>
@@ -5989,7 +5761,7 @@
           <a:bodyPr wrap="square" lIns="0" tIns="0" rIns="0" bIns="0" rtlCol="0" anchor="ctr"/>
           <a:lstStyle/>
           <a:p>
-            <a:pPr algn="ctr" indent="0" marL="0">
+            <a:pPr marL="0" indent="0" algn="ctr">
               <a:buNone/>
             </a:pPr>
             <a:r>
@@ -6050,7 +5822,7 @@
           <a:bodyPr wrap="square" lIns="0" tIns="0" rIns="0" bIns="0" rtlCol="0" anchor="ctr"/>
           <a:lstStyle/>
           <a:p>
-            <a:pPr algn="ctr" indent="0" marL="0">
+            <a:pPr marL="0" indent="0" algn="ctr">
               <a:buNone/>
             </a:pPr>
             <a:r>
@@ -6111,7 +5883,7 @@
           <a:bodyPr wrap="square" lIns="0" tIns="0" rIns="0" bIns="0" rtlCol="0" anchor="ctr"/>
           <a:lstStyle/>
           <a:p>
-            <a:pPr algn="ctr" indent="0" marL="0">
+            <a:pPr marL="0" indent="0" algn="ctr">
               <a:buNone/>
             </a:pPr>
             <a:r>
@@ -6172,7 +5944,7 @@
           <a:bodyPr wrap="square" lIns="0" tIns="0" rIns="0" bIns="0" rtlCol="0" anchor="ctr"/>
           <a:lstStyle/>
           <a:p>
-            <a:pPr algn="ctr" indent="0" marL="0">
+            <a:pPr marL="0" indent="0" algn="ctr">
               <a:buNone/>
             </a:pPr>
             <a:r>
@@ -6233,7 +6005,7 @@
           <a:bodyPr wrap="square" lIns="0" tIns="0" rIns="0" bIns="0" rtlCol="0" anchor="ctr"/>
           <a:lstStyle/>
           <a:p>
-            <a:pPr algn="ctr" indent="0" marL="0">
+            <a:pPr marL="0" indent="0" algn="ctr">
               <a:buNone/>
             </a:pPr>
             <a:r>
@@ -6294,7 +6066,7 @@
           <a:bodyPr wrap="square" lIns="0" tIns="0" rIns="0" bIns="0" rtlCol="0" anchor="ctr"/>
           <a:lstStyle/>
           <a:p>
-            <a:pPr algn="ctr" indent="0" marL="0">
+            <a:pPr marL="0" indent="0" algn="ctr">
               <a:buNone/>
             </a:pPr>
             <a:r>
@@ -6355,7 +6127,7 @@
           <a:bodyPr wrap="square" lIns="0" tIns="0" rIns="0" bIns="0" rtlCol="0" anchor="ctr"/>
           <a:lstStyle/>
           <a:p>
-            <a:pPr algn="ctr" indent="0" marL="0">
+            <a:pPr marL="0" indent="0" algn="ctr">
               <a:buNone/>
             </a:pPr>
             <a:r>
@@ -6416,7 +6188,7 @@
           <a:bodyPr wrap="square" lIns="0" tIns="0" rIns="0" bIns="0" rtlCol="0" anchor="ctr"/>
           <a:lstStyle/>
           <a:p>
-            <a:pPr algn="ctr" indent="0" marL="0">
+            <a:pPr marL="0" indent="0" algn="ctr">
               <a:buNone/>
             </a:pPr>
             <a:r>
@@ -6452,7 +6224,7 @@
           <a:bodyPr wrap="square" lIns="0" tIns="0" rIns="0" bIns="0" rtlCol="0" anchor="t"/>
           <a:lstStyle/>
           <a:p>
-            <a:pPr indent="0" marL="0">
+            <a:pPr marL="0" indent="0">
               <a:buNone/>
             </a:pPr>
             <a:r>
@@ -6466,7 +6238,7 @@
             <a:endParaRPr lang="en-US" sz="1400" dirty="0"/>
           </a:p>
           <a:p>
-            <a:pPr indent="0" marL="0">
+            <a:pPr marL="0" indent="0">
               <a:buNone/>
             </a:pPr>
             <a:r>
@@ -6527,7 +6299,7 @@
           <a:bodyPr wrap="square" lIns="0" tIns="0" rIns="0" bIns="0" rtlCol="0" anchor="ctr"/>
           <a:lstStyle/>
           <a:p>
-            <a:pPr algn="ctr" indent="0" marL="0">
+            <a:pPr marL="0" indent="0" algn="ctr">
               <a:buNone/>
             </a:pPr>
             <a:r>
@@ -6563,7 +6335,7 @@
           <a:bodyPr wrap="square" lIns="0" tIns="0" rIns="0" bIns="0" rtlCol="0" anchor="t"/>
           <a:lstStyle/>
           <a:p>
-            <a:pPr indent="0" marL="0">
+            <a:pPr marL="0" indent="0">
               <a:buNone/>
             </a:pPr>
             <a:r>
@@ -6577,7 +6349,7 @@
             <a:endParaRPr lang="en-US" sz="1400" dirty="0"/>
           </a:p>
           <a:p>
-            <a:pPr indent="0" marL="0">
+            <a:pPr marL="0" indent="0">
               <a:buNone/>
             </a:pPr>
             <a:r>
@@ -6638,7 +6410,7 @@
           <a:bodyPr wrap="square" lIns="0" tIns="0" rIns="0" bIns="0" rtlCol="0" anchor="ctr"/>
           <a:lstStyle/>
           <a:p>
-            <a:pPr algn="ctr" indent="0" marL="0">
+            <a:pPr marL="0" indent="0" algn="ctr">
               <a:buNone/>
             </a:pPr>
             <a:r>
@@ -6674,7 +6446,7 @@
           <a:bodyPr wrap="square" lIns="0" tIns="0" rIns="0" bIns="0" rtlCol="0" anchor="t"/>
           <a:lstStyle/>
           <a:p>
-            <a:pPr indent="0" marL="0">
+            <a:pPr marL="0" indent="0">
               <a:buNone/>
             </a:pPr>
             <a:r>
@@ -6688,7 +6460,7 @@
             <a:endParaRPr lang="en-US" sz="1400" dirty="0"/>
           </a:p>
           <a:p>
-            <a:pPr indent="0" marL="0">
+            <a:pPr marL="0" indent="0">
               <a:buNone/>
             </a:pPr>
             <a:r>
@@ -6749,7 +6521,7 @@
           <a:bodyPr wrap="square" lIns="0" tIns="0" rIns="0" bIns="0" rtlCol="0" anchor="ctr"/>
           <a:lstStyle/>
           <a:p>
-            <a:pPr algn="ctr" indent="0" marL="0">
+            <a:pPr marL="0" indent="0" algn="ctr">
               <a:buNone/>
             </a:pPr>
             <a:r>
@@ -6785,7 +6557,7 @@
           <a:bodyPr wrap="square" lIns="0" tIns="0" rIns="0" bIns="0" rtlCol="0" anchor="t"/>
           <a:lstStyle/>
           <a:p>
-            <a:pPr indent="0" marL="0">
+            <a:pPr marL="0" indent="0">
               <a:buNone/>
             </a:pPr>
             <a:r>
@@ -6799,7 +6571,7 @@
             <a:endParaRPr lang="en-US" sz="1400" dirty="0"/>
           </a:p>
           <a:p>
-            <a:pPr indent="0" marL="0">
+            <a:pPr marL="0" indent="0">
               <a:buNone/>
             </a:pPr>
             <a:r>
@@ -6860,7 +6632,7 @@
           <a:bodyPr wrap="square" lIns="0" tIns="0" rIns="0" bIns="0" rtlCol="0" anchor="ctr"/>
           <a:lstStyle/>
           <a:p>
-            <a:pPr algn="ctr" indent="0" marL="0">
+            <a:pPr marL="0" indent="0" algn="ctr">
               <a:buNone/>
             </a:pPr>
             <a:r>
@@ -6896,7 +6668,7 @@
           <a:bodyPr wrap="square" lIns="0" tIns="0" rIns="0" bIns="0" rtlCol="0" anchor="t"/>
           <a:lstStyle/>
           <a:p>
-            <a:pPr indent="0" marL="0">
+            <a:pPr marL="0" indent="0">
               <a:buNone/>
             </a:pPr>
             <a:r>
@@ -6910,7 +6682,7 @@
             <a:endParaRPr lang="en-US" sz="1400" dirty="0"/>
           </a:p>
           <a:p>
-            <a:pPr indent="0" marL="0">
+            <a:pPr marL="0" indent="0">
               <a:buNone/>
             </a:pPr>
             <a:r>
@@ -6971,7 +6743,7 @@
           <a:bodyPr wrap="square" lIns="0" tIns="0" rIns="0" bIns="0" rtlCol="0" anchor="ctr"/>
           <a:lstStyle/>
           <a:p>
-            <a:pPr algn="ctr" indent="0" marL="0">
+            <a:pPr marL="0" indent="0" algn="ctr">
               <a:buNone/>
             </a:pPr>
             <a:r>
@@ -7007,7 +6779,7 @@
           <a:bodyPr wrap="square" lIns="0" tIns="0" rIns="0" bIns="0" rtlCol="0" anchor="t"/>
           <a:lstStyle/>
           <a:p>
-            <a:pPr indent="0" marL="0">
+            <a:pPr marL="0" indent="0">
               <a:buNone/>
             </a:pPr>
             <a:r>
@@ -7021,7 +6793,7 @@
             <a:endParaRPr lang="en-US" sz="1400" dirty="0"/>
           </a:p>
           <a:p>
-            <a:pPr indent="0" marL="0">
+            <a:pPr marL="0" indent="0">
               <a:buNone/>
             </a:pPr>
             <a:r>
@@ -7038,7 +6810,7 @@
       </p:sp>
       <p:sp>
         <p:nvSpPr>
-          <p:cNvPr id="25" name="Slide Number Placeholder 0"/>
+          <p:cNvPr id="3" name="Slide Number Placeholder 0"/>
           <p:cNvSpPr>
             <a:spLocks noGrp="1"/>
           </p:cNvSpPr>
@@ -7056,7 +6828,7 @@
           </a:prstGeom>
           <a:extLst>
             <a:ext uri="{C572A759-6A51-4108-AA02-DFA0A04FC94B}">
-              <ma14:wrappingTextBoxFlag xmlns:ma14="http://schemas.microsoft.com/office/mac/drawingml/2011/main" val="0"/>
+              <ma14:wrappingTextBoxFlag xmlns:ma14="http://schemas.microsoft.com/office/mac/drawingml/2011/main" xmlns="" val="0"/>
             </a:ext>
           </a:extLst>
         </p:spPr>
@@ -7074,7 +6846,7 @@
           <a:p>
             <a:pPr algn="r"/>
             <a:fld id="{F7021451-1387-4CA6-816F-3879F97B5CBC}" type="slidenum">
-              <a:rPr b="0" lang="en-US"/>
+              <a:rPr lang="en-US" b="0"/>
               <a:t>11</a:t>
             </a:fld>
             <a:endParaRPr lang="en-US"/>
@@ -7109,9 +6881,11 @@
       <p:sp>
         <p:nvSpPr>
           <p:cNvPr id="2" name="Text 0"/>
-          <p:cNvSpPr/>
+          <p:cNvSpPr>
+            <a:spLocks noGrp="1"/>
+          </p:cNvSpPr>
           <p:nvPr>
-            <p:ph idx="100" type="title" hasCustomPrompt="1"/>
+            <p:ph type="title" idx="100" hasCustomPrompt="1"/>
           </p:nvPr>
         </p:nvSpPr>
         <p:spPr>
@@ -7129,7 +6903,7 @@
           <a:bodyPr wrap="square" lIns="0" tIns="0" rIns="0" bIns="0" rtlCol="0" anchor="ctr"/>
           <a:lstStyle/>
           <a:p>
-            <a:pPr algn="l" indent="0" marL="0">
+            <a:pPr marL="0" indent="0" algn="l">
               <a:buNone/>
             </a:pPr>
             <a:r>
@@ -7165,11 +6939,11 @@
           <a:bodyPr wrap="square" lIns="0" tIns="0" rIns="0" bIns="0" rtlCol="0" anchor="t"/>
           <a:lstStyle/>
           <a:p>
-            <a:pPr indent="0" marL="0">
-              <a:buNone/>
-            </a:pPr>
-            <a:r>
-              <a:rPr lang="en-US" sz="1200" b="1" spc="200" kern="0" dirty="0">
+            <a:pPr marL="0" indent="0">
+              <a:buNone/>
+            </a:pPr>
+            <a:r>
+              <a:rPr lang="en-US" sz="1200" b="1" kern="0" spc="200" dirty="0">
                 <a:solidFill>
                   <a:schemeClr val="accent3"/>
                 </a:solidFill>
@@ -7209,14 +6983,14 @@
       </p:sp>
       <p:pic>
         <p:nvPicPr>
-          <p:cNvPr id="6" name="warn icon" descr="warning">    </p:cNvPr>
+          <p:cNvPr id="6" name="warn icon" descr="warning"/>
           <p:cNvPicPr>
             <a:picLocks noChangeAspect="1"/>
           </p:cNvPicPr>
           <p:nvPr/>
         </p:nvPicPr>
         <p:blipFill>
-          <a:blip r:embed="rId1"/>
+          <a:blip r:embed="rId3"/>
           <a:stretch>
             <a:fillRect/>
           </a:stretch>
@@ -7252,7 +7026,7 @@
           <a:bodyPr wrap="square" lIns="0" tIns="0" rIns="0" bIns="0" rtlCol="0" anchor="t"/>
           <a:lstStyle/>
           <a:p>
-            <a:pPr indent="0" marL="0">
+            <a:pPr marL="0" indent="0">
               <a:buNone/>
             </a:pPr>
             <a:r>
@@ -7266,7 +7040,7 @@
             <a:endParaRPr lang="en-US" sz="1300" dirty="0"/>
           </a:p>
           <a:p>
-            <a:pPr indent="0" marL="0">
+            <a:pPr marL="0" indent="0">
               <a:buNone/>
             </a:pPr>
             <a:r>
@@ -7310,14 +7084,14 @@
       </p:sp>
       <p:pic>
         <p:nvPicPr>
-          <p:cNvPr id="9" name="warn icon" descr="warning">    </p:cNvPr>
+          <p:cNvPr id="9" name="warn icon" descr="warning"/>
           <p:cNvPicPr>
             <a:picLocks noChangeAspect="1"/>
           </p:cNvPicPr>
           <p:nvPr/>
         </p:nvPicPr>
         <p:blipFill>
-          <a:blip r:embed="rId2"/>
+          <a:blip r:embed="rId3"/>
           <a:stretch>
             <a:fillRect/>
           </a:stretch>
@@ -7353,7 +7127,7 @@
           <a:bodyPr wrap="square" lIns="0" tIns="0" rIns="0" bIns="0" rtlCol="0" anchor="t"/>
           <a:lstStyle/>
           <a:p>
-            <a:pPr indent="0" marL="0">
+            <a:pPr marL="0" indent="0">
               <a:buNone/>
             </a:pPr>
             <a:r>
@@ -7367,7 +7141,7 @@
             <a:endParaRPr lang="en-US" sz="1300" dirty="0"/>
           </a:p>
           <a:p>
-            <a:pPr indent="0" marL="0">
+            <a:pPr marL="0" indent="0">
               <a:buNone/>
             </a:pPr>
             <a:r>
@@ -7411,7 +7185,7 @@
       </p:sp>
       <p:pic>
         <p:nvPicPr>
-          <p:cNvPr id="12" name="warn icon" descr="warning">    </p:cNvPr>
+          <p:cNvPr id="12" name="warn icon" descr="warning"/>
           <p:cNvPicPr>
             <a:picLocks noChangeAspect="1"/>
           </p:cNvPicPr>
@@ -7454,7 +7228,7 @@
           <a:bodyPr wrap="square" lIns="0" tIns="0" rIns="0" bIns="0" rtlCol="0" anchor="t"/>
           <a:lstStyle/>
           <a:p>
-            <a:pPr indent="0" marL="0">
+            <a:pPr marL="0" indent="0">
               <a:buNone/>
             </a:pPr>
             <a:r>
@@ -7468,7 +7242,7 @@
             <a:endParaRPr lang="en-US" sz="1300" dirty="0"/>
           </a:p>
           <a:p>
-            <a:pPr indent="0" marL="0">
+            <a:pPr marL="0" indent="0">
               <a:buNone/>
             </a:pPr>
             <a:r>
@@ -7512,14 +7286,14 @@
       </p:sp>
       <p:pic>
         <p:nvPicPr>
-          <p:cNvPr id="15" name="warn icon" descr="warning">    </p:cNvPr>
+          <p:cNvPr id="15" name="warn icon" descr="warning"/>
           <p:cNvPicPr>
             <a:picLocks noChangeAspect="1"/>
           </p:cNvPicPr>
           <p:nvPr/>
         </p:nvPicPr>
         <p:blipFill>
-          <a:blip r:embed="rId4"/>
+          <a:blip r:embed="rId3"/>
           <a:stretch>
             <a:fillRect/>
           </a:stretch>
@@ -7555,7 +7329,7 @@
           <a:bodyPr wrap="square" lIns="0" tIns="0" rIns="0" bIns="0" rtlCol="0" anchor="t"/>
           <a:lstStyle/>
           <a:p>
-            <a:pPr indent="0" marL="0">
+            <a:pPr marL="0" indent="0">
               <a:buNone/>
             </a:pPr>
             <a:r>
@@ -7569,7 +7343,7 @@
             <a:endParaRPr lang="en-US" sz="1300" dirty="0"/>
           </a:p>
           <a:p>
-            <a:pPr indent="0" marL="0">
+            <a:pPr marL="0" indent="0">
               <a:buNone/>
             </a:pPr>
             <a:r>
@@ -7605,11 +7379,11 @@
           <a:bodyPr wrap="square" lIns="0" tIns="0" rIns="0" bIns="0" rtlCol="0" anchor="t"/>
           <a:lstStyle/>
           <a:p>
-            <a:pPr indent="0" marL="0">
-              <a:buNone/>
-            </a:pPr>
-            <a:r>
-              <a:rPr lang="en-US" sz="1200" b="1" spc="200" kern="0" dirty="0">
+            <a:pPr marL="0" indent="0">
+              <a:buNone/>
+            </a:pPr>
+            <a:r>
+              <a:rPr lang="en-US" sz="1200" b="1" kern="0" spc="200" dirty="0">
                 <a:solidFill>
                   <a:schemeClr val="accent5"/>
                 </a:solidFill>
@@ -7649,14 +7423,14 @@
       </p:sp>
       <p:pic>
         <p:nvPicPr>
-          <p:cNvPr id="19" name="check icon" descr="check">    </p:cNvPr>
+          <p:cNvPr id="19" name="check icon" descr="check"/>
           <p:cNvPicPr>
             <a:picLocks noChangeAspect="1"/>
           </p:cNvPicPr>
           <p:nvPr/>
         </p:nvPicPr>
         <p:blipFill>
-          <a:blip r:embed="rId5"/>
+          <a:blip r:embed="rId4"/>
           <a:stretch>
             <a:fillRect/>
           </a:stretch>
@@ -7692,7 +7466,7 @@
           <a:bodyPr wrap="square" lIns="0" tIns="0" rIns="0" bIns="0" rtlCol="0" anchor="t"/>
           <a:lstStyle/>
           <a:p>
-            <a:pPr indent="0" marL="0">
+            <a:pPr marL="0" indent="0">
               <a:buNone/>
             </a:pPr>
             <a:r>
@@ -7706,7 +7480,7 @@
             <a:endParaRPr lang="en-US" sz="1300" dirty="0"/>
           </a:p>
           <a:p>
-            <a:pPr indent="0" marL="0">
+            <a:pPr marL="0" indent="0">
               <a:buNone/>
             </a:pPr>
             <a:r>
@@ -7750,14 +7524,14 @@
       </p:sp>
       <p:pic>
         <p:nvPicPr>
-          <p:cNvPr id="22" name="check icon" descr="check">    </p:cNvPr>
+          <p:cNvPr id="22" name="check icon" descr="check"/>
           <p:cNvPicPr>
             <a:picLocks noChangeAspect="1"/>
           </p:cNvPicPr>
           <p:nvPr/>
         </p:nvPicPr>
         <p:blipFill>
-          <a:blip r:embed="rId6"/>
+          <a:blip r:embed="rId4"/>
           <a:stretch>
             <a:fillRect/>
           </a:stretch>
@@ -7793,7 +7567,7 @@
           <a:bodyPr wrap="square" lIns="0" tIns="0" rIns="0" bIns="0" rtlCol="0" anchor="t"/>
           <a:lstStyle/>
           <a:p>
-            <a:pPr indent="0" marL="0">
+            <a:pPr marL="0" indent="0">
               <a:buNone/>
             </a:pPr>
             <a:r>
@@ -7807,7 +7581,7 @@
             <a:endParaRPr lang="en-US" sz="1300" dirty="0"/>
           </a:p>
           <a:p>
-            <a:pPr indent="0" marL="0">
+            <a:pPr marL="0" indent="0">
               <a:buNone/>
             </a:pPr>
             <a:r>
@@ -7851,14 +7625,14 @@
       </p:sp>
       <p:pic>
         <p:nvPicPr>
-          <p:cNvPr id="25" name="check icon" descr="check">    </p:cNvPr>
+          <p:cNvPr id="25" name="check icon" descr="check"/>
           <p:cNvPicPr>
             <a:picLocks noChangeAspect="1"/>
           </p:cNvPicPr>
           <p:nvPr/>
         </p:nvPicPr>
         <p:blipFill>
-          <a:blip r:embed="rId7"/>
+          <a:blip r:embed="rId4"/>
           <a:stretch>
             <a:fillRect/>
           </a:stretch>
@@ -7894,7 +7668,7 @@
           <a:bodyPr wrap="square" lIns="0" tIns="0" rIns="0" bIns="0" rtlCol="0" anchor="t"/>
           <a:lstStyle/>
           <a:p>
-            <a:pPr indent="0" marL="0">
+            <a:pPr marL="0" indent="0">
               <a:buNone/>
             </a:pPr>
             <a:r>
@@ -7908,7 +7682,7 @@
             <a:endParaRPr lang="en-US" sz="1300" dirty="0"/>
           </a:p>
           <a:p>
-            <a:pPr indent="0" marL="0">
+            <a:pPr marL="0" indent="0">
               <a:buNone/>
             </a:pPr>
             <a:r>
@@ -7952,14 +7726,14 @@
       </p:sp>
       <p:pic>
         <p:nvPicPr>
-          <p:cNvPr id="28" name="check icon" descr="check">    </p:cNvPr>
+          <p:cNvPr id="28" name="check icon" descr="check"/>
           <p:cNvPicPr>
             <a:picLocks noChangeAspect="1"/>
           </p:cNvPicPr>
           <p:nvPr/>
         </p:nvPicPr>
         <p:blipFill>
-          <a:blip r:embed="rId8"/>
+          <a:blip r:embed="rId4"/>
           <a:stretch>
             <a:fillRect/>
           </a:stretch>
@@ -7995,7 +7769,7 @@
           <a:bodyPr wrap="square" lIns="0" tIns="0" rIns="0" bIns="0" rtlCol="0" anchor="t"/>
           <a:lstStyle/>
           <a:p>
-            <a:pPr indent="0" marL="0">
+            <a:pPr marL="0" indent="0">
               <a:buNone/>
             </a:pPr>
             <a:r>
@@ -8009,7 +7783,7 @@
             <a:endParaRPr lang="en-US" sz="1300" dirty="0"/>
           </a:p>
           <a:p>
-            <a:pPr indent="0" marL="0">
+            <a:pPr marL="0" indent="0">
               <a:buNone/>
             </a:pPr>
             <a:r>
@@ -8026,7 +7800,7 @@
       </p:sp>
       <p:sp>
         <p:nvSpPr>
-          <p:cNvPr id="25" name="Slide Number Placeholder 0"/>
+          <p:cNvPr id="3" name="Slide Number Placeholder 0"/>
           <p:cNvSpPr>
             <a:spLocks noGrp="1"/>
           </p:cNvSpPr>
@@ -8044,7 +7818,7 @@
           </a:prstGeom>
           <a:extLst>
             <a:ext uri="{C572A759-6A51-4108-AA02-DFA0A04FC94B}">
-              <ma14:wrappingTextBoxFlag xmlns:ma14="http://schemas.microsoft.com/office/mac/drawingml/2011/main" val="0"/>
+              <ma14:wrappingTextBoxFlag xmlns:ma14="http://schemas.microsoft.com/office/mac/drawingml/2011/main" xmlns="" val="0"/>
             </a:ext>
           </a:extLst>
         </p:spPr>
@@ -8062,7 +7836,7 @@
           <a:p>
             <a:pPr algn="r"/>
             <a:fld id="{F7021451-1387-4CA6-816F-3879F97B5CBC}" type="slidenum">
-              <a:rPr b="0" lang="en-US"/>
+              <a:rPr lang="en-US" b="0"/>
               <a:t>12</a:t>
             </a:fld>
             <a:endParaRPr lang="en-US"/>
@@ -8097,9 +7871,11 @@
       <p:sp>
         <p:nvSpPr>
           <p:cNvPr id="2" name="Text 0"/>
-          <p:cNvSpPr/>
+          <p:cNvSpPr>
+            <a:spLocks noGrp="1"/>
+          </p:cNvSpPr>
           <p:nvPr>
-            <p:ph idx="100" type="title" hasCustomPrompt="1"/>
+            <p:ph type="title" idx="100" hasCustomPrompt="1"/>
           </p:nvPr>
         </p:nvSpPr>
         <p:spPr>
@@ -8117,7 +7893,7 @@
           <a:bodyPr wrap="square" lIns="0" tIns="0" rIns="0" bIns="0" rtlCol="0" anchor="ctr"/>
           <a:lstStyle/>
           <a:p>
-            <a:pPr algn="l" indent="0" marL="0">
+            <a:pPr marL="0" indent="0" algn="l">
               <a:buNone/>
             </a:pPr>
             <a:r>
@@ -8186,14 +7962,14 @@
       </p:sp>
       <p:pic>
         <p:nvPicPr>
-          <p:cNvPr id="6" name="icon FaHandshake" descr="preencoded.png">    </p:cNvPr>
+          <p:cNvPr id="6" name="icon FaHandshake" descr="preencoded.png"/>
           <p:cNvPicPr>
             <a:picLocks noChangeAspect="1"/>
           </p:cNvPicPr>
           <p:nvPr/>
         </p:nvPicPr>
         <p:blipFill>
-          <a:blip r:embed="rId1"/>
+          <a:blip r:embed="rId3"/>
           <a:stretch>
             <a:fillRect/>
           </a:stretch>
@@ -8229,7 +8005,7 @@
           <a:bodyPr wrap="square" lIns="0" tIns="0" rIns="0" bIns="0" rtlCol="0" anchor="t"/>
           <a:lstStyle/>
           <a:p>
-            <a:pPr indent="0" marL="0">
+            <a:pPr marL="0" indent="0">
               <a:buNone/>
             </a:pPr>
             <a:r>
@@ -8268,7 +8044,7 @@
           <a:bodyPr wrap="square" lIns="0" tIns="0" rIns="0" bIns="0" rtlCol="0" anchor="t"/>
           <a:lstStyle/>
           <a:p>
-            <a:pPr indent="0" marL="0">
+            <a:pPr marL="0" indent="0">
               <a:buNone/>
             </a:pPr>
             <a:r>
@@ -8337,14 +8113,14 @@
       </p:sp>
       <p:pic>
         <p:nvPicPr>
-          <p:cNvPr id="11" name="icon FaRoute" descr="preencoded.png">    </p:cNvPr>
+          <p:cNvPr id="11" name="icon FaRoute" descr="preencoded.png"/>
           <p:cNvPicPr>
             <a:picLocks noChangeAspect="1"/>
           </p:cNvPicPr>
           <p:nvPr/>
         </p:nvPicPr>
         <p:blipFill>
-          <a:blip r:embed="rId2"/>
+          <a:blip r:embed="rId4"/>
           <a:stretch>
             <a:fillRect/>
           </a:stretch>
@@ -8380,7 +8156,7 @@
           <a:bodyPr wrap="square" lIns="0" tIns="0" rIns="0" bIns="0" rtlCol="0" anchor="t"/>
           <a:lstStyle/>
           <a:p>
-            <a:pPr indent="0" marL="0">
+            <a:pPr marL="0" indent="0">
               <a:buNone/>
             </a:pPr>
             <a:r>
@@ -8419,7 +8195,7 @@
           <a:bodyPr wrap="square" lIns="0" tIns="0" rIns="0" bIns="0" rtlCol="0" anchor="t"/>
           <a:lstStyle/>
           <a:p>
-            <a:pPr indent="0" marL="0">
+            <a:pPr marL="0" indent="0">
               <a:buNone/>
             </a:pPr>
             <a:r>
@@ -8488,14 +8264,14 @@
       </p:sp>
       <p:pic>
         <p:nvPicPr>
-          <p:cNvPr id="16" name="icon FaClipboardList" descr="preencoded.png">    </p:cNvPr>
+          <p:cNvPr id="16" name="icon FaClipboardList" descr="preencoded.png"/>
           <p:cNvPicPr>
             <a:picLocks noChangeAspect="1"/>
           </p:cNvPicPr>
           <p:nvPr/>
         </p:nvPicPr>
         <p:blipFill>
-          <a:blip r:embed="rId3"/>
+          <a:blip r:embed="rId5"/>
           <a:stretch>
             <a:fillRect/>
           </a:stretch>
@@ -8531,7 +8307,7 @@
           <a:bodyPr wrap="square" lIns="0" tIns="0" rIns="0" bIns="0" rtlCol="0" anchor="t"/>
           <a:lstStyle/>
           <a:p>
-            <a:pPr indent="0" marL="0">
+            <a:pPr marL="0" indent="0">
               <a:buNone/>
             </a:pPr>
             <a:r>
@@ -8570,7 +8346,7 @@
           <a:bodyPr wrap="square" lIns="0" tIns="0" rIns="0" bIns="0" rtlCol="0" anchor="t"/>
           <a:lstStyle/>
           <a:p>
-            <a:pPr indent="0" marL="0">
+            <a:pPr marL="0" indent="0">
               <a:buNone/>
             </a:pPr>
             <a:r>
@@ -8639,14 +8415,14 @@
       </p:sp>
       <p:pic>
         <p:nvPicPr>
-          <p:cNvPr id="21" name="icon FaBoxOpen" descr="preencoded.png">    </p:cNvPr>
+          <p:cNvPr id="21" name="icon FaBoxOpen" descr="preencoded.png"/>
           <p:cNvPicPr>
             <a:picLocks noChangeAspect="1"/>
           </p:cNvPicPr>
           <p:nvPr/>
         </p:nvPicPr>
         <p:blipFill>
-          <a:blip r:embed="rId4"/>
+          <a:blip r:embed="rId6"/>
           <a:stretch>
             <a:fillRect/>
           </a:stretch>
@@ -8682,7 +8458,7 @@
           <a:bodyPr wrap="square" lIns="0" tIns="0" rIns="0" bIns="0" rtlCol="0" anchor="t"/>
           <a:lstStyle/>
           <a:p>
-            <a:pPr indent="0" marL="0">
+            <a:pPr marL="0" indent="0">
               <a:buNone/>
             </a:pPr>
             <a:r>
@@ -8721,7 +8497,7 @@
           <a:bodyPr wrap="square" lIns="0" tIns="0" rIns="0" bIns="0" rtlCol="0" anchor="t"/>
           <a:lstStyle/>
           <a:p>
-            <a:pPr indent="0" marL="0">
+            <a:pPr marL="0" indent="0">
               <a:buNone/>
             </a:pPr>
             <a:r>
@@ -8784,7 +8560,7 @@
           <a:bodyPr wrap="square" lIns="0" tIns="0" rIns="0" bIns="0" rtlCol="0" anchor="t"/>
           <a:lstStyle/>
           <a:p>
-            <a:pPr indent="0" marL="0">
+            <a:pPr marL="0" indent="0">
               <a:buNone/>
             </a:pPr>
             <a:r>
@@ -8795,9 +8571,6 @@
               </a:rPr>
               <a:t>Typical payment: </a:t>
             </a:r>
-            <a:pPr indent="0" marL="0">
-              <a:buNone/>
-            </a:pPr>
             <a:r>
               <a:rPr lang="en-US" sz="1400" dirty="0">
                 <a:solidFill>
@@ -8812,7 +8585,7 @@
       </p:sp>
       <p:sp>
         <p:nvSpPr>
-          <p:cNvPr id="25" name="Slide Number Placeholder 0"/>
+          <p:cNvPr id="3" name="Slide Number Placeholder 0"/>
           <p:cNvSpPr>
             <a:spLocks noGrp="1"/>
           </p:cNvSpPr>
@@ -8830,7 +8603,7 @@
           </a:prstGeom>
           <a:extLst>
             <a:ext uri="{C572A759-6A51-4108-AA02-DFA0A04FC94B}">
-              <ma14:wrappingTextBoxFlag xmlns:ma14="http://schemas.microsoft.com/office/mac/drawingml/2011/main" val="0"/>
+              <ma14:wrappingTextBoxFlag xmlns:ma14="http://schemas.microsoft.com/office/mac/drawingml/2011/main" xmlns="" val="0"/>
             </a:ext>
           </a:extLst>
         </p:spPr>
@@ -8848,7 +8621,7 @@
           <a:p>
             <a:pPr algn="r"/>
             <a:fld id="{F7021451-1387-4CA6-816F-3879F97B5CBC}" type="slidenum">
-              <a:rPr b="0" lang="en-US"/>
+              <a:rPr lang="en-US" b="0"/>
               <a:t>13</a:t>
             </a:fld>
             <a:endParaRPr lang="en-US"/>
@@ -8883,9 +8656,11 @@
       <p:sp>
         <p:nvSpPr>
           <p:cNvPr id="2" name="Text 0"/>
-          <p:cNvSpPr/>
+          <p:cNvSpPr>
+            <a:spLocks noGrp="1"/>
+          </p:cNvSpPr>
           <p:nvPr>
-            <p:ph idx="100" type="title" hasCustomPrompt="1"/>
+            <p:ph type="title" idx="100" hasCustomPrompt="1"/>
           </p:nvPr>
         </p:nvSpPr>
         <p:spPr>
@@ -8903,7 +8678,7 @@
           <a:bodyPr wrap="square" lIns="0" tIns="0" rIns="0" bIns="0" rtlCol="0" anchor="ctr"/>
           <a:lstStyle/>
           <a:p>
-            <a:pPr algn="l" indent="0" marL="0">
+            <a:pPr marL="0" indent="0" algn="l">
               <a:buNone/>
             </a:pPr>
             <a:r>
@@ -8920,14 +8695,14 @@
       </p:sp>
       <p:pic>
         <p:nvPicPr>
-          <p:cNvPr id="4" name="Container ship at a port" descr="Container ship at a port">    </p:cNvPr>
+          <p:cNvPr id="4" name="Container ship at a port" descr="Container ship at a port"/>
           <p:cNvPicPr>
             <a:picLocks noChangeAspect="1"/>
           </p:cNvPicPr>
           <p:nvPr/>
         </p:nvPicPr>
         <p:blipFill>
-          <a:blip r:embed="rId1"/>
+          <a:blip r:embed="rId3"/>
           <a:stretch>
             <a:fillRect/>
           </a:stretch>
@@ -8963,7 +8738,7 @@
           <a:bodyPr wrap="square" lIns="0" tIns="0" rIns="0" bIns="0" rtlCol="0" anchor="t"/>
           <a:lstStyle/>
           <a:p>
-            <a:pPr indent="0" marL="0">
+            <a:pPr marL="0" indent="0">
               <a:buNone/>
             </a:pPr>
             <a:r>
@@ -8980,14 +8755,14 @@
       </p:sp>
       <p:pic>
         <p:nvPicPr>
-          <p:cNvPr id="6" name="Cargo aircraft being loaded" descr="Cargo aircraft being loaded">    </p:cNvPr>
+          <p:cNvPr id="6" name="Cargo aircraft being loaded" descr="Cargo aircraft being loaded"/>
           <p:cNvPicPr>
             <a:picLocks noChangeAspect="1"/>
           </p:cNvPicPr>
           <p:nvPr/>
         </p:nvPicPr>
         <p:blipFill>
-          <a:blip r:embed="rId2"/>
+          <a:blip r:embed="rId4"/>
           <a:stretch>
             <a:fillRect/>
           </a:stretch>
@@ -9023,7 +8798,7 @@
           <a:bodyPr wrap="square" lIns="0" tIns="0" rIns="0" bIns="0" rtlCol="0" anchor="t"/>
           <a:lstStyle/>
           <a:p>
-            <a:pPr indent="0" marL="0">
+            <a:pPr marL="0" indent="0">
               <a:buNone/>
             </a:pPr>
             <a:r>
@@ -9086,7 +8861,7 @@
           <a:bodyPr wrap="square" lIns="0" tIns="0" rIns="0" bIns="0" rtlCol="0" anchor="ctr"/>
           <a:lstStyle/>
           <a:p>
-            <a:pPr indent="0" marL="0">
+            <a:pPr marL="0" indent="0">
               <a:buNone/>
             </a:pPr>
             <a:endParaRPr lang="en-US" sz="1300" dirty="0"/>
@@ -9141,7 +8916,7 @@
           <a:bodyPr wrap="square" lIns="0" tIns="0" rIns="0" bIns="0" rtlCol="0" anchor="ctr"/>
           <a:lstStyle/>
           <a:p>
-            <a:pPr indent="0" marL="0">
+            <a:pPr marL="0" indent="0">
               <a:buNone/>
             </a:pPr>
             <a:r>
@@ -9204,7 +8979,7 @@
           <a:bodyPr wrap="square" lIns="0" tIns="0" rIns="0" bIns="0" rtlCol="0" anchor="ctr"/>
           <a:lstStyle/>
           <a:p>
-            <a:pPr indent="0" marL="0">
+            <a:pPr marL="0" indent="0">
               <a:buNone/>
             </a:pPr>
             <a:r>
@@ -9267,7 +9042,7 @@
           <a:bodyPr wrap="square" lIns="0" tIns="0" rIns="0" bIns="0" rtlCol="0" anchor="ctr"/>
           <a:lstStyle/>
           <a:p>
-            <a:pPr indent="0" marL="0">
+            <a:pPr marL="0" indent="0">
               <a:buNone/>
             </a:pPr>
             <a:r>
@@ -9330,7 +9105,7 @@
           <a:bodyPr wrap="square" lIns="0" tIns="0" rIns="0" bIns="0" rtlCol="0" anchor="ctr"/>
           <a:lstStyle/>
           <a:p>
-            <a:pPr indent="0" marL="0">
+            <a:pPr marL="0" indent="0">
               <a:buNone/>
             </a:pPr>
             <a:r>
@@ -9393,7 +9168,7 @@
           <a:bodyPr wrap="square" lIns="0" tIns="0" rIns="0" bIns="0" rtlCol="0" anchor="ctr"/>
           <a:lstStyle/>
           <a:p>
-            <a:pPr indent="0" marL="0">
+            <a:pPr marL="0" indent="0">
               <a:buNone/>
             </a:pPr>
             <a:r>
@@ -9456,7 +9231,7 @@
           <a:bodyPr wrap="square" lIns="0" tIns="0" rIns="0" bIns="0" rtlCol="0" anchor="ctr"/>
           <a:lstStyle/>
           <a:p>
-            <a:pPr indent="0" marL="0">
+            <a:pPr marL="0" indent="0">
               <a:buNone/>
             </a:pPr>
             <a:r>
@@ -9519,7 +9294,7 @@
           <a:bodyPr wrap="square" lIns="0" tIns="0" rIns="0" bIns="0" rtlCol="0" anchor="ctr"/>
           <a:lstStyle/>
           <a:p>
-            <a:pPr indent="0" marL="0">
+            <a:pPr marL="0" indent="0">
               <a:buNone/>
             </a:pPr>
             <a:r>
@@ -9582,7 +9357,7 @@
           <a:bodyPr wrap="square" lIns="0" tIns="0" rIns="0" bIns="0" rtlCol="0" anchor="ctr"/>
           <a:lstStyle/>
           <a:p>
-            <a:pPr indent="0" marL="0">
+            <a:pPr marL="0" indent="0">
               <a:buNone/>
             </a:pPr>
             <a:r>
@@ -9645,7 +9420,7 @@
           <a:bodyPr wrap="square" lIns="0" tIns="0" rIns="0" bIns="0" rtlCol="0" anchor="ctr"/>
           <a:lstStyle/>
           <a:p>
-            <a:pPr indent="0" marL="0">
+            <a:pPr marL="0" indent="0">
               <a:buNone/>
             </a:pPr>
             <a:r>
@@ -9708,7 +9483,7 @@
           <a:bodyPr wrap="square" lIns="0" tIns="0" rIns="0" bIns="0" rtlCol="0" anchor="ctr"/>
           <a:lstStyle/>
           <a:p>
-            <a:pPr indent="0" marL="0">
+            <a:pPr marL="0" indent="0">
               <a:buNone/>
             </a:pPr>
             <a:r>
@@ -9771,7 +9546,7 @@
           <a:bodyPr wrap="square" lIns="0" tIns="0" rIns="0" bIns="0" rtlCol="0" anchor="ctr"/>
           <a:lstStyle/>
           <a:p>
-            <a:pPr indent="0" marL="0">
+            <a:pPr marL="0" indent="0">
               <a:buNone/>
             </a:pPr>
             <a:r>
@@ -9788,7 +9563,7 @@
       </p:sp>
       <p:sp>
         <p:nvSpPr>
-          <p:cNvPr id="25" name="Slide Number Placeholder 0"/>
+          <p:cNvPr id="3" name="Slide Number Placeholder 0"/>
           <p:cNvSpPr>
             <a:spLocks noGrp="1"/>
           </p:cNvSpPr>
@@ -9806,7 +9581,7 @@
           </a:prstGeom>
           <a:extLst>
             <a:ext uri="{C572A759-6A51-4108-AA02-DFA0A04FC94B}">
-              <ma14:wrappingTextBoxFlag xmlns:ma14="http://schemas.microsoft.com/office/mac/drawingml/2011/main" val="0"/>
+              <ma14:wrappingTextBoxFlag xmlns:ma14="http://schemas.microsoft.com/office/mac/drawingml/2011/main" xmlns="" val="0"/>
             </a:ext>
           </a:extLst>
         </p:spPr>
@@ -9824,7 +9599,7 @@
           <a:p>
             <a:pPr algn="r"/>
             <a:fld id="{F7021451-1387-4CA6-816F-3879F97B5CBC}" type="slidenum">
-              <a:rPr b="0" lang="en-US"/>
+              <a:rPr lang="en-US" b="0"/>
               <a:t>14</a:t>
             </a:fld>
             <a:endParaRPr lang="en-US"/>
@@ -9859,9 +9634,11 @@
       <p:sp>
         <p:nvSpPr>
           <p:cNvPr id="2" name="Text 0"/>
-          <p:cNvSpPr/>
+          <p:cNvSpPr>
+            <a:spLocks noGrp="1"/>
+          </p:cNvSpPr>
           <p:nvPr>
-            <p:ph idx="100" type="title" hasCustomPrompt="1"/>
+            <p:ph type="title" idx="100" hasCustomPrompt="1"/>
           </p:nvPr>
         </p:nvSpPr>
         <p:spPr>
@@ -9879,7 +9656,7 @@
           <a:bodyPr wrap="square" lIns="0" tIns="0" rIns="0" bIns="0" rtlCol="0" anchor="ctr"/>
           <a:lstStyle/>
           <a:p>
-            <a:pPr algn="l" indent="0" marL="0">
+            <a:pPr marL="0" indent="0" algn="l">
               <a:buNone/>
             </a:pPr>
             <a:r>
@@ -9942,11 +9719,11 @@
           <a:bodyPr wrap="square" lIns="0" tIns="0" rIns="0" bIns="0" rtlCol="0" anchor="t"/>
           <a:lstStyle/>
           <a:p>
-            <a:pPr indent="0" marL="0">
-              <a:buNone/>
-            </a:pPr>
-            <a:r>
-              <a:rPr lang="en-US" sz="1200" b="1" spc="200" kern="0" dirty="0">
+            <a:pPr marL="0" indent="0">
+              <a:buNone/>
+            </a:pPr>
+            <a:r>
+              <a:rPr lang="en-US" sz="1200" b="1" kern="0" spc="200" dirty="0">
                 <a:solidFill>
                   <a:schemeClr val="accent1"/>
                 </a:solidFill>
@@ -9978,7 +9755,7 @@
           <a:bodyPr wrap="square" lIns="0" tIns="0" rIns="0" bIns="0" rtlCol="0" anchor="t"/>
           <a:lstStyle/>
           <a:p>
-            <a:pPr indent="0" marL="0">
+            <a:pPr marL="0" indent="0">
               <a:buNone/>
             </a:pPr>
             <a:r>
@@ -10017,7 +9794,7 @@
           <a:bodyPr wrap="square" lIns="0" tIns="0" rIns="0" bIns="0" rtlCol="0" anchor="t"/>
           <a:lstStyle/>
           <a:p>
-            <a:pPr indent="0" marL="0">
+            <a:pPr marL="0" indent="0">
               <a:buNone/>
             </a:pPr>
             <a:r>
@@ -10053,7 +9830,7 @@
           <a:bodyPr wrap="square" lIns="0" tIns="0" rIns="0" bIns="0" rtlCol="0" anchor="t"/>
           <a:lstStyle/>
           <a:p>
-            <a:pPr indent="0" marL="0">
+            <a:pPr marL="0" indent="0">
               <a:buNone/>
             </a:pPr>
             <a:r>
@@ -10089,7 +9866,7 @@
           <a:bodyPr wrap="square" lIns="0" tIns="0" rIns="0" bIns="0" rtlCol="0" anchor="t"/>
           <a:lstStyle/>
           <a:p>
-            <a:pPr indent="0" marL="0">
+            <a:pPr marL="0" indent="0">
               <a:buNone/>
             </a:pPr>
             <a:r>
@@ -10152,7 +9929,7 @@
           <a:bodyPr wrap="square" lIns="0" tIns="0" rIns="0" bIns="0" rtlCol="0" anchor="t"/>
           <a:lstStyle/>
           <a:p>
-            <a:pPr indent="0" marL="0">
+            <a:pPr marL="0" indent="0">
               <a:buNone/>
             </a:pPr>
             <a:r>
@@ -10191,7 +9968,7 @@
           <a:bodyPr wrap="square" lIns="0" tIns="0" rIns="0" bIns="0" rtlCol="0" anchor="t"/>
           <a:lstStyle/>
           <a:p>
-            <a:pPr indent="0" marL="0">
+            <a:pPr marL="0" indent="0">
               <a:buNone/>
             </a:pPr>
             <a:r>
@@ -10254,7 +10031,7 @@
           <a:bodyPr wrap="square" lIns="0" tIns="0" rIns="0" bIns="0" rtlCol="0" anchor="t"/>
           <a:lstStyle/>
           <a:p>
-            <a:pPr indent="0" marL="0">
+            <a:pPr marL="0" indent="0">
               <a:buNone/>
             </a:pPr>
             <a:r>
@@ -10293,7 +10070,7 @@
           <a:bodyPr wrap="square" lIns="0" tIns="0" rIns="0" bIns="0" rtlCol="0" anchor="t"/>
           <a:lstStyle/>
           <a:p>
-            <a:pPr indent="0" marL="0">
+            <a:pPr marL="0" indent="0">
               <a:buNone/>
             </a:pPr>
             <a:r>
@@ -10356,7 +10133,7 @@
           <a:bodyPr wrap="square" lIns="0" tIns="0" rIns="0" bIns="0" rtlCol="0" anchor="t"/>
           <a:lstStyle/>
           <a:p>
-            <a:pPr indent="0" marL="0">
+            <a:pPr marL="0" indent="0">
               <a:buNone/>
             </a:pPr>
             <a:r>
@@ -10395,7 +10172,7 @@
           <a:bodyPr wrap="square" lIns="0" tIns="0" rIns="0" bIns="0" rtlCol="0" anchor="t"/>
           <a:lstStyle/>
           <a:p>
-            <a:pPr indent="0" marL="0">
+            <a:pPr marL="0" indent="0">
               <a:buNone/>
             </a:pPr>
             <a:r>
@@ -10430,7 +10207,7 @@
           </a:prstGeom>
           <a:extLst>
             <a:ext uri="{C572A759-6A51-4108-AA02-DFA0A04FC94B}">
-              <ma14:wrappingTextBoxFlag xmlns:ma14="http://schemas.microsoft.com/office/mac/drawingml/2011/main" val="0"/>
+              <ma14:wrappingTextBoxFlag xmlns:ma14="http://schemas.microsoft.com/office/mac/drawingml/2011/main" xmlns="" val="0"/>
             </a:ext>
           </a:extLst>
         </p:spPr>
@@ -10448,7 +10225,7 @@
           <a:p>
             <a:pPr algn="r"/>
             <a:fld id="{F7021451-1387-4CA6-816F-3879F97B5CBC}" type="slidenum">
-              <a:rPr b="0" lang="en-US"/>
+              <a:rPr lang="en-US" b="0"/>
               <a:t>15</a:t>
             </a:fld>
             <a:endParaRPr lang="en-US"/>
@@ -10483,9 +10260,11 @@
       <p:sp>
         <p:nvSpPr>
           <p:cNvPr id="2" name="Text 0"/>
-          <p:cNvSpPr/>
+          <p:cNvSpPr>
+            <a:spLocks noGrp="1"/>
+          </p:cNvSpPr>
           <p:nvPr>
-            <p:ph idx="100" type="title" hasCustomPrompt="1"/>
+            <p:ph type="title" idx="100" hasCustomPrompt="1"/>
           </p:nvPr>
         </p:nvSpPr>
         <p:spPr>
@@ -10503,7 +10282,7 @@
           <a:bodyPr wrap="square" lIns="0" tIns="0" rIns="0" bIns="0" rtlCol="0" anchor="ctr"/>
           <a:lstStyle/>
           <a:p>
-            <a:pPr algn="l" indent="0" marL="0">
+            <a:pPr marL="0" indent="0" algn="l">
               <a:buNone/>
             </a:pPr>
             <a:r>
@@ -10566,7 +10345,7 @@
           <a:bodyPr wrap="square" lIns="0" tIns="0" rIns="0" bIns="0" rtlCol="0" anchor="t"/>
           <a:lstStyle/>
           <a:p>
-            <a:pPr indent="0" marL="0">
+            <a:pPr marL="0" indent="0">
               <a:buNone/>
             </a:pPr>
             <a:r>
@@ -10605,7 +10384,7 @@
           <a:bodyPr wrap="square" lIns="0" tIns="0" rIns="0" bIns="0" rtlCol="0" anchor="t"/>
           <a:lstStyle/>
           <a:p>
-            <a:pPr indent="0" marL="0">
+            <a:pPr marL="0" indent="0">
               <a:buNone/>
             </a:pPr>
             <a:r>
@@ -10644,7 +10423,7 @@
           <a:bodyPr wrap="square" lIns="0" tIns="0" rIns="0" bIns="0" rtlCol="0" anchor="t"/>
           <a:lstStyle/>
           <a:p>
-            <a:pPr indent="0" marL="0">
+            <a:pPr marL="0" indent="0">
               <a:buNone/>
             </a:pPr>
             <a:r>
@@ -10730,11 +10509,11 @@
           <a:bodyPr wrap="square" lIns="0" tIns="0" rIns="0" bIns="0" rtlCol="0" anchor="t"/>
           <a:lstStyle/>
           <a:p>
-            <a:pPr indent="0" marL="0">
-              <a:buNone/>
-            </a:pPr>
-            <a:r>
-              <a:rPr lang="en-US" sz="1000" b="1" spc="200" kern="0" dirty="0">
+            <a:pPr marL="0" indent="0">
+              <a:buNone/>
+            </a:pPr>
+            <a:r>
+              <a:rPr lang="en-US" sz="1000" b="1" kern="0" spc="200" dirty="0">
                 <a:solidFill>
                   <a:schemeClr val="accent6"/>
                 </a:solidFill>
@@ -10766,7 +10545,7 @@
           <a:bodyPr wrap="square" lIns="0" tIns="0" rIns="0" bIns="0" rtlCol="0" anchor="t"/>
           <a:lstStyle/>
           <a:p>
-            <a:pPr indent="0" marL="0">
+            <a:pPr marL="0" indent="0">
               <a:buNone/>
             </a:pPr>
             <a:r>
@@ -10829,7 +10608,7 @@
           <a:bodyPr wrap="square" lIns="0" tIns="0" rIns="0" bIns="0" rtlCol="0" anchor="t"/>
           <a:lstStyle/>
           <a:p>
-            <a:pPr indent="0" marL="0">
+            <a:pPr marL="0" indent="0">
               <a:buNone/>
             </a:pPr>
             <a:r>
@@ -10868,7 +10647,7 @@
           <a:bodyPr wrap="square" lIns="0" tIns="0" rIns="0" bIns="0" rtlCol="0" anchor="t"/>
           <a:lstStyle/>
           <a:p>
-            <a:pPr indent="0" marL="0">
+            <a:pPr marL="0" indent="0">
               <a:buNone/>
             </a:pPr>
             <a:r>
@@ -10907,7 +10686,7 @@
           <a:bodyPr wrap="square" lIns="0" tIns="0" rIns="0" bIns="0" rtlCol="0" anchor="t"/>
           <a:lstStyle/>
           <a:p>
-            <a:pPr indent="0" marL="0">
+            <a:pPr marL="0" indent="0">
               <a:buNone/>
             </a:pPr>
             <a:r>
@@ -10993,11 +10772,11 @@
           <a:bodyPr wrap="square" lIns="0" tIns="0" rIns="0" bIns="0" rtlCol="0" anchor="t"/>
           <a:lstStyle/>
           <a:p>
-            <a:pPr indent="0" marL="0">
-              <a:buNone/>
-            </a:pPr>
-            <a:r>
-              <a:rPr lang="en-US" sz="1000" b="1" spc="200" kern="0" dirty="0">
+            <a:pPr marL="0" indent="0">
+              <a:buNone/>
+            </a:pPr>
+            <a:r>
+              <a:rPr lang="en-US" sz="1000" b="1" kern="0" spc="200" dirty="0">
                 <a:solidFill>
                   <a:schemeClr val="accent2"/>
                 </a:solidFill>
@@ -11029,7 +10808,7 @@
           <a:bodyPr wrap="square" lIns="0" tIns="0" rIns="0" bIns="0" rtlCol="0" anchor="t"/>
           <a:lstStyle/>
           <a:p>
-            <a:pPr indent="0" marL="0">
+            <a:pPr marL="0" indent="0">
               <a:buNone/>
             </a:pPr>
             <a:r>
@@ -11092,7 +10871,7 @@
           <a:bodyPr wrap="square" lIns="0" tIns="0" rIns="0" bIns="0" rtlCol="0" anchor="t"/>
           <a:lstStyle/>
           <a:p>
-            <a:pPr indent="0" marL="0">
+            <a:pPr marL="0" indent="0">
               <a:buNone/>
             </a:pPr>
             <a:r>
@@ -11131,7 +10910,7 @@
           <a:bodyPr wrap="square" lIns="0" tIns="0" rIns="0" bIns="0" rtlCol="0" anchor="t"/>
           <a:lstStyle/>
           <a:p>
-            <a:pPr indent="0" marL="0">
+            <a:pPr marL="0" indent="0">
               <a:buNone/>
             </a:pPr>
             <a:r>
@@ -11170,7 +10949,7 @@
           <a:bodyPr wrap="square" lIns="0" tIns="0" rIns="0" bIns="0" rtlCol="0" anchor="t"/>
           <a:lstStyle/>
           <a:p>
-            <a:pPr indent="0" marL="0">
+            <a:pPr marL="0" indent="0">
               <a:buNone/>
             </a:pPr>
             <a:r>
@@ -11256,11 +11035,11 @@
           <a:bodyPr wrap="square" lIns="0" tIns="0" rIns="0" bIns="0" rtlCol="0" anchor="t"/>
           <a:lstStyle/>
           <a:p>
-            <a:pPr indent="0" marL="0">
-              <a:buNone/>
-            </a:pPr>
-            <a:r>
-              <a:rPr lang="en-US" sz="1000" b="1" spc="200" kern="0" dirty="0">
+            <a:pPr marL="0" indent="0">
+              <a:buNone/>
+            </a:pPr>
+            <a:r>
+              <a:rPr lang="en-US" sz="1000" b="1" kern="0" spc="200" dirty="0">
                 <a:solidFill>
                   <a:schemeClr val="accent6"/>
                 </a:solidFill>
@@ -11292,7 +11071,7 @@
           <a:bodyPr wrap="square" lIns="0" tIns="0" rIns="0" bIns="0" rtlCol="0" anchor="t"/>
           <a:lstStyle/>
           <a:p>
-            <a:pPr indent="0" marL="0">
+            <a:pPr marL="0" indent="0">
               <a:buNone/>
             </a:pPr>
             <a:r>
@@ -11355,7 +11134,7 @@
           <a:bodyPr wrap="square" lIns="0" tIns="0" rIns="0" bIns="0" rtlCol="0" anchor="t"/>
           <a:lstStyle/>
           <a:p>
-            <a:pPr indent="0" marL="0">
+            <a:pPr marL="0" indent="0">
               <a:buNone/>
             </a:pPr>
             <a:r>
@@ -11394,7 +11173,7 @@
           <a:bodyPr wrap="square" lIns="0" tIns="0" rIns="0" bIns="0" rtlCol="0" anchor="t"/>
           <a:lstStyle/>
           <a:p>
-            <a:pPr indent="0" marL="0">
+            <a:pPr marL="0" indent="0">
               <a:buNone/>
             </a:pPr>
             <a:r>
@@ -11433,7 +11212,7 @@
           <a:bodyPr wrap="square" lIns="0" tIns="0" rIns="0" bIns="0" rtlCol="0" anchor="t"/>
           <a:lstStyle/>
           <a:p>
-            <a:pPr indent="0" marL="0">
+            <a:pPr marL="0" indent="0">
               <a:buNone/>
             </a:pPr>
             <a:r>
@@ -11519,11 +11298,11 @@
           <a:bodyPr wrap="square" lIns="0" tIns="0" rIns="0" bIns="0" rtlCol="0" anchor="t"/>
           <a:lstStyle/>
           <a:p>
-            <a:pPr indent="0" marL="0">
-              <a:buNone/>
-            </a:pPr>
-            <a:r>
-              <a:rPr lang="en-US" sz="1000" b="1" spc="200" kern="0" dirty="0">
+            <a:pPr marL="0" indent="0">
+              <a:buNone/>
+            </a:pPr>
+            <a:r>
+              <a:rPr lang="en-US" sz="1000" b="1" kern="0" spc="200" dirty="0">
                 <a:solidFill>
                   <a:schemeClr val="accent2"/>
                 </a:solidFill>
@@ -11555,7 +11334,7 @@
           <a:bodyPr wrap="square" lIns="0" tIns="0" rIns="0" bIns="0" rtlCol="0" anchor="t"/>
           <a:lstStyle/>
           <a:p>
-            <a:pPr indent="0" marL="0">
+            <a:pPr marL="0" indent="0">
               <a:buNone/>
             </a:pPr>
             <a:r>
@@ -11618,7 +11397,7 @@
           <a:bodyPr wrap="square" lIns="0" tIns="0" rIns="0" bIns="0" rtlCol="0" anchor="t"/>
           <a:lstStyle/>
           <a:p>
-            <a:pPr indent="0" marL="0">
+            <a:pPr marL="0" indent="0">
               <a:buNone/>
             </a:pPr>
             <a:r>
@@ -11657,7 +11436,7 @@
           <a:bodyPr wrap="square" lIns="0" tIns="0" rIns="0" bIns="0" rtlCol="0" anchor="t"/>
           <a:lstStyle/>
           <a:p>
-            <a:pPr indent="0" marL="0">
+            <a:pPr marL="0" indent="0">
               <a:buNone/>
             </a:pPr>
             <a:r>
@@ -11696,7 +11475,7 @@
           <a:bodyPr wrap="square" lIns="0" tIns="0" rIns="0" bIns="0" rtlCol="0" anchor="t"/>
           <a:lstStyle/>
           <a:p>
-            <a:pPr indent="0" marL="0">
+            <a:pPr marL="0" indent="0">
               <a:buNone/>
             </a:pPr>
             <a:r>
@@ -11782,11 +11561,11 @@
           <a:bodyPr wrap="square" lIns="0" tIns="0" rIns="0" bIns="0" rtlCol="0" anchor="t"/>
           <a:lstStyle/>
           <a:p>
-            <a:pPr indent="0" marL="0">
-              <a:buNone/>
-            </a:pPr>
-            <a:r>
-              <a:rPr lang="en-US" sz="1000" b="1" spc="200" kern="0" dirty="0">
+            <a:pPr marL="0" indent="0">
+              <a:buNone/>
+            </a:pPr>
+            <a:r>
+              <a:rPr lang="en-US" sz="1000" b="1" kern="0" spc="200" dirty="0">
                 <a:solidFill>
                   <a:schemeClr val="accent6"/>
                 </a:solidFill>
@@ -11818,7 +11597,7 @@
           <a:bodyPr wrap="square" lIns="0" tIns="0" rIns="0" bIns="0" rtlCol="0" anchor="t"/>
           <a:lstStyle/>
           <a:p>
-            <a:pPr indent="0" marL="0">
+            <a:pPr marL="0" indent="0">
               <a:buNone/>
             </a:pPr>
             <a:r>
@@ -11862,14 +11641,14 @@
       </p:sp>
       <p:pic>
         <p:nvPicPr>
-          <p:cNvPr id="45" name="warn" descr="warning">    </p:cNvPr>
+          <p:cNvPr id="45" name="warn" descr="warning"/>
           <p:cNvPicPr>
             <a:picLocks noChangeAspect="1"/>
           </p:cNvPicPr>
           <p:nvPr/>
         </p:nvPicPr>
         <p:blipFill>
-          <a:blip r:embed="rId1"/>
+          <a:blip r:embed="rId3"/>
           <a:stretch>
             <a:fillRect/>
           </a:stretch>
@@ -11905,7 +11684,7 @@
           <a:bodyPr wrap="square" lIns="0" tIns="0" rIns="0" bIns="0" rtlCol="0" anchor="ctr"/>
           <a:lstStyle/>
           <a:p>
-            <a:pPr indent="0" marL="0">
+            <a:pPr marL="0" indent="0">
               <a:buNone/>
             </a:pPr>
             <a:r>
@@ -11922,7 +11701,7 @@
       </p:sp>
       <p:sp>
         <p:nvSpPr>
-          <p:cNvPr id="25" name="Slide Number Placeholder 0"/>
+          <p:cNvPr id="3" name="Slide Number Placeholder 0"/>
           <p:cNvSpPr>
             <a:spLocks noGrp="1"/>
           </p:cNvSpPr>
@@ -11940,7 +11719,7 @@
           </a:prstGeom>
           <a:extLst>
             <a:ext uri="{C572A759-6A51-4108-AA02-DFA0A04FC94B}">
-              <ma14:wrappingTextBoxFlag xmlns:ma14="http://schemas.microsoft.com/office/mac/drawingml/2011/main" val="0"/>
+              <ma14:wrappingTextBoxFlag xmlns:ma14="http://schemas.microsoft.com/office/mac/drawingml/2011/main" xmlns="" val="0"/>
             </a:ext>
           </a:extLst>
         </p:spPr>
@@ -11958,7 +11737,7 @@
           <a:p>
             <a:pPr algn="r"/>
             <a:fld id="{F7021451-1387-4CA6-816F-3879F97B5CBC}" type="slidenum">
-              <a:rPr b="0" lang="en-US"/>
+              <a:rPr lang="en-US" b="0"/>
               <a:t>16</a:t>
             </a:fld>
             <a:endParaRPr lang="en-US"/>
@@ -11993,9 +11772,11 @@
       <p:sp>
         <p:nvSpPr>
           <p:cNvPr id="2" name="Text 0"/>
-          <p:cNvSpPr/>
+          <p:cNvSpPr>
+            <a:spLocks noGrp="1"/>
+          </p:cNvSpPr>
           <p:nvPr>
-            <p:ph idx="100" type="title" hasCustomPrompt="1"/>
+            <p:ph type="title" idx="100" hasCustomPrompt="1"/>
           </p:nvPr>
         </p:nvSpPr>
         <p:spPr>
@@ -12013,7 +11794,7 @@
           <a:bodyPr wrap="square" lIns="0" tIns="0" rIns="0" bIns="0" rtlCol="0" anchor="ctr"/>
           <a:lstStyle/>
           <a:p>
-            <a:pPr algn="l" indent="0" marL="0">
+            <a:pPr marL="0" indent="0" algn="l">
               <a:buNone/>
             </a:pPr>
             <a:r>
@@ -12030,14 +11811,14 @@
       </p:sp>
       <p:pic>
         <p:nvPicPr>
-          <p:cNvPr id="4" name="A customs officer inspecting drums with a scanner" descr="A customs officer inspecting drums with a scanner">    </p:cNvPr>
+          <p:cNvPr id="4" name="A customs officer inspecting drums with a scanner" descr="A customs officer inspecting drums with a scanner"/>
           <p:cNvPicPr>
             <a:picLocks noChangeAspect="1"/>
           </p:cNvPicPr>
           <p:nvPr/>
         </p:nvPicPr>
         <p:blipFill>
-          <a:blip r:embed="rId1"/>
+          <a:blip r:embed="rId3"/>
           <a:stretch>
             <a:fillRect/>
           </a:stretch>
@@ -12073,7 +11854,7 @@
           <a:bodyPr wrap="square" lIns="0" tIns="0" rIns="0" bIns="0" rtlCol="0" anchor="t"/>
           <a:lstStyle/>
           <a:p>
-            <a:pPr indent="0" marL="0">
+            <a:pPr marL="0" indent="0">
               <a:buNone/>
             </a:pPr>
             <a:r>
@@ -12161,7 +11942,7 @@
           <a:bodyPr wrap="square" lIns="0" tIns="0" rIns="0" bIns="0" rtlCol="0" anchor="ctr"/>
           <a:lstStyle/>
           <a:p>
-            <a:pPr algn="ctr" indent="0" marL="0">
+            <a:pPr marL="0" indent="0" algn="ctr">
               <a:buNone/>
             </a:pPr>
             <a:r>
@@ -12197,7 +11978,7 @@
           <a:bodyPr wrap="square" lIns="0" tIns="0" rIns="0" bIns="0" rtlCol="0" anchor="t"/>
           <a:lstStyle/>
           <a:p>
-            <a:pPr indent="0" marL="0">
+            <a:pPr marL="0" indent="0">
               <a:buNone/>
             </a:pPr>
             <a:r>
@@ -12211,7 +11992,7 @@
             <a:endParaRPr lang="en-US" sz="1400" dirty="0"/>
           </a:p>
           <a:p>
-            <a:pPr indent="0" marL="0">
+            <a:pPr marL="0" indent="0">
               <a:buNone/>
             </a:pPr>
             <a:r>
@@ -12299,7 +12080,7 @@
           <a:bodyPr wrap="square" lIns="0" tIns="0" rIns="0" bIns="0" rtlCol="0" anchor="ctr"/>
           <a:lstStyle/>
           <a:p>
-            <a:pPr algn="ctr" indent="0" marL="0">
+            <a:pPr marL="0" indent="0" algn="ctr">
               <a:buNone/>
             </a:pPr>
             <a:r>
@@ -12335,7 +12116,7 @@
           <a:bodyPr wrap="square" lIns="0" tIns="0" rIns="0" bIns="0" rtlCol="0" anchor="t"/>
           <a:lstStyle/>
           <a:p>
-            <a:pPr indent="0" marL="0">
+            <a:pPr marL="0" indent="0">
               <a:buNone/>
             </a:pPr>
             <a:r>
@@ -12349,7 +12130,7 @@
             <a:endParaRPr lang="en-US" sz="1400" dirty="0"/>
           </a:p>
           <a:p>
-            <a:pPr indent="0" marL="0">
+            <a:pPr marL="0" indent="0">
               <a:buNone/>
             </a:pPr>
             <a:r>
@@ -12437,7 +12218,7 @@
           <a:bodyPr wrap="square" lIns="0" tIns="0" rIns="0" bIns="0" rtlCol="0" anchor="ctr"/>
           <a:lstStyle/>
           <a:p>
-            <a:pPr algn="ctr" indent="0" marL="0">
+            <a:pPr marL="0" indent="0" algn="ctr">
               <a:buNone/>
             </a:pPr>
             <a:r>
@@ -12473,7 +12254,7 @@
           <a:bodyPr wrap="square" lIns="0" tIns="0" rIns="0" bIns="0" rtlCol="0" anchor="t"/>
           <a:lstStyle/>
           <a:p>
-            <a:pPr indent="0" marL="0">
+            <a:pPr marL="0" indent="0">
               <a:buNone/>
             </a:pPr>
             <a:r>
@@ -12487,7 +12268,7 @@
             <a:endParaRPr lang="en-US" sz="1400" dirty="0"/>
           </a:p>
           <a:p>
-            <a:pPr indent="0" marL="0">
+            <a:pPr marL="0" indent="0">
               <a:buNone/>
             </a:pPr>
             <a:r>
@@ -12575,7 +12356,7 @@
           <a:bodyPr wrap="square" lIns="0" tIns="0" rIns="0" bIns="0" rtlCol="0" anchor="ctr"/>
           <a:lstStyle/>
           <a:p>
-            <a:pPr algn="ctr" indent="0" marL="0">
+            <a:pPr marL="0" indent="0" algn="ctr">
               <a:buNone/>
             </a:pPr>
             <a:r>
@@ -12611,7 +12392,7 @@
           <a:bodyPr wrap="square" lIns="0" tIns="0" rIns="0" bIns="0" rtlCol="0" anchor="t"/>
           <a:lstStyle/>
           <a:p>
-            <a:pPr indent="0" marL="0">
+            <a:pPr marL="0" indent="0">
               <a:buNone/>
             </a:pPr>
             <a:r>
@@ -12625,7 +12406,7 @@
             <a:endParaRPr lang="en-US" sz="1400" dirty="0"/>
           </a:p>
           <a:p>
-            <a:pPr indent="0" marL="0">
+            <a:pPr marL="0" indent="0">
               <a:buNone/>
             </a:pPr>
             <a:r>
@@ -12661,7 +12442,7 @@
           <a:bodyPr wrap="square" lIns="0" tIns="0" rIns="0" bIns="0" rtlCol="0" anchor="t"/>
           <a:lstStyle/>
           <a:p>
-            <a:pPr indent="0" marL="0">
+            <a:pPr marL="0" indent="0">
               <a:buNone/>
             </a:pPr>
             <a:r>
@@ -12696,7 +12477,7 @@
           </a:prstGeom>
           <a:extLst>
             <a:ext uri="{C572A759-6A51-4108-AA02-DFA0A04FC94B}">
-              <ma14:wrappingTextBoxFlag xmlns:ma14="http://schemas.microsoft.com/office/mac/drawingml/2011/main" val="0"/>
+              <ma14:wrappingTextBoxFlag xmlns:ma14="http://schemas.microsoft.com/office/mac/drawingml/2011/main" xmlns="" val="0"/>
             </a:ext>
           </a:extLst>
         </p:spPr>
@@ -12714,7 +12495,7 @@
           <a:p>
             <a:pPr algn="r"/>
             <a:fld id="{F7021451-1387-4CA6-816F-3879F97B5CBC}" type="slidenum">
-              <a:rPr b="0" lang="en-US"/>
+              <a:rPr lang="en-US" b="0"/>
               <a:t>17</a:t>
             </a:fld>
             <a:endParaRPr lang="en-US"/>
@@ -12749,9 +12530,11 @@
       <p:sp>
         <p:nvSpPr>
           <p:cNvPr id="2" name="Text 0"/>
-          <p:cNvSpPr/>
+          <p:cNvSpPr>
+            <a:spLocks noGrp="1"/>
+          </p:cNvSpPr>
           <p:nvPr>
-            <p:ph idx="100" type="title" hasCustomPrompt="1"/>
+            <p:ph type="title" idx="100" hasCustomPrompt="1"/>
           </p:nvPr>
         </p:nvSpPr>
         <p:spPr>
@@ -12769,7 +12552,7 @@
           <a:bodyPr wrap="square" lIns="0" tIns="0" rIns="0" bIns="0" rtlCol="0" anchor="ctr"/>
           <a:lstStyle/>
           <a:p>
-            <a:pPr algn="l" indent="0" marL="0">
+            <a:pPr marL="0" indent="0" algn="l">
               <a:buNone/>
             </a:pPr>
             <a:r>
@@ -12786,14 +12569,14 @@
       </p:sp>
       <p:pic>
         <p:nvPicPr>
-          <p:cNvPr id="4" name="A cargo ship at the Apapa port, Lagos" descr="A cargo ship at the Apapa port, Lagos">    </p:cNvPr>
+          <p:cNvPr id="4" name="A cargo ship at the Apapa port, Lagos" descr="A cargo ship at the Apapa port, Lagos"/>
           <p:cNvPicPr>
             <a:picLocks noChangeAspect="1"/>
           </p:cNvPicPr>
           <p:nvPr/>
         </p:nvPicPr>
         <p:blipFill>
-          <a:blip r:embed="rId1"/>
+          <a:blip r:embed="rId3"/>
           <a:stretch>
             <a:fillRect/>
           </a:stretch>
@@ -12829,7 +12612,7 @@
           <a:bodyPr wrap="square" lIns="0" tIns="0" rIns="0" bIns="0" rtlCol="0" anchor="t"/>
           <a:lstStyle/>
           <a:p>
-            <a:pPr indent="0" marL="0">
+            <a:pPr marL="0" indent="0">
               <a:buNone/>
             </a:pPr>
             <a:r>
@@ -12892,7 +12675,7 @@
           <a:bodyPr wrap="square" lIns="0" tIns="0" rIns="0" bIns="0" rtlCol="0" anchor="ctr"/>
           <a:lstStyle/>
           <a:p>
-            <a:pPr indent="0" marL="0">
+            <a:pPr marL="0" indent="0">
               <a:buNone/>
             </a:pPr>
             <a:r>
@@ -12928,7 +12711,7 @@
           <a:bodyPr wrap="square" lIns="0" tIns="0" rIns="0" bIns="0" rtlCol="0" anchor="ctr"/>
           <a:lstStyle/>
           <a:p>
-            <a:pPr indent="0" marL="0">
+            <a:pPr marL="0" indent="0">
               <a:buNone/>
             </a:pPr>
             <a:r>
@@ -12991,7 +12774,7 @@
           <a:bodyPr wrap="square" lIns="0" tIns="0" rIns="0" bIns="0" rtlCol="0" anchor="ctr"/>
           <a:lstStyle/>
           <a:p>
-            <a:pPr indent="0" marL="0">
+            <a:pPr marL="0" indent="0">
               <a:buNone/>
             </a:pPr>
             <a:r>
@@ -13027,7 +12810,7 @@
           <a:bodyPr wrap="square" lIns="0" tIns="0" rIns="0" bIns="0" rtlCol="0" anchor="ctr"/>
           <a:lstStyle/>
           <a:p>
-            <a:pPr indent="0" marL="0">
+            <a:pPr marL="0" indent="0">
               <a:buNone/>
             </a:pPr>
             <a:r>
@@ -13090,7 +12873,7 @@
           <a:bodyPr wrap="square" lIns="0" tIns="0" rIns="0" bIns="0" rtlCol="0" anchor="ctr"/>
           <a:lstStyle/>
           <a:p>
-            <a:pPr indent="0" marL="0">
+            <a:pPr marL="0" indent="0">
               <a:buNone/>
             </a:pPr>
             <a:r>
@@ -13126,7 +12909,7 @@
           <a:bodyPr wrap="square" lIns="0" tIns="0" rIns="0" bIns="0" rtlCol="0" anchor="ctr"/>
           <a:lstStyle/>
           <a:p>
-            <a:pPr indent="0" marL="0">
+            <a:pPr marL="0" indent="0">
               <a:buNone/>
             </a:pPr>
             <a:r>
@@ -13189,7 +12972,7 @@
           <a:bodyPr wrap="square" lIns="0" tIns="0" rIns="0" bIns="0" rtlCol="0" anchor="ctr"/>
           <a:lstStyle/>
           <a:p>
-            <a:pPr indent="0" marL="0">
+            <a:pPr marL="0" indent="0">
               <a:buNone/>
             </a:pPr>
             <a:r>
@@ -13225,7 +13008,7 @@
           <a:bodyPr wrap="square" lIns="0" tIns="0" rIns="0" bIns="0" rtlCol="0" anchor="ctr"/>
           <a:lstStyle/>
           <a:p>
-            <a:pPr indent="0" marL="0">
+            <a:pPr marL="0" indent="0">
               <a:buNone/>
             </a:pPr>
             <a:r>
@@ -13288,11 +13071,11 @@
           <a:bodyPr wrap="square" lIns="0" tIns="0" rIns="0" bIns="0" rtlCol="0" anchor="t"/>
           <a:lstStyle/>
           <a:p>
-            <a:pPr indent="0" marL="0">
-              <a:buNone/>
-            </a:pPr>
-            <a:r>
-              <a:rPr lang="en-US" sz="1200" b="1" spc="200" kern="0" dirty="0">
+            <a:pPr marL="0" indent="0">
+              <a:buNone/>
+            </a:pPr>
+            <a:r>
+              <a:rPr lang="en-US" sz="1200" b="1" kern="0" spc="200" dirty="0">
                 <a:solidFill>
                   <a:schemeClr val="accent1"/>
                 </a:solidFill>
@@ -13351,7 +13134,7 @@
           <a:bodyPr wrap="square" lIns="0" tIns="0" rIns="0" bIns="0" rtlCol="0" anchor="ctr"/>
           <a:lstStyle/>
           <a:p>
-            <a:pPr algn="ctr" indent="0" marL="0">
+            <a:pPr marL="0" indent="0" algn="ctr">
               <a:buNone/>
             </a:pPr>
             <a:r>
@@ -13414,7 +13197,7 @@
           <a:bodyPr wrap="square" lIns="0" tIns="0" rIns="0" bIns="0" rtlCol="0" anchor="ctr"/>
           <a:lstStyle/>
           <a:p>
-            <a:pPr algn="ctr" indent="0" marL="0">
+            <a:pPr marL="0" indent="0" algn="ctr">
               <a:buNone/>
             </a:pPr>
             <a:r>
@@ -13477,7 +13260,7 @@
           <a:bodyPr wrap="square" lIns="0" tIns="0" rIns="0" bIns="0" rtlCol="0" anchor="ctr"/>
           <a:lstStyle/>
           <a:p>
-            <a:pPr algn="ctr" indent="0" marL="0">
+            <a:pPr marL="0" indent="0" algn="ctr">
               <a:buNone/>
             </a:pPr>
             <a:r>
@@ -13540,7 +13323,7 @@
           <a:bodyPr wrap="square" lIns="0" tIns="0" rIns="0" bIns="0" rtlCol="0" anchor="ctr"/>
           <a:lstStyle/>
           <a:p>
-            <a:pPr algn="ctr" indent="0" marL="0">
+            <a:pPr marL="0" indent="0" algn="ctr">
               <a:buNone/>
             </a:pPr>
             <a:r>
@@ -13603,7 +13386,7 @@
           <a:bodyPr wrap="square" lIns="0" tIns="0" rIns="0" bIns="0" rtlCol="0" anchor="ctr"/>
           <a:lstStyle/>
           <a:p>
-            <a:pPr algn="ctr" indent="0" marL="0">
+            <a:pPr marL="0" indent="0" algn="ctr">
               <a:buNone/>
             </a:pPr>
             <a:r>
@@ -13620,7 +13403,7 @@
       </p:sp>
       <p:sp>
         <p:nvSpPr>
-          <p:cNvPr id="25" name="Slide Number Placeholder 0"/>
+          <p:cNvPr id="3" name="Slide Number Placeholder 0"/>
           <p:cNvSpPr>
             <a:spLocks noGrp="1"/>
           </p:cNvSpPr>
@@ -13638,7 +13421,7 @@
           </a:prstGeom>
           <a:extLst>
             <a:ext uri="{C572A759-6A51-4108-AA02-DFA0A04FC94B}">
-              <ma14:wrappingTextBoxFlag xmlns:ma14="http://schemas.microsoft.com/office/mac/drawingml/2011/main" val="0"/>
+              <ma14:wrappingTextBoxFlag xmlns:ma14="http://schemas.microsoft.com/office/mac/drawingml/2011/main" xmlns="" val="0"/>
             </a:ext>
           </a:extLst>
         </p:spPr>
@@ -13656,7 +13439,7 @@
           <a:p>
             <a:pPr algn="r"/>
             <a:fld id="{F7021451-1387-4CA6-816F-3879F97B5CBC}" type="slidenum">
-              <a:rPr b="0" lang="en-US"/>
+              <a:rPr lang="en-US" b="0"/>
               <a:t>18</a:t>
             </a:fld>
             <a:endParaRPr lang="en-US"/>
@@ -13691,9 +13474,11 @@
       <p:sp>
         <p:nvSpPr>
           <p:cNvPr id="2" name="Text 0"/>
-          <p:cNvSpPr/>
+          <p:cNvSpPr>
+            <a:spLocks noGrp="1"/>
+          </p:cNvSpPr>
           <p:nvPr>
-            <p:ph idx="100" type="title" hasCustomPrompt="1"/>
+            <p:ph type="title" idx="100" hasCustomPrompt="1"/>
           </p:nvPr>
         </p:nvSpPr>
         <p:spPr>
@@ -13711,7 +13496,7 @@
           <a:bodyPr wrap="square" lIns="0" tIns="0" rIns="0" bIns="0" rtlCol="0" anchor="ctr"/>
           <a:lstStyle/>
           <a:p>
-            <a:pPr algn="l" indent="0" marL="0">
+            <a:pPr marL="0" indent="0" algn="l">
               <a:buNone/>
             </a:pPr>
             <a:r>
@@ -13774,7 +13559,7 @@
           <a:bodyPr wrap="square" lIns="0" tIns="0" rIns="0" bIns="0" rtlCol="0" anchor="ctr"/>
           <a:lstStyle/>
           <a:p>
-            <a:pPr indent="0" marL="0">
+            <a:pPr marL="0" indent="0">
               <a:buNone/>
             </a:pPr>
             <a:r>
@@ -13810,7 +13595,7 @@
           <a:bodyPr wrap="square" lIns="0" tIns="0" rIns="0" bIns="0" rtlCol="0" anchor="ctr"/>
           <a:lstStyle/>
           <a:p>
-            <a:pPr algn="r" indent="0" marL="0">
+            <a:pPr marL="0" indent="0" algn="r">
               <a:buNone/>
             </a:pPr>
             <a:r>
@@ -13873,7 +13658,7 @@
           <a:bodyPr wrap="square" lIns="0" tIns="0" rIns="0" bIns="0" rtlCol="0" anchor="ctr"/>
           <a:lstStyle/>
           <a:p>
-            <a:pPr indent="0" marL="0">
+            <a:pPr marL="0" indent="0">
               <a:buNone/>
             </a:pPr>
             <a:r>
@@ -13909,7 +13694,7 @@
           <a:bodyPr wrap="square" lIns="0" tIns="0" rIns="0" bIns="0" rtlCol="0" anchor="ctr"/>
           <a:lstStyle/>
           <a:p>
-            <a:pPr algn="r" indent="0" marL="0">
+            <a:pPr marL="0" indent="0" algn="r">
               <a:buNone/>
             </a:pPr>
             <a:r>
@@ -13972,7 +13757,7 @@
           <a:bodyPr wrap="square" lIns="0" tIns="0" rIns="0" bIns="0" rtlCol="0" anchor="ctr"/>
           <a:lstStyle/>
           <a:p>
-            <a:pPr indent="0" marL="0">
+            <a:pPr marL="0" indent="0">
               <a:buNone/>
             </a:pPr>
             <a:r>
@@ -14008,7 +13793,7 @@
           <a:bodyPr wrap="square" lIns="0" tIns="0" rIns="0" bIns="0" rtlCol="0" anchor="ctr"/>
           <a:lstStyle/>
           <a:p>
-            <a:pPr algn="r" indent="0" marL="0">
+            <a:pPr marL="0" indent="0" algn="r">
               <a:buNone/>
             </a:pPr>
             <a:r>
@@ -14071,7 +13856,7 @@
           <a:bodyPr wrap="square" lIns="0" tIns="0" rIns="0" bIns="0" rtlCol="0" anchor="ctr"/>
           <a:lstStyle/>
           <a:p>
-            <a:pPr indent="0" marL="0">
+            <a:pPr marL="0" indent="0">
               <a:buNone/>
             </a:pPr>
             <a:r>
@@ -14107,7 +13892,7 @@
           <a:bodyPr wrap="square" lIns="0" tIns="0" rIns="0" bIns="0" rtlCol="0" anchor="ctr"/>
           <a:lstStyle/>
           <a:p>
-            <a:pPr algn="r" indent="0" marL="0">
+            <a:pPr marL="0" indent="0" algn="r">
               <a:buNone/>
             </a:pPr>
             <a:r>
@@ -14170,7 +13955,7 @@
           <a:bodyPr wrap="square" lIns="0" tIns="0" rIns="0" bIns="0" rtlCol="0" anchor="ctr"/>
           <a:lstStyle/>
           <a:p>
-            <a:pPr indent="0" marL="0">
+            <a:pPr marL="0" indent="0">
               <a:buNone/>
             </a:pPr>
             <a:r>
@@ -14206,7 +13991,7 @@
           <a:bodyPr wrap="square" lIns="0" tIns="0" rIns="0" bIns="0" rtlCol="0" anchor="ctr"/>
           <a:lstStyle/>
           <a:p>
-            <a:pPr algn="r" indent="0" marL="0">
+            <a:pPr marL="0" indent="0" algn="r">
               <a:buNone/>
             </a:pPr>
             <a:r>
@@ -14269,7 +14054,7 @@
           <a:bodyPr wrap="square" lIns="0" tIns="0" rIns="0" bIns="0" rtlCol="0" anchor="ctr"/>
           <a:lstStyle/>
           <a:p>
-            <a:pPr indent="0" marL="0">
+            <a:pPr marL="0" indent="0">
               <a:buNone/>
             </a:pPr>
             <a:r>
@@ -14305,7 +14090,7 @@
           <a:bodyPr wrap="square" lIns="0" tIns="0" rIns="0" bIns="0" rtlCol="0" anchor="ctr"/>
           <a:lstStyle/>
           <a:p>
-            <a:pPr algn="r" indent="0" marL="0">
+            <a:pPr marL="0" indent="0" algn="r">
               <a:buNone/>
             </a:pPr>
             <a:r>
@@ -14368,7 +14153,7 @@
           <a:bodyPr wrap="square" lIns="0" tIns="0" rIns="0" bIns="0" rtlCol="0" anchor="ctr"/>
           <a:lstStyle/>
           <a:p>
-            <a:pPr indent="0" marL="0">
+            <a:pPr marL="0" indent="0">
               <a:buNone/>
             </a:pPr>
             <a:r>
@@ -14404,7 +14189,7 @@
           <a:bodyPr wrap="square" lIns="0" tIns="0" rIns="0" bIns="0" rtlCol="0" anchor="ctr"/>
           <a:lstStyle/>
           <a:p>
-            <a:pPr algn="r" indent="0" marL="0">
+            <a:pPr marL="0" indent="0" algn="r">
               <a:buNone/>
             </a:pPr>
             <a:r>
@@ -14467,7 +14252,7 @@
           <a:bodyPr wrap="square" lIns="0" tIns="0" rIns="0" bIns="0" rtlCol="0" anchor="ctr"/>
           <a:lstStyle/>
           <a:p>
-            <a:pPr indent="0" marL="0">
+            <a:pPr marL="0" indent="0">
               <a:buNone/>
             </a:pPr>
             <a:r>
@@ -14503,7 +14288,7 @@
           <a:bodyPr wrap="square" lIns="0" tIns="0" rIns="0" bIns="0" rtlCol="0" anchor="ctr"/>
           <a:lstStyle/>
           <a:p>
-            <a:pPr algn="r" indent="0" marL="0">
+            <a:pPr marL="0" indent="0" algn="r">
               <a:buNone/>
             </a:pPr>
             <a:r>
@@ -14566,7 +14351,7 @@
           <a:bodyPr wrap="square" lIns="0" tIns="0" rIns="0" bIns="0" rtlCol="0" anchor="ctr"/>
           <a:lstStyle/>
           <a:p>
-            <a:pPr indent="0" marL="0">
+            <a:pPr marL="0" indent="0">
               <a:buNone/>
             </a:pPr>
             <a:r>
@@ -14602,7 +14387,7 @@
           <a:bodyPr wrap="square" lIns="0" tIns="0" rIns="0" bIns="0" rtlCol="0" anchor="ctr"/>
           <a:lstStyle/>
           <a:p>
-            <a:pPr algn="r" indent="0" marL="0">
+            <a:pPr marL="0" indent="0" algn="r">
               <a:buNone/>
             </a:pPr>
             <a:r>
@@ -14665,7 +14450,7 @@
           <a:bodyPr wrap="square" lIns="0" tIns="0" rIns="0" bIns="0" rtlCol="0" anchor="ctr"/>
           <a:lstStyle/>
           <a:p>
-            <a:pPr indent="0" marL="0">
+            <a:pPr marL="0" indent="0">
               <a:buNone/>
             </a:pPr>
             <a:r>
@@ -14701,7 +14486,7 @@
           <a:bodyPr wrap="square" lIns="0" tIns="0" rIns="0" bIns="0" rtlCol="0" anchor="ctr"/>
           <a:lstStyle/>
           <a:p>
-            <a:pPr algn="r" indent="0" marL="0">
+            <a:pPr marL="0" indent="0" algn="r">
               <a:buNone/>
             </a:pPr>
             <a:r>
@@ -14764,11 +14549,11 @@
           <a:bodyPr wrap="square" lIns="0" tIns="0" rIns="0" bIns="0" rtlCol="0" anchor="t"/>
           <a:lstStyle/>
           <a:p>
-            <a:pPr indent="0" marL="0">
-              <a:buNone/>
-            </a:pPr>
-            <a:r>
-              <a:rPr lang="en-US" sz="1200" b="1" spc="200" kern="0" dirty="0">
+            <a:pPr marL="0" indent="0">
+              <a:buNone/>
+            </a:pPr>
+            <a:r>
+              <a:rPr lang="en-US" sz="1200" b="1" kern="0" spc="200" dirty="0">
                 <a:solidFill>
                   <a:schemeClr val="accent1"/>
                 </a:solidFill>
@@ -14800,7 +14585,7 @@
           <a:bodyPr wrap="square" lIns="0" tIns="0" rIns="0" bIns="0" rtlCol="0" anchor="t"/>
           <a:lstStyle/>
           <a:p>
-            <a:pPr indent="0" marL="0">
+            <a:pPr marL="0" indent="0">
               <a:buNone/>
             </a:pPr>
             <a:r>
@@ -14839,11 +14624,11 @@
           <a:bodyPr wrap="square" lIns="0" tIns="0" rIns="0" bIns="0" rtlCol="0" anchor="t"/>
           <a:lstStyle/>
           <a:p>
-            <a:pPr indent="0" marL="0">
-              <a:buNone/>
-            </a:pPr>
-            <a:r>
-              <a:rPr lang="en-US" sz="1200" b="1" spc="200" kern="0" dirty="0">
+            <a:pPr marL="0" indent="0">
+              <a:buNone/>
+            </a:pPr>
+            <a:r>
+              <a:rPr lang="en-US" sz="1200" b="1" kern="0" spc="200" dirty="0">
                 <a:solidFill>
                   <a:schemeClr val="accent1"/>
                 </a:solidFill>
@@ -14875,7 +14660,7 @@
           <a:bodyPr wrap="square" lIns="0" tIns="0" rIns="0" bIns="0" rtlCol="0" anchor="t"/>
           <a:lstStyle/>
           <a:p>
-            <a:pPr indent="0" marL="0">
+            <a:pPr marL="0" indent="0">
               <a:buNone/>
             </a:pPr>
             <a:r>
@@ -14914,7 +14699,7 @@
           <a:bodyPr wrap="square" lIns="0" tIns="0" rIns="0" bIns="0" rtlCol="0" anchor="t"/>
           <a:lstStyle/>
           <a:p>
-            <a:pPr indent="0" marL="0">
+            <a:pPr marL="0" indent="0">
               <a:buNone/>
             </a:pPr>
             <a:r>
@@ -14950,7 +14735,7 @@
           <a:bodyPr wrap="square" lIns="0" tIns="0" rIns="0" bIns="0" rtlCol="0" anchor="t"/>
           <a:lstStyle/>
           <a:p>
-            <a:pPr indent="0" marL="0">
+            <a:pPr marL="0" indent="0">
               <a:buNone/>
             </a:pPr>
             <a:r>
@@ -14967,7 +14752,7 @@
       </p:sp>
       <p:sp>
         <p:nvSpPr>
-          <p:cNvPr id="25" name="Slide Number Placeholder 0"/>
+          <p:cNvPr id="3" name="Slide Number Placeholder 0"/>
           <p:cNvSpPr>
             <a:spLocks noGrp="1"/>
           </p:cNvSpPr>
@@ -14985,7 +14770,7 @@
           </a:prstGeom>
           <a:extLst>
             <a:ext uri="{C572A759-6A51-4108-AA02-DFA0A04FC94B}">
-              <ma14:wrappingTextBoxFlag xmlns:ma14="http://schemas.microsoft.com/office/mac/drawingml/2011/main" val="0"/>
+              <ma14:wrappingTextBoxFlag xmlns:ma14="http://schemas.microsoft.com/office/mac/drawingml/2011/main" xmlns="" val="0"/>
             </a:ext>
           </a:extLst>
         </p:spPr>
@@ -15003,7 +14788,7 @@
           <a:p>
             <a:pPr algn="r"/>
             <a:fld id="{F7021451-1387-4CA6-816F-3879F97B5CBC}" type="slidenum">
-              <a:rPr b="0" lang="en-US"/>
+              <a:rPr lang="en-US" b="0"/>
               <a:t>19</a:t>
             </a:fld>
             <a:endParaRPr lang="en-US"/>
@@ -15038,9 +14823,11 @@
       <p:sp>
         <p:nvSpPr>
           <p:cNvPr id="2" name="Text 0"/>
-          <p:cNvSpPr/>
+          <p:cNvSpPr>
+            <a:spLocks noGrp="1"/>
+          </p:cNvSpPr>
           <p:nvPr>
-            <p:ph idx="100" type="title" hasCustomPrompt="1"/>
+            <p:ph type="title" idx="100" hasCustomPrompt="1"/>
           </p:nvPr>
         </p:nvSpPr>
         <p:spPr>
@@ -15058,7 +14845,7 @@
           <a:bodyPr wrap="square" lIns="0" tIns="0" rIns="0" bIns="0" rtlCol="0" anchor="ctr"/>
           <a:lstStyle/>
           <a:p>
-            <a:pPr algn="l" indent="0" marL="0">
+            <a:pPr marL="0" indent="0" algn="l">
               <a:buNone/>
             </a:pPr>
             <a:r>
@@ -15075,14 +14862,14 @@
       </p:sp>
       <p:pic>
         <p:nvPicPr>
-          <p:cNvPr id="4" name="Computer Village, Ikeja, Lagos" descr="Computer Village, Ikeja, Lagos">    </p:cNvPr>
+          <p:cNvPr id="4" name="Computer Village, Ikeja, Lagos" descr="Computer Village, Ikeja, Lagos"/>
           <p:cNvPicPr>
             <a:picLocks noChangeAspect="1"/>
           </p:cNvPicPr>
           <p:nvPr/>
         </p:nvPicPr>
         <p:blipFill>
-          <a:blip r:embed="rId1"/>
+          <a:blip r:embed="rId3"/>
           <a:stretch>
             <a:fillRect/>
           </a:stretch>
@@ -15118,7 +14905,7 @@
           <a:bodyPr wrap="square" lIns="0" tIns="0" rIns="0" bIns="0" rtlCol="0" anchor="t"/>
           <a:lstStyle/>
           <a:p>
-            <a:pPr indent="0" marL="0">
+            <a:pPr marL="0" indent="0">
               <a:buNone/>
             </a:pPr>
             <a:r>
@@ -15181,7 +14968,7 @@
           <a:bodyPr wrap="square" lIns="0" tIns="0" rIns="0" bIns="0" rtlCol="0" anchor="t"/>
           <a:lstStyle/>
           <a:p>
-            <a:pPr indent="0" marL="0">
+            <a:pPr marL="0" indent="0">
               <a:buNone/>
             </a:pPr>
             <a:r>
@@ -15220,7 +15007,7 @@
           <a:bodyPr wrap="square" lIns="0" tIns="0" rIns="0" bIns="0" rtlCol="0" anchor="t"/>
           <a:lstStyle/>
           <a:p>
-            <a:pPr indent="0" marL="0">
+            <a:pPr marL="0" indent="0">
               <a:buNone/>
             </a:pPr>
             <a:r>
@@ -15231,9 +15018,6 @@
               </a:rPr>
               <a:t>Tunde</a:t>
             </a:r>
-            <a:pPr indent="0" marL="0">
-              <a:buNone/>
-            </a:pPr>
             <a:r>
               <a:rPr lang="en-US" sz="1500" dirty="0">
                 <a:solidFill>
@@ -15242,9 +15026,6 @@
               </a:rPr>
               <a:t> sells phone accessories at Computer Village. He pays </a:t>
             </a:r>
-            <a:pPr indent="0" marL="0">
-              <a:buNone/>
-            </a:pPr>
             <a:r>
               <a:rPr lang="en-US" sz="1500" b="1" dirty="0">
                 <a:solidFill>
@@ -15253,9 +15034,6 @@
               </a:rPr>
               <a:t>₦9,500</a:t>
             </a:r>
-            <a:pPr indent="0" marL="0">
-              <a:buNone/>
-            </a:pPr>
             <a:r>
               <a:rPr lang="en-US" sz="1500" dirty="0">
                 <a:solidFill>
@@ -15264,9 +15042,6 @@
               </a:rPr>
               <a:t> for a power bank. A supplier website shows the same item at </a:t>
             </a:r>
-            <a:pPr indent="0" marL="0">
-              <a:buNone/>
-            </a:pPr>
             <a:r>
               <a:rPr lang="en-US" sz="1500" b="1" dirty="0">
                 <a:solidFill>
@@ -15275,9 +15050,6 @@
               </a:rPr>
               <a:t>$3.00</a:t>
             </a:r>
-            <a:pPr indent="0" marL="0">
-              <a:buNone/>
-            </a:pPr>
             <a:r>
               <a:rPr lang="en-US" sz="1500" dirty="0">
                 <a:solidFill>
@@ -15338,7 +15110,7 @@
           <a:bodyPr wrap="square" lIns="0" tIns="0" rIns="0" bIns="0" rtlCol="0" anchor="t"/>
           <a:lstStyle/>
           <a:p>
-            <a:pPr indent="0" marL="0">
+            <a:pPr marL="0" indent="0">
               <a:buNone/>
             </a:pPr>
             <a:r>
@@ -15377,7 +15149,7 @@
           <a:bodyPr wrap="square" lIns="0" tIns="0" rIns="0" bIns="0" rtlCol="0" anchor="t"/>
           <a:lstStyle/>
           <a:p>
-            <a:pPr indent="0" marL="0">
+            <a:pPr marL="0" indent="0">
               <a:buNone/>
             </a:pPr>
             <a:r>
@@ -15412,7 +15184,7 @@
           </a:prstGeom>
           <a:extLst>
             <a:ext uri="{C572A759-6A51-4108-AA02-DFA0A04FC94B}">
-              <ma14:wrappingTextBoxFlag xmlns:ma14="http://schemas.microsoft.com/office/mac/drawingml/2011/main" val="0"/>
+              <ma14:wrappingTextBoxFlag xmlns:ma14="http://schemas.microsoft.com/office/mac/drawingml/2011/main" xmlns="" val="0"/>
             </a:ext>
           </a:extLst>
         </p:spPr>
@@ -15430,7 +15202,7 @@
           <a:p>
             <a:pPr algn="r"/>
             <a:fld id="{F7021451-1387-4CA6-816F-3879F97B5CBC}" type="slidenum">
-              <a:rPr b="0" lang="en-US"/>
+              <a:rPr lang="en-US" b="0"/>
               <a:t>2</a:t>
             </a:fld>
             <a:endParaRPr lang="en-US"/>
@@ -15465,9 +15237,11 @@
       <p:sp>
         <p:nvSpPr>
           <p:cNvPr id="2" name="Text 0"/>
-          <p:cNvSpPr/>
+          <p:cNvSpPr>
+            <a:spLocks noGrp="1"/>
+          </p:cNvSpPr>
           <p:nvPr>
-            <p:ph idx="100" type="title" hasCustomPrompt="1"/>
+            <p:ph type="title" idx="100" hasCustomPrompt="1"/>
           </p:nvPr>
         </p:nvSpPr>
         <p:spPr>
@@ -15485,7 +15259,7 @@
           <a:bodyPr wrap="square" lIns="0" tIns="0" rIns="0" bIns="0" rtlCol="0" anchor="ctr"/>
           <a:lstStyle/>
           <a:p>
-            <a:pPr algn="l" indent="0" marL="0">
+            <a:pPr marL="0" indent="0" algn="l">
               <a:buNone/>
             </a:pPr>
             <a:r>
@@ -15502,7 +15276,7 @@
       </p:sp>
       <p:graphicFrame>
         <p:nvGraphicFramePr>
-          <p:cNvPr id="4" name="Chart 0" descr=""/>
+          <p:cNvPr id="4" name="Chart 0"/>
           <p:cNvGraphicFramePr/>
           <p:nvPr/>
         </p:nvGraphicFramePr>
@@ -15510,9 +15284,9 @@
           <a:off x="457200" y="1143000"/>
           <a:ext cx="5577840" cy="3063240"/>
         </p:xfrm>
-        <a:graphic xmlns:a="http://schemas.openxmlformats.org/drawingml/2006/main">
+        <a:graphic>
           <a:graphicData uri="http://schemas.openxmlformats.org/drawingml/2006/chart">
-            <c:chart xmlns:c="http://schemas.openxmlformats.org/drawingml/2006/chart" r:id="rId1"/>
+            <c:chart xmlns:c="http://schemas.openxmlformats.org/drawingml/2006/chart" xmlns:r="http://schemas.openxmlformats.org/officeDocument/2006/relationships" r:id="rId3"/>
           </a:graphicData>
         </a:graphic>
       </p:graphicFrame>
@@ -15537,7 +15311,7 @@
           <a:bodyPr wrap="square" lIns="0" tIns="0" rIns="0" bIns="0" rtlCol="0" anchor="t"/>
           <a:lstStyle/>
           <a:p>
-            <a:pPr indent="0" marL="0">
+            <a:pPr marL="0" indent="0">
               <a:buNone/>
             </a:pPr>
             <a:r>
@@ -15548,9 +15322,6 @@
               </a:rPr>
               <a:t>Amber: goods and freight   </a:t>
             </a:r>
-            <a:pPr indent="0" marL="0">
-              <a:buNone/>
-            </a:pPr>
             <a:r>
               <a:rPr lang="en-US" sz="1200" b="1" dirty="0">
                 <a:solidFill>
@@ -15559,9 +15330,6 @@
               </a:rPr>
               <a:t>Brick: duty and tax   </a:t>
             </a:r>
-            <a:pPr indent="0" marL="0">
-              <a:buNone/>
-            </a:pPr>
             <a:r>
               <a:rPr lang="en-US" sz="1200" b="1" dirty="0">
                 <a:solidFill>
@@ -15622,11 +15390,11 @@
           <a:bodyPr wrap="square" lIns="0" tIns="0" rIns="0" bIns="0" rtlCol="0" anchor="t"/>
           <a:lstStyle/>
           <a:p>
-            <a:pPr indent="0" marL="0">
-              <a:buNone/>
-            </a:pPr>
-            <a:r>
-              <a:rPr lang="en-US" sz="1200" b="1" spc="200" kern="0" dirty="0">
+            <a:pPr marL="0" indent="0">
+              <a:buNone/>
+            </a:pPr>
+            <a:r>
+              <a:rPr lang="en-US" sz="1200" b="1" kern="0" spc="200" dirty="0">
                 <a:solidFill>
                   <a:schemeClr val="accent2"/>
                 </a:solidFill>
@@ -15751,7 +15519,7 @@
           </a:prstGeom>
           <a:extLst>
             <a:ext uri="{C572A759-6A51-4108-AA02-DFA0A04FC94B}">
-              <ma14:wrappingTextBoxFlag xmlns:ma14="http://schemas.microsoft.com/office/mac/drawingml/2011/main" val="0"/>
+              <ma14:wrappingTextBoxFlag xmlns:ma14="http://schemas.microsoft.com/office/mac/drawingml/2011/main" xmlns="" val="0"/>
             </a:ext>
           </a:extLst>
         </p:spPr>
@@ -15769,7 +15537,7 @@
           <a:p>
             <a:pPr algn="r"/>
             <a:fld id="{F7021451-1387-4CA6-816F-3879F97B5CBC}" type="slidenum">
-              <a:rPr b="0" lang="en-US"/>
+              <a:rPr lang="en-US" b="0"/>
               <a:t>20</a:t>
             </a:fld>
             <a:endParaRPr lang="en-US"/>
@@ -15804,9 +15572,11 @@
       <p:sp>
         <p:nvSpPr>
           <p:cNvPr id="2" name="Text 0"/>
-          <p:cNvSpPr/>
+          <p:cNvSpPr>
+            <a:spLocks noGrp="1"/>
+          </p:cNvSpPr>
           <p:nvPr>
-            <p:ph idx="100" type="title" hasCustomPrompt="1"/>
+            <p:ph type="title" idx="100" hasCustomPrompt="1"/>
           </p:nvPr>
         </p:nvSpPr>
         <p:spPr>
@@ -15824,7 +15594,7 @@
           <a:bodyPr wrap="square" lIns="0" tIns="0" rIns="0" bIns="0" rtlCol="0" anchor="ctr"/>
           <a:lstStyle/>
           <a:p>
-            <a:pPr algn="l" indent="0" marL="0">
+            <a:pPr marL="0" indent="0" algn="l">
               <a:buNone/>
             </a:pPr>
             <a:r>
@@ -15841,14 +15611,14 @@
       </p:sp>
       <p:pic>
         <p:nvPicPr>
-          <p:cNvPr id="4" name="Nigerian naira banknotes" descr="Nigerian naira banknotes">    </p:cNvPr>
+          <p:cNvPr id="4" name="Nigerian naira banknotes" descr="Nigerian naira banknotes"/>
           <p:cNvPicPr>
             <a:picLocks noChangeAspect="1"/>
           </p:cNvPicPr>
           <p:nvPr/>
         </p:nvPicPr>
         <p:blipFill>
-          <a:blip r:embed="rId1"/>
+          <a:blip r:embed="rId3"/>
           <a:stretch>
             <a:fillRect/>
           </a:stretch>
@@ -15884,7 +15654,7 @@
           <a:bodyPr wrap="square" lIns="0" tIns="0" rIns="0" bIns="0" rtlCol="0" anchor="t"/>
           <a:lstStyle/>
           <a:p>
-            <a:pPr indent="0" marL="0">
+            <a:pPr marL="0" indent="0">
               <a:buNone/>
             </a:pPr>
             <a:r>
@@ -15947,7 +15717,7 @@
           <a:bodyPr wrap="square" lIns="0" tIns="0" rIns="0" bIns="0" rtlCol="0" anchor="ctr"/>
           <a:lstStyle/>
           <a:p>
-            <a:pPr indent="0" marL="0">
+            <a:pPr marL="0" indent="0">
               <a:buNone/>
             </a:pPr>
             <a:r>
@@ -16010,11 +15780,11 @@
           <a:bodyPr wrap="square" lIns="0" tIns="0" rIns="0" bIns="0" rtlCol="0" anchor="t"/>
           <a:lstStyle/>
           <a:p>
-            <a:pPr indent="0" marL="0">
-              <a:buNone/>
-            </a:pPr>
-            <a:r>
-              <a:rPr lang="en-US" sz="1200" b="1" spc="200" kern="0" dirty="0">
+            <a:pPr marL="0" indent="0">
+              <a:buNone/>
+            </a:pPr>
+            <a:r>
+              <a:rPr lang="en-US" sz="1200" b="1" kern="0" spc="200" dirty="0">
                 <a:solidFill>
                   <a:schemeClr val="accent2"/>
                 </a:solidFill>
@@ -16046,7 +15816,7 @@
           <a:bodyPr wrap="square" lIns="0" tIns="0" rIns="0" bIns="0" rtlCol="0" anchor="t"/>
           <a:lstStyle/>
           <a:p>
-            <a:pPr indent="0" marL="0">
+            <a:pPr marL="0" indent="0">
               <a:buNone/>
             </a:pPr>
             <a:r>
@@ -16085,7 +15855,7 @@
           <a:bodyPr wrap="square" lIns="0" tIns="0" rIns="0" bIns="0" rtlCol="0" anchor="t"/>
           <a:lstStyle/>
           <a:p>
-            <a:pPr indent="0" marL="0">
+            <a:pPr marL="0" indent="0">
               <a:buNone/>
             </a:pPr>
             <a:r>
@@ -16148,11 +15918,11 @@
           <a:bodyPr wrap="square" lIns="0" tIns="0" rIns="0" bIns="0" rtlCol="0" anchor="t"/>
           <a:lstStyle/>
           <a:p>
-            <a:pPr indent="0" marL="0">
-              <a:buNone/>
-            </a:pPr>
-            <a:r>
-              <a:rPr lang="en-US" sz="1200" b="1" spc="200" kern="0" dirty="0">
+            <a:pPr marL="0" indent="0">
+              <a:buNone/>
+            </a:pPr>
+            <a:r>
+              <a:rPr lang="en-US" sz="1200" b="1" kern="0" spc="200" dirty="0">
                 <a:solidFill>
                   <a:schemeClr val="accent2"/>
                 </a:solidFill>
@@ -16184,7 +15954,7 @@
           <a:bodyPr wrap="square" lIns="0" tIns="0" rIns="0" bIns="0" rtlCol="0" anchor="t"/>
           <a:lstStyle/>
           <a:p>
-            <a:pPr indent="0" marL="0">
+            <a:pPr marL="0" indent="0">
               <a:buNone/>
             </a:pPr>
             <a:r>
@@ -16220,7 +15990,7 @@
           <a:bodyPr wrap="square" lIns="0" tIns="0" rIns="0" bIns="0" rtlCol="0" anchor="t"/>
           <a:lstStyle/>
           <a:p>
-            <a:pPr indent="0" marL="0">
+            <a:pPr marL="0" indent="0">
               <a:buNone/>
             </a:pPr>
             <a:r>
@@ -16283,11 +16053,11 @@
           <a:bodyPr wrap="square" lIns="0" tIns="0" rIns="0" bIns="0" rtlCol="0" anchor="t"/>
           <a:lstStyle/>
           <a:p>
-            <a:pPr indent="0" marL="0">
-              <a:buNone/>
-            </a:pPr>
-            <a:r>
-              <a:rPr lang="en-US" sz="1200" b="1" spc="200" kern="0" dirty="0">
+            <a:pPr marL="0" indent="0">
+              <a:buNone/>
+            </a:pPr>
+            <a:r>
+              <a:rPr lang="en-US" sz="1200" b="1" kern="0" spc="200" dirty="0">
                 <a:solidFill>
                   <a:schemeClr val="accent6"/>
                 </a:solidFill>
@@ -16319,7 +16089,7 @@
           <a:bodyPr wrap="square" lIns="0" tIns="0" rIns="0" bIns="0" rtlCol="0" anchor="t"/>
           <a:lstStyle/>
           <a:p>
-            <a:pPr indent="0" marL="0">
+            <a:pPr marL="0" indent="0">
               <a:buNone/>
             </a:pPr>
             <a:r>
@@ -16355,7 +16125,7 @@
           <a:bodyPr wrap="square" lIns="0" tIns="0" rIns="0" bIns="0" rtlCol="0" anchor="t"/>
           <a:lstStyle/>
           <a:p>
-            <a:pPr indent="0" marL="0">
+            <a:pPr marL="0" indent="0">
               <a:buNone/>
             </a:pPr>
             <a:r>
@@ -16390,7 +16160,7 @@
           </a:prstGeom>
           <a:extLst>
             <a:ext uri="{C572A759-6A51-4108-AA02-DFA0A04FC94B}">
-              <ma14:wrappingTextBoxFlag xmlns:ma14="http://schemas.microsoft.com/office/mac/drawingml/2011/main" val="0"/>
+              <ma14:wrappingTextBoxFlag xmlns:ma14="http://schemas.microsoft.com/office/mac/drawingml/2011/main" xmlns="" val="0"/>
             </a:ext>
           </a:extLst>
         </p:spPr>
@@ -16408,7 +16178,7 @@
           <a:p>
             <a:pPr algn="r"/>
             <a:fld id="{F7021451-1387-4CA6-816F-3879F97B5CBC}" type="slidenum">
-              <a:rPr b="0" lang="en-US"/>
+              <a:rPr lang="en-US" b="0"/>
               <a:t>21</a:t>
             </a:fld>
             <a:endParaRPr lang="en-US"/>
@@ -16443,9 +16213,11 @@
       <p:sp>
         <p:nvSpPr>
           <p:cNvPr id="2" name="Text 0"/>
-          <p:cNvSpPr/>
+          <p:cNvSpPr>
+            <a:spLocks noGrp="1"/>
+          </p:cNvSpPr>
           <p:nvPr>
-            <p:ph idx="100" type="title" hasCustomPrompt="1"/>
+            <p:ph type="title" idx="100" hasCustomPrompt="1"/>
           </p:nvPr>
         </p:nvSpPr>
         <p:spPr>
@@ -16463,7 +16235,7 @@
           <a:bodyPr wrap="square" lIns="0" tIns="0" rIns="0" bIns="0" rtlCol="0" anchor="ctr"/>
           <a:lstStyle/>
           <a:p>
-            <a:pPr algn="l" indent="0" marL="0">
+            <a:pPr marL="0" indent="0" algn="l">
               <a:buNone/>
             </a:pPr>
             <a:r>
@@ -16480,14 +16252,14 @@
       </p:sp>
       <p:pic>
         <p:nvPicPr>
-          <p:cNvPr id="4" name="A busy Lagos market" descr="A busy Lagos market">    </p:cNvPr>
+          <p:cNvPr id="4" name="A busy Lagos market" descr="A busy Lagos market"/>
           <p:cNvPicPr>
             <a:picLocks noChangeAspect="1"/>
           </p:cNvPicPr>
           <p:nvPr/>
         </p:nvPicPr>
         <p:blipFill>
-          <a:blip r:embed="rId1"/>
+          <a:blip r:embed="rId3"/>
           <a:stretch>
             <a:fillRect/>
           </a:stretch>
@@ -16523,7 +16295,7 @@
           <a:bodyPr wrap="square" lIns="0" tIns="0" rIns="0" bIns="0" rtlCol="0" anchor="t"/>
           <a:lstStyle/>
           <a:p>
-            <a:pPr indent="0" marL="0">
+            <a:pPr marL="0" indent="0">
               <a:buNone/>
             </a:pPr>
             <a:r>
@@ -16586,11 +16358,11 @@
           <a:bodyPr wrap="square" lIns="0" tIns="0" rIns="0" bIns="0" rtlCol="0" anchor="t"/>
           <a:lstStyle/>
           <a:p>
-            <a:pPr indent="0" marL="0">
-              <a:buNone/>
-            </a:pPr>
-            <a:r>
-              <a:rPr lang="en-US" sz="1200" b="1" spc="200" kern="0" dirty="0">
+            <a:pPr marL="0" indent="0">
+              <a:buNone/>
+            </a:pPr>
+            <a:r>
+              <a:rPr lang="en-US" sz="1200" b="1" kern="0" spc="200" dirty="0">
                 <a:solidFill>
                   <a:schemeClr val="accent2"/>
                 </a:solidFill>
@@ -16622,7 +16394,7 @@
           <a:bodyPr wrap="square" lIns="0" tIns="0" rIns="0" bIns="0" rtlCol="0" anchor="t"/>
           <a:lstStyle/>
           <a:p>
-            <a:pPr indent="0" marL="0">
+            <a:pPr marL="0" indent="0">
               <a:buNone/>
             </a:pPr>
             <a:r>
@@ -16661,7 +16433,7 @@
           <a:bodyPr wrap="square" lIns="0" tIns="0" rIns="0" bIns="0" rtlCol="0" anchor="t"/>
           <a:lstStyle/>
           <a:p>
-            <a:pPr indent="0" marL="0">
+            <a:pPr marL="0" indent="0">
               <a:buNone/>
             </a:pPr>
             <a:r>
@@ -16724,11 +16496,11 @@
           <a:bodyPr wrap="square" lIns="0" tIns="0" rIns="0" bIns="0" rtlCol="0" anchor="t"/>
           <a:lstStyle/>
           <a:p>
-            <a:pPr indent="0" marL="0">
-              <a:buNone/>
-            </a:pPr>
-            <a:r>
-              <a:rPr lang="en-US" sz="1200" b="1" spc="200" kern="0" dirty="0">
+            <a:pPr marL="0" indent="0">
+              <a:buNone/>
+            </a:pPr>
+            <a:r>
+              <a:rPr lang="en-US" sz="1200" b="1" kern="0" spc="200" dirty="0">
                 <a:solidFill>
                   <a:schemeClr val="accent1"/>
                 </a:solidFill>
@@ -16760,7 +16532,7 @@
           <a:bodyPr wrap="square" lIns="0" tIns="0" rIns="0" bIns="0" rtlCol="0" anchor="t"/>
           <a:lstStyle/>
           <a:p>
-            <a:pPr indent="0" marL="0">
+            <a:pPr marL="0" indent="0">
               <a:buNone/>
             </a:pPr>
             <a:r>
@@ -16799,7 +16571,7 @@
           <a:bodyPr wrap="square" lIns="0" tIns="0" rIns="0" bIns="0" rtlCol="0" anchor="t"/>
           <a:lstStyle/>
           <a:p>
-            <a:pPr indent="0" marL="0">
+            <a:pPr marL="0" indent="0">
               <a:buNone/>
             </a:pPr>
             <a:r>
@@ -16834,7 +16606,7 @@
           </a:prstGeom>
           <a:extLst>
             <a:ext uri="{C572A759-6A51-4108-AA02-DFA0A04FC94B}">
-              <ma14:wrappingTextBoxFlag xmlns:ma14="http://schemas.microsoft.com/office/mac/drawingml/2011/main" val="0"/>
+              <ma14:wrappingTextBoxFlag xmlns:ma14="http://schemas.microsoft.com/office/mac/drawingml/2011/main" xmlns="" val="0"/>
             </a:ext>
           </a:extLst>
         </p:spPr>
@@ -16852,7 +16624,7 @@
           <a:p>
             <a:pPr algn="r"/>
             <a:fld id="{F7021451-1387-4CA6-816F-3879F97B5CBC}" type="slidenum">
-              <a:rPr b="0" lang="en-US"/>
+              <a:rPr lang="en-US" b="0"/>
               <a:t>22</a:t>
             </a:fld>
             <a:endParaRPr lang="en-US"/>
@@ -16887,9 +16659,11 @@
       <p:sp>
         <p:nvSpPr>
           <p:cNvPr id="2" name="Text 0"/>
-          <p:cNvSpPr/>
+          <p:cNvSpPr>
+            <a:spLocks noGrp="1"/>
+          </p:cNvSpPr>
           <p:nvPr>
-            <p:ph idx="100" type="title" hasCustomPrompt="1"/>
+            <p:ph type="title" idx="100" hasCustomPrompt="1"/>
           </p:nvPr>
         </p:nvSpPr>
         <p:spPr>
@@ -16907,7 +16681,7 @@
           <a:bodyPr wrap="square" lIns="0" tIns="0" rIns="0" bIns="0" rtlCol="0" anchor="ctr"/>
           <a:lstStyle/>
           <a:p>
-            <a:pPr algn="l" indent="0" marL="0">
+            <a:pPr marL="0" indent="0" algn="l">
               <a:buNone/>
             </a:pPr>
             <a:r>
@@ -16976,14 +16750,14 @@
       </p:sp>
       <p:pic>
         <p:nvPicPr>
-          <p:cNvPr id="6" name="icon FaGlobeAfrica" descr="preencoded.png">    </p:cNvPr>
+          <p:cNvPr id="6" name="icon FaGlobeAfrica" descr="preencoded.png"/>
           <p:cNvPicPr>
             <a:picLocks noChangeAspect="1"/>
           </p:cNvPicPr>
           <p:nvPr/>
         </p:nvPicPr>
         <p:blipFill>
-          <a:blip r:embed="rId1"/>
+          <a:blip r:embed="rId3"/>
           <a:stretch>
             <a:fillRect/>
           </a:stretch>
@@ -17019,7 +16793,7 @@
           <a:bodyPr wrap="square" lIns="0" tIns="0" rIns="0" bIns="0" rtlCol="0" anchor="t"/>
           <a:lstStyle/>
           <a:p>
-            <a:pPr indent="0" marL="0">
+            <a:pPr marL="0" indent="0">
               <a:buNone/>
             </a:pPr>
             <a:r>
@@ -17058,7 +16832,7 @@
           <a:bodyPr wrap="square" lIns="0" tIns="0" rIns="0" bIns="0" rtlCol="0" anchor="t"/>
           <a:lstStyle/>
           <a:p>
-            <a:pPr indent="0" marL="0">
+            <a:pPr marL="0" indent="0">
               <a:buNone/>
             </a:pPr>
             <a:r>
@@ -17127,14 +16901,14 @@
       </p:sp>
       <p:pic>
         <p:nvPicPr>
-          <p:cNvPr id="11" name="icon FaBoxOpen" descr="preencoded.png">    </p:cNvPr>
+          <p:cNvPr id="11" name="icon FaBoxOpen" descr="preencoded.png"/>
           <p:cNvPicPr>
             <a:picLocks noChangeAspect="1"/>
           </p:cNvPicPr>
           <p:nvPr/>
         </p:nvPicPr>
         <p:blipFill>
-          <a:blip r:embed="rId2"/>
+          <a:blip r:embed="rId4"/>
           <a:stretch>
             <a:fillRect/>
           </a:stretch>
@@ -17170,7 +16944,7 @@
           <a:bodyPr wrap="square" lIns="0" tIns="0" rIns="0" bIns="0" rtlCol="0" anchor="t"/>
           <a:lstStyle/>
           <a:p>
-            <a:pPr indent="0" marL="0">
+            <a:pPr marL="0" indent="0">
               <a:buNone/>
             </a:pPr>
             <a:r>
@@ -17209,7 +16983,7 @@
           <a:bodyPr wrap="square" lIns="0" tIns="0" rIns="0" bIns="0" rtlCol="0" anchor="t"/>
           <a:lstStyle/>
           <a:p>
-            <a:pPr indent="0" marL="0">
+            <a:pPr marL="0" indent="0">
               <a:buNone/>
             </a:pPr>
             <a:r>
@@ -17278,14 +17052,14 @@
       </p:sp>
       <p:pic>
         <p:nvPicPr>
-          <p:cNvPr id="16" name="icon FaStore" descr="preencoded.png">    </p:cNvPr>
+          <p:cNvPr id="16" name="icon FaStore" descr="preencoded.png"/>
           <p:cNvPicPr>
             <a:picLocks noChangeAspect="1"/>
           </p:cNvPicPr>
           <p:nvPr/>
         </p:nvPicPr>
         <p:blipFill>
-          <a:blip r:embed="rId3"/>
+          <a:blip r:embed="rId5"/>
           <a:stretch>
             <a:fillRect/>
           </a:stretch>
@@ -17321,7 +17095,7 @@
           <a:bodyPr wrap="square" lIns="0" tIns="0" rIns="0" bIns="0" rtlCol="0" anchor="t"/>
           <a:lstStyle/>
           <a:p>
-            <a:pPr indent="0" marL="0">
+            <a:pPr marL="0" indent="0">
               <a:buNone/>
             </a:pPr>
             <a:r>
@@ -17360,7 +17134,7 @@
           <a:bodyPr wrap="square" lIns="0" tIns="0" rIns="0" bIns="0" rtlCol="0" anchor="t"/>
           <a:lstStyle/>
           <a:p>
-            <a:pPr indent="0" marL="0">
+            <a:pPr marL="0" indent="0">
               <a:buNone/>
             </a:pPr>
             <a:r>
@@ -17429,14 +17203,14 @@
       </p:sp>
       <p:pic>
         <p:nvPicPr>
-          <p:cNvPr id="21" name="icon FaClipboardList" descr="preencoded.png">    </p:cNvPr>
+          <p:cNvPr id="21" name="icon FaClipboardList" descr="preencoded.png"/>
           <p:cNvPicPr>
             <a:picLocks noChangeAspect="1"/>
           </p:cNvPicPr>
           <p:nvPr/>
         </p:nvPicPr>
         <p:blipFill>
-          <a:blip r:embed="rId4"/>
+          <a:blip r:embed="rId6"/>
           <a:stretch>
             <a:fillRect/>
           </a:stretch>
@@ -17472,7 +17246,7 @@
           <a:bodyPr wrap="square" lIns="0" tIns="0" rIns="0" bIns="0" rtlCol="0" anchor="t"/>
           <a:lstStyle/>
           <a:p>
-            <a:pPr indent="0" marL="0">
+            <a:pPr marL="0" indent="0">
               <a:buNone/>
             </a:pPr>
             <a:r>
@@ -17511,7 +17285,7 @@
           <a:bodyPr wrap="square" lIns="0" tIns="0" rIns="0" bIns="0" rtlCol="0" anchor="t"/>
           <a:lstStyle/>
           <a:p>
-            <a:pPr indent="0" marL="0">
+            <a:pPr marL="0" indent="0">
               <a:buNone/>
             </a:pPr>
             <a:r>
@@ -17547,7 +17321,7 @@
           <a:bodyPr wrap="square" lIns="0" tIns="0" rIns="0" bIns="0" rtlCol="0" anchor="t"/>
           <a:lstStyle/>
           <a:p>
-            <a:pPr indent="0" marL="0">
+            <a:pPr marL="0" indent="0">
               <a:buNone/>
             </a:pPr>
             <a:r>
@@ -17582,7 +17356,7 @@
           </a:prstGeom>
           <a:extLst>
             <a:ext uri="{C572A759-6A51-4108-AA02-DFA0A04FC94B}">
-              <ma14:wrappingTextBoxFlag xmlns:ma14="http://schemas.microsoft.com/office/mac/drawingml/2011/main" val="0"/>
+              <ma14:wrappingTextBoxFlag xmlns:ma14="http://schemas.microsoft.com/office/mac/drawingml/2011/main" xmlns="" val="0"/>
             </a:ext>
           </a:extLst>
         </p:spPr>
@@ -17600,7 +17374,7 @@
           <a:p>
             <a:pPr algn="r"/>
             <a:fld id="{F7021451-1387-4CA6-816F-3879F97B5CBC}" type="slidenum">
-              <a:rPr b="0" lang="en-US"/>
+              <a:rPr lang="en-US" b="0"/>
               <a:t>23</a:t>
             </a:fld>
             <a:endParaRPr lang="en-US"/>
@@ -17635,9 +17409,11 @@
       <p:sp>
         <p:nvSpPr>
           <p:cNvPr id="2" name="Text 0"/>
-          <p:cNvSpPr/>
+          <p:cNvSpPr>
+            <a:spLocks noGrp="1"/>
+          </p:cNvSpPr>
           <p:nvPr>
-            <p:ph idx="100" type="title" hasCustomPrompt="1"/>
+            <p:ph type="title" idx="100" hasCustomPrompt="1"/>
           </p:nvPr>
         </p:nvSpPr>
         <p:spPr>
@@ -17655,7 +17431,7 @@
           <a:bodyPr wrap="square" lIns="0" tIns="0" rIns="0" bIns="0" rtlCol="0" anchor="ctr"/>
           <a:lstStyle/>
           <a:p>
-            <a:pPr algn="l" indent="0" marL="0">
+            <a:pPr marL="0" indent="0" algn="l">
               <a:buNone/>
             </a:pPr>
             <a:r>
@@ -17724,14 +17500,14 @@
       </p:sp>
       <p:pic>
         <p:nvPicPr>
-          <p:cNvPr id="6" name="icon FaShieldAlt" descr="preencoded.png">    </p:cNvPr>
+          <p:cNvPr id="6" name="icon FaShieldAlt" descr="preencoded.png"/>
           <p:cNvPicPr>
             <a:picLocks noChangeAspect="1"/>
           </p:cNvPicPr>
           <p:nvPr/>
         </p:nvPicPr>
         <p:blipFill>
-          <a:blip r:embed="rId1"/>
+          <a:blip r:embed="rId3"/>
           <a:stretch>
             <a:fillRect/>
           </a:stretch>
@@ -17767,7 +17543,7 @@
           <a:bodyPr wrap="square" lIns="0" tIns="0" rIns="0" bIns="0" rtlCol="0" anchor="t"/>
           <a:lstStyle/>
           <a:p>
-            <a:pPr indent="0" marL="0">
+            <a:pPr marL="0" indent="0">
               <a:buNone/>
             </a:pPr>
             <a:r>
@@ -17806,7 +17582,7 @@
           <a:bodyPr wrap="square" lIns="0" tIns="0" rIns="0" bIns="0" rtlCol="0" anchor="t"/>
           <a:lstStyle/>
           <a:p>
-            <a:pPr indent="0" marL="0">
+            <a:pPr marL="0" indent="0">
               <a:buNone/>
             </a:pPr>
             <a:r>
@@ -17875,14 +17651,14 @@
       </p:sp>
       <p:pic>
         <p:nvPicPr>
-          <p:cNvPr id="11" name="icon FaBoxOpen" descr="preencoded.png">    </p:cNvPr>
+          <p:cNvPr id="11" name="icon FaBoxOpen" descr="preencoded.png"/>
           <p:cNvPicPr>
             <a:picLocks noChangeAspect="1"/>
           </p:cNvPicPr>
           <p:nvPr/>
         </p:nvPicPr>
         <p:blipFill>
-          <a:blip r:embed="rId2"/>
+          <a:blip r:embed="rId4"/>
           <a:stretch>
             <a:fillRect/>
           </a:stretch>
@@ -17918,7 +17694,7 @@
           <a:bodyPr wrap="square" lIns="0" tIns="0" rIns="0" bIns="0" rtlCol="0" anchor="t"/>
           <a:lstStyle/>
           <a:p>
-            <a:pPr indent="0" marL="0">
+            <a:pPr marL="0" indent="0">
               <a:buNone/>
             </a:pPr>
             <a:r>
@@ -17957,7 +17733,7 @@
           <a:bodyPr wrap="square" lIns="0" tIns="0" rIns="0" bIns="0" rtlCol="0" anchor="t"/>
           <a:lstStyle/>
           <a:p>
-            <a:pPr indent="0" marL="0">
+            <a:pPr marL="0" indent="0">
               <a:buNone/>
             </a:pPr>
             <a:r>
@@ -18026,14 +17802,14 @@
       </p:sp>
       <p:pic>
         <p:nvPicPr>
-          <p:cNvPr id="16" name="icon FaRoute" descr="preencoded.png">    </p:cNvPr>
+          <p:cNvPr id="16" name="icon FaRoute" descr="preencoded.png"/>
           <p:cNvPicPr>
             <a:picLocks noChangeAspect="1"/>
           </p:cNvPicPr>
           <p:nvPr/>
         </p:nvPicPr>
         <p:blipFill>
-          <a:blip r:embed="rId3"/>
+          <a:blip r:embed="rId5"/>
           <a:stretch>
             <a:fillRect/>
           </a:stretch>
@@ -18069,7 +17845,7 @@
           <a:bodyPr wrap="square" lIns="0" tIns="0" rIns="0" bIns="0" rtlCol="0" anchor="t"/>
           <a:lstStyle/>
           <a:p>
-            <a:pPr indent="0" marL="0">
+            <a:pPr marL="0" indent="0">
               <a:buNone/>
             </a:pPr>
             <a:r>
@@ -18108,7 +17884,7 @@
           <a:bodyPr wrap="square" lIns="0" tIns="0" rIns="0" bIns="0" rtlCol="0" anchor="t"/>
           <a:lstStyle/>
           <a:p>
-            <a:pPr indent="0" marL="0">
+            <a:pPr marL="0" indent="0">
               <a:buNone/>
             </a:pPr>
             <a:r>
@@ -18177,14 +17953,14 @@
       </p:sp>
       <p:pic>
         <p:nvPicPr>
-          <p:cNvPr id="21" name="icon FaWarehouse" descr="preencoded.png">    </p:cNvPr>
+          <p:cNvPr id="21" name="icon FaWarehouse" descr="preencoded.png"/>
           <p:cNvPicPr>
             <a:picLocks noChangeAspect="1"/>
           </p:cNvPicPr>
           <p:nvPr/>
         </p:nvPicPr>
         <p:blipFill>
-          <a:blip r:embed="rId4"/>
+          <a:blip r:embed="rId6"/>
           <a:stretch>
             <a:fillRect/>
           </a:stretch>
@@ -18220,7 +17996,7 @@
           <a:bodyPr wrap="square" lIns="0" tIns="0" rIns="0" bIns="0" rtlCol="0" anchor="t"/>
           <a:lstStyle/>
           <a:p>
-            <a:pPr indent="0" marL="0">
+            <a:pPr marL="0" indent="0">
               <a:buNone/>
             </a:pPr>
             <a:r>
@@ -18259,7 +18035,7 @@
           <a:bodyPr wrap="square" lIns="0" tIns="0" rIns="0" bIns="0" rtlCol="0" anchor="t"/>
           <a:lstStyle/>
           <a:p>
-            <a:pPr indent="0" marL="0">
+            <a:pPr marL="0" indent="0">
               <a:buNone/>
             </a:pPr>
             <a:r>
@@ -18328,14 +18104,14 @@
       </p:sp>
       <p:pic>
         <p:nvPicPr>
-          <p:cNvPr id="26" name="icon FaCalculator" descr="preencoded.png">    </p:cNvPr>
+          <p:cNvPr id="26" name="icon FaCalculator" descr="preencoded.png"/>
           <p:cNvPicPr>
             <a:picLocks noChangeAspect="1"/>
           </p:cNvPicPr>
           <p:nvPr/>
         </p:nvPicPr>
         <p:blipFill>
-          <a:blip r:embed="rId5"/>
+          <a:blip r:embed="rId7"/>
           <a:stretch>
             <a:fillRect/>
           </a:stretch>
@@ -18371,7 +18147,7 @@
           <a:bodyPr wrap="square" lIns="0" tIns="0" rIns="0" bIns="0" rtlCol="0" anchor="t"/>
           <a:lstStyle/>
           <a:p>
-            <a:pPr indent="0" marL="0">
+            <a:pPr marL="0" indent="0">
               <a:buNone/>
             </a:pPr>
             <a:r>
@@ -18410,7 +18186,7 @@
           <a:bodyPr wrap="square" lIns="0" tIns="0" rIns="0" bIns="0" rtlCol="0" anchor="t"/>
           <a:lstStyle/>
           <a:p>
-            <a:pPr indent="0" marL="0">
+            <a:pPr marL="0" indent="0">
               <a:buNone/>
             </a:pPr>
             <a:r>
@@ -18479,14 +18255,14 @@
       </p:sp>
       <p:pic>
         <p:nvPicPr>
-          <p:cNvPr id="31" name="icon FaChartLine" descr="preencoded.png">    </p:cNvPr>
+          <p:cNvPr id="31" name="icon FaChartLine" descr="preencoded.png"/>
           <p:cNvPicPr>
             <a:picLocks noChangeAspect="1"/>
           </p:cNvPicPr>
           <p:nvPr/>
         </p:nvPicPr>
         <p:blipFill>
-          <a:blip r:embed="rId6"/>
+          <a:blip r:embed="rId8"/>
           <a:stretch>
             <a:fillRect/>
           </a:stretch>
@@ -18522,7 +18298,7 @@
           <a:bodyPr wrap="square" lIns="0" tIns="0" rIns="0" bIns="0" rtlCol="0" anchor="t"/>
           <a:lstStyle/>
           <a:p>
-            <a:pPr indent="0" marL="0">
+            <a:pPr marL="0" indent="0">
               <a:buNone/>
             </a:pPr>
             <a:r>
@@ -18561,7 +18337,7 @@
           <a:bodyPr wrap="square" lIns="0" tIns="0" rIns="0" bIns="0" rtlCol="0" anchor="t"/>
           <a:lstStyle/>
           <a:p>
-            <a:pPr indent="0" marL="0">
+            <a:pPr marL="0" indent="0">
               <a:buNone/>
             </a:pPr>
             <a:r>
@@ -18597,7 +18373,7 @@
           <a:bodyPr wrap="square" lIns="0" tIns="0" rIns="0" bIns="0" rtlCol="0" anchor="t"/>
           <a:lstStyle/>
           <a:p>
-            <a:pPr indent="0" marL="0">
+            <a:pPr marL="0" indent="0">
               <a:buNone/>
             </a:pPr>
             <a:r>
@@ -18614,7 +18390,7 @@
       </p:sp>
       <p:sp>
         <p:nvSpPr>
-          <p:cNvPr id="25" name="Slide Number Placeholder 0"/>
+          <p:cNvPr id="3" name="Slide Number Placeholder 0"/>
           <p:cNvSpPr>
             <a:spLocks noGrp="1"/>
           </p:cNvSpPr>
@@ -18632,7 +18408,7 @@
           </a:prstGeom>
           <a:extLst>
             <a:ext uri="{C572A759-6A51-4108-AA02-DFA0A04FC94B}">
-              <ma14:wrappingTextBoxFlag xmlns:ma14="http://schemas.microsoft.com/office/mac/drawingml/2011/main" val="0"/>
+              <ma14:wrappingTextBoxFlag xmlns:ma14="http://schemas.microsoft.com/office/mac/drawingml/2011/main" xmlns="" val="0"/>
             </a:ext>
           </a:extLst>
         </p:spPr>
@@ -18650,7 +18426,7 @@
           <a:p>
             <a:pPr algn="r"/>
             <a:fld id="{F7021451-1387-4CA6-816F-3879F97B5CBC}" type="slidenum">
-              <a:rPr b="0" lang="en-US"/>
+              <a:rPr lang="en-US" b="0"/>
               <a:t>24</a:t>
             </a:fld>
             <a:endParaRPr lang="en-US"/>
@@ -18685,9 +18461,11 @@
       <p:sp>
         <p:nvSpPr>
           <p:cNvPr id="2" name="Text 0"/>
-          <p:cNvSpPr/>
+          <p:cNvSpPr>
+            <a:spLocks noGrp="1"/>
+          </p:cNvSpPr>
           <p:nvPr>
-            <p:ph idx="100" type="title" hasCustomPrompt="1"/>
+            <p:ph type="title" idx="100" hasCustomPrompt="1"/>
           </p:nvPr>
         </p:nvSpPr>
         <p:spPr>
@@ -18705,7 +18483,7 @@
           <a:bodyPr wrap="square" lIns="0" tIns="0" rIns="0" bIns="0" rtlCol="0" anchor="ctr"/>
           <a:lstStyle/>
           <a:p>
-            <a:pPr algn="l" indent="0" marL="0">
+            <a:pPr marL="0" indent="0" algn="l">
               <a:buNone/>
             </a:pPr>
             <a:r>
@@ -18793,7 +18571,7 @@
           <a:bodyPr wrap="square" lIns="0" tIns="0" rIns="0" bIns="0" rtlCol="0" anchor="ctr"/>
           <a:lstStyle/>
           <a:p>
-            <a:pPr algn="ctr" indent="0" marL="0">
+            <a:pPr marL="0" indent="0" algn="ctr">
               <a:buNone/>
             </a:pPr>
             <a:r>
@@ -18829,7 +18607,7 @@
           <a:bodyPr wrap="square" lIns="0" tIns="0" rIns="0" bIns="0" rtlCol="0" anchor="ctr"/>
           <a:lstStyle/>
           <a:p>
-            <a:pPr indent="0" marL="0">
+            <a:pPr marL="0" indent="0">
               <a:buNone/>
             </a:pPr>
             <a:r>
@@ -18868,7 +18646,7 @@
           <a:bodyPr wrap="square" lIns="0" tIns="0" rIns="0" bIns="0" rtlCol="0" anchor="ctr"/>
           <a:lstStyle/>
           <a:p>
-            <a:pPr indent="0" marL="0">
+            <a:pPr marL="0" indent="0">
               <a:buNone/>
             </a:pPr>
             <a:r>
@@ -18956,7 +18734,7 @@
           <a:bodyPr wrap="square" lIns="0" tIns="0" rIns="0" bIns="0" rtlCol="0" anchor="ctr"/>
           <a:lstStyle/>
           <a:p>
-            <a:pPr algn="ctr" indent="0" marL="0">
+            <a:pPr marL="0" indent="0" algn="ctr">
               <a:buNone/>
             </a:pPr>
             <a:r>
@@ -18992,7 +18770,7 @@
           <a:bodyPr wrap="square" lIns="0" tIns="0" rIns="0" bIns="0" rtlCol="0" anchor="ctr"/>
           <a:lstStyle/>
           <a:p>
-            <a:pPr indent="0" marL="0">
+            <a:pPr marL="0" indent="0">
               <a:buNone/>
             </a:pPr>
             <a:r>
@@ -19031,7 +18809,7 @@
           <a:bodyPr wrap="square" lIns="0" tIns="0" rIns="0" bIns="0" rtlCol="0" anchor="ctr"/>
           <a:lstStyle/>
           <a:p>
-            <a:pPr indent="0" marL="0">
+            <a:pPr marL="0" indent="0">
               <a:buNone/>
             </a:pPr>
             <a:r>
@@ -19119,7 +18897,7 @@
           <a:bodyPr wrap="square" lIns="0" tIns="0" rIns="0" bIns="0" rtlCol="0" anchor="ctr"/>
           <a:lstStyle/>
           <a:p>
-            <a:pPr algn="ctr" indent="0" marL="0">
+            <a:pPr marL="0" indent="0" algn="ctr">
               <a:buNone/>
             </a:pPr>
             <a:r>
@@ -19155,7 +18933,7 @@
           <a:bodyPr wrap="square" lIns="0" tIns="0" rIns="0" bIns="0" rtlCol="0" anchor="ctr"/>
           <a:lstStyle/>
           <a:p>
-            <a:pPr indent="0" marL="0">
+            <a:pPr marL="0" indent="0">
               <a:buNone/>
             </a:pPr>
             <a:r>
@@ -19194,7 +18972,7 @@
           <a:bodyPr wrap="square" lIns="0" tIns="0" rIns="0" bIns="0" rtlCol="0" anchor="ctr"/>
           <a:lstStyle/>
           <a:p>
-            <a:pPr indent="0" marL="0">
+            <a:pPr marL="0" indent="0">
               <a:buNone/>
             </a:pPr>
             <a:r>
@@ -19282,7 +19060,7 @@
           <a:bodyPr wrap="square" lIns="0" tIns="0" rIns="0" bIns="0" rtlCol="0" anchor="ctr"/>
           <a:lstStyle/>
           <a:p>
-            <a:pPr algn="ctr" indent="0" marL="0">
+            <a:pPr marL="0" indent="0" algn="ctr">
               <a:buNone/>
             </a:pPr>
             <a:r>
@@ -19318,7 +19096,7 @@
           <a:bodyPr wrap="square" lIns="0" tIns="0" rIns="0" bIns="0" rtlCol="0" anchor="ctr"/>
           <a:lstStyle/>
           <a:p>
-            <a:pPr indent="0" marL="0">
+            <a:pPr marL="0" indent="0">
               <a:buNone/>
             </a:pPr>
             <a:r>
@@ -19357,7 +19135,7 @@
           <a:bodyPr wrap="square" lIns="0" tIns="0" rIns="0" bIns="0" rtlCol="0" anchor="ctr"/>
           <a:lstStyle/>
           <a:p>
-            <a:pPr indent="0" marL="0">
+            <a:pPr marL="0" indent="0">
               <a:buNone/>
             </a:pPr>
             <a:r>
@@ -19392,7 +19170,7 @@
           </a:prstGeom>
           <a:extLst>
             <a:ext uri="{C572A759-6A51-4108-AA02-DFA0A04FC94B}">
-              <ma14:wrappingTextBoxFlag xmlns:ma14="http://schemas.microsoft.com/office/mac/drawingml/2011/main" val="0"/>
+              <ma14:wrappingTextBoxFlag xmlns:ma14="http://schemas.microsoft.com/office/mac/drawingml/2011/main" xmlns="" val="0"/>
             </a:ext>
           </a:extLst>
         </p:spPr>
@@ -19410,7 +19188,7 @@
           <a:p>
             <a:pPr algn="r"/>
             <a:fld id="{F7021451-1387-4CA6-816F-3879F97B5CBC}" type="slidenum">
-              <a:rPr b="0" lang="en-US"/>
+              <a:rPr lang="en-US" b="0"/>
               <a:t>25</a:t>
             </a:fld>
             <a:endParaRPr lang="en-US"/>
@@ -19445,9 +19223,11 @@
       <p:sp>
         <p:nvSpPr>
           <p:cNvPr id="2" name="Text 0"/>
-          <p:cNvSpPr/>
+          <p:cNvSpPr>
+            <a:spLocks noGrp="1"/>
+          </p:cNvSpPr>
           <p:nvPr>
-            <p:ph idx="100" type="title" hasCustomPrompt="1"/>
+            <p:ph type="title" idx="100" hasCustomPrompt="1"/>
           </p:nvPr>
         </p:nvSpPr>
         <p:spPr>
@@ -19465,7 +19245,7 @@
           <a:bodyPr wrap="square" lIns="0" tIns="0" rIns="0" bIns="0" rtlCol="0" anchor="ctr"/>
           <a:lstStyle/>
           <a:p>
-            <a:pPr algn="l" indent="0" marL="0">
+            <a:pPr marL="0" indent="0" algn="l">
               <a:buNone/>
             </a:pPr>
             <a:r>
@@ -19528,11 +19308,11 @@
           <a:bodyPr wrap="square" lIns="0" tIns="0" rIns="0" bIns="0" rtlCol="0" anchor="t"/>
           <a:lstStyle/>
           <a:p>
-            <a:pPr indent="0" marL="0">
-              <a:buNone/>
-            </a:pPr>
-            <a:r>
-              <a:rPr lang="en-US" sz="1200" b="1" spc="200" kern="0" dirty="0">
+            <a:pPr marL="0" indent="0">
+              <a:buNone/>
+            </a:pPr>
+            <a:r>
+              <a:rPr lang="en-US" sz="1200" b="1" kern="0" spc="200" dirty="0">
                 <a:solidFill>
                   <a:schemeClr val="accent1"/>
                 </a:solidFill>
@@ -19564,7 +19344,7 @@
           <a:bodyPr wrap="square" lIns="0" tIns="0" rIns="0" bIns="0" rtlCol="0" anchor="t"/>
           <a:lstStyle/>
           <a:p>
-            <a:pPr indent="0" marL="0">
+            <a:pPr marL="0" indent="0">
               <a:buNone/>
             </a:pPr>
             <a:r>
@@ -19603,7 +19383,7 @@
           <a:bodyPr wrap="square" lIns="0" tIns="0" rIns="0" bIns="0" rtlCol="0" anchor="t"/>
           <a:lstStyle/>
           <a:p>
-            <a:pPr indent="0" marL="0">
+            <a:pPr marL="0" indent="0">
               <a:buNone/>
             </a:pPr>
             <a:r>
@@ -19666,11 +19446,11 @@
           <a:bodyPr wrap="square" lIns="0" tIns="0" rIns="0" bIns="0" rtlCol="0" anchor="t"/>
           <a:lstStyle/>
           <a:p>
-            <a:pPr indent="0" marL="0">
-              <a:buNone/>
-            </a:pPr>
-            <a:r>
-              <a:rPr lang="en-US" sz="1200" b="1" spc="200" kern="0" dirty="0">
+            <a:pPr marL="0" indent="0">
+              <a:buNone/>
+            </a:pPr>
+            <a:r>
+              <a:rPr lang="en-US" sz="1200" b="1" kern="0" spc="200" dirty="0">
                 <a:solidFill>
                   <a:schemeClr val="accent1"/>
                 </a:solidFill>
@@ -19702,7 +19482,7 @@
           <a:bodyPr wrap="square" lIns="0" tIns="0" rIns="0" bIns="0" rtlCol="0" anchor="t"/>
           <a:lstStyle/>
           <a:p>
-            <a:pPr indent="0" marL="0">
+            <a:pPr marL="0" indent="0">
               <a:buNone/>
             </a:pPr>
             <a:r>
@@ -19741,7 +19521,7 @@
           <a:bodyPr wrap="square" lIns="0" tIns="0" rIns="0" bIns="0" rtlCol="0" anchor="t"/>
           <a:lstStyle/>
           <a:p>
-            <a:pPr indent="0" marL="0">
+            <a:pPr marL="0" indent="0">
               <a:buNone/>
             </a:pPr>
             <a:r>
@@ -19804,11 +19584,11 @@
           <a:bodyPr wrap="square" lIns="0" tIns="0" rIns="0" bIns="0" rtlCol="0" anchor="t"/>
           <a:lstStyle/>
           <a:p>
-            <a:pPr indent="0" marL="0">
-              <a:buNone/>
-            </a:pPr>
-            <a:r>
-              <a:rPr lang="en-US" sz="1200" b="1" spc="200" kern="0" dirty="0">
+            <a:pPr marL="0" indent="0">
+              <a:buNone/>
+            </a:pPr>
+            <a:r>
+              <a:rPr lang="en-US" sz="1200" b="1" kern="0" spc="200" dirty="0">
                 <a:solidFill>
                   <a:schemeClr val="accent1"/>
                 </a:solidFill>
@@ -19840,7 +19620,7 @@
           <a:bodyPr wrap="square" lIns="0" tIns="0" rIns="0" bIns="0" rtlCol="0" anchor="t"/>
           <a:lstStyle/>
           <a:p>
-            <a:pPr indent="0" marL="0">
+            <a:pPr marL="0" indent="0">
               <a:buNone/>
             </a:pPr>
             <a:r>
@@ -19879,7 +19659,7 @@
           <a:bodyPr wrap="square" lIns="0" tIns="0" rIns="0" bIns="0" rtlCol="0" anchor="t"/>
           <a:lstStyle/>
           <a:p>
-            <a:pPr indent="0" marL="0">
+            <a:pPr marL="0" indent="0">
               <a:buNone/>
             </a:pPr>
             <a:r>
@@ -19942,11 +19722,11 @@
           <a:bodyPr wrap="square" lIns="0" tIns="0" rIns="0" bIns="0" rtlCol="0" anchor="t"/>
           <a:lstStyle/>
           <a:p>
-            <a:pPr indent="0" marL="0">
-              <a:buNone/>
-            </a:pPr>
-            <a:r>
-              <a:rPr lang="en-US" sz="1200" b="1" spc="200" kern="0" dirty="0">
+            <a:pPr marL="0" indent="0">
+              <a:buNone/>
+            </a:pPr>
+            <a:r>
+              <a:rPr lang="en-US" sz="1200" b="1" kern="0" spc="200" dirty="0">
                 <a:solidFill>
                   <a:schemeClr val="accent1"/>
                 </a:solidFill>
@@ -19978,7 +19758,7 @@
           <a:bodyPr wrap="square" lIns="0" tIns="0" rIns="0" bIns="0" rtlCol="0" anchor="t"/>
           <a:lstStyle/>
           <a:p>
-            <a:pPr indent="0" marL="0">
+            <a:pPr marL="0" indent="0">
               <a:buNone/>
             </a:pPr>
             <a:r>
@@ -20017,7 +19797,7 @@
           <a:bodyPr wrap="square" lIns="0" tIns="0" rIns="0" bIns="0" rtlCol="0" anchor="t"/>
           <a:lstStyle/>
           <a:p>
-            <a:pPr indent="0" marL="0">
+            <a:pPr marL="0" indent="0">
               <a:buNone/>
             </a:pPr>
             <a:r>
@@ -20053,7 +19833,7 @@
           <a:bodyPr wrap="square" lIns="0" tIns="0" rIns="0" bIns="0" rtlCol="0" anchor="t"/>
           <a:lstStyle/>
           <a:p>
-            <a:pPr indent="0" marL="0">
+            <a:pPr marL="0" indent="0">
               <a:buNone/>
             </a:pPr>
             <a:r>
@@ -20088,7 +19868,7 @@
           </a:prstGeom>
           <a:extLst>
             <a:ext uri="{C572A759-6A51-4108-AA02-DFA0A04FC94B}">
-              <ma14:wrappingTextBoxFlag xmlns:ma14="http://schemas.microsoft.com/office/mac/drawingml/2011/main" val="0"/>
+              <ma14:wrappingTextBoxFlag xmlns:ma14="http://schemas.microsoft.com/office/mac/drawingml/2011/main" xmlns="" val="0"/>
             </a:ext>
           </a:extLst>
         </p:spPr>
@@ -20106,7 +19886,7 @@
           <a:p>
             <a:pPr algn="r"/>
             <a:fld id="{F7021451-1387-4CA6-816F-3879F97B5CBC}" type="slidenum">
-              <a:rPr b="0" lang="en-US"/>
+              <a:rPr lang="en-US" b="0"/>
               <a:t>26</a:t>
             </a:fld>
             <a:endParaRPr lang="en-US"/>
@@ -20140,14 +19920,14 @@
       </p:grpSpPr>
       <p:pic>
         <p:nvPicPr>
-          <p:cNvPr id="3" name="A busy Lagos market" descr="A busy Lagos market">    </p:cNvPr>
+          <p:cNvPr id="3" name="A busy Lagos market" descr="A busy Lagos market"/>
           <p:cNvPicPr>
             <a:picLocks noChangeAspect="1"/>
           </p:cNvPicPr>
           <p:nvPr/>
         </p:nvPicPr>
         <p:blipFill>
-          <a:blip r:embed="rId1"/>
+          <a:blip r:embed="rId3"/>
           <a:stretch>
             <a:fillRect/>
           </a:stretch>
@@ -20210,11 +19990,11 @@
           <a:bodyPr wrap="square" lIns="0" tIns="0" rIns="0" bIns="0" rtlCol="0" anchor="t"/>
           <a:lstStyle/>
           <a:p>
-            <a:pPr indent="0" marL="0">
-              <a:buNone/>
-            </a:pPr>
-            <a:r>
-              <a:rPr lang="en-US" sz="1400" b="1" spc="400" kern="0" dirty="0">
+            <a:pPr marL="0" indent="0">
+              <a:buNone/>
+            </a:pPr>
+            <a:r>
+              <a:rPr lang="en-US" sz="1400" b="1" kern="0" spc="400" dirty="0">
                 <a:solidFill>
                   <a:schemeClr val="accent1"/>
                 </a:solidFill>
@@ -20246,7 +20026,7 @@
           <a:bodyPr wrap="square" lIns="0" tIns="0" rIns="0" bIns="0" rtlCol="0" anchor="t"/>
           <a:lstStyle/>
           <a:p>
-            <a:pPr indent="0" marL="0">
+            <a:pPr marL="0" indent="0">
               <a:buNone/>
             </a:pPr>
             <a:r>
@@ -20285,7 +20065,7 @@
           <a:bodyPr wrap="square" lIns="0" tIns="0" rIns="0" bIns="0" rtlCol="0" anchor="t"/>
           <a:lstStyle/>
           <a:p>
-            <a:pPr indent="0" marL="0">
+            <a:pPr marL="0" indent="0">
               <a:buNone/>
             </a:pPr>
             <a:r>
@@ -20324,7 +20104,7 @@
           <a:bodyPr wrap="square" lIns="0" tIns="0" rIns="0" bIns="0" rtlCol="0" anchor="t"/>
           <a:lstStyle/>
           <a:p>
-            <a:pPr indent="0" marL="0">
+            <a:pPr marL="0" indent="0">
               <a:buNone/>
             </a:pPr>
             <a:r>
@@ -20367,9 +20147,11 @@
       <p:sp>
         <p:nvSpPr>
           <p:cNvPr id="2" name="Text 0"/>
-          <p:cNvSpPr/>
+          <p:cNvSpPr>
+            <a:spLocks noGrp="1"/>
+          </p:cNvSpPr>
           <p:nvPr>
-            <p:ph idx="100" type="title" hasCustomPrompt="1"/>
+            <p:ph type="title" idx="100" hasCustomPrompt="1"/>
           </p:nvPr>
         </p:nvSpPr>
         <p:spPr>
@@ -20387,7 +20169,7 @@
           <a:bodyPr wrap="square" lIns="0" tIns="0" rIns="0" bIns="0" rtlCol="0" anchor="ctr"/>
           <a:lstStyle/>
           <a:p>
-            <a:pPr algn="l" indent="0" marL="0">
+            <a:pPr marL="0" indent="0" algn="l">
               <a:buNone/>
             </a:pPr>
             <a:r>
@@ -20607,7 +20389,7 @@
           <a:bodyPr wrap="square" lIns="0" tIns="0" rIns="0" bIns="0" rtlCol="0" anchor="t"/>
           <a:lstStyle/>
           <a:p>
-            <a:pPr indent="0" marL="0">
+            <a:pPr marL="0" indent="0">
               <a:buNone/>
             </a:pPr>
             <a:r>
@@ -20642,7 +20424,7 @@
           </a:prstGeom>
           <a:extLst>
             <a:ext uri="{C572A759-6A51-4108-AA02-DFA0A04FC94B}">
-              <ma14:wrappingTextBoxFlag xmlns:ma14="http://schemas.microsoft.com/office/mac/drawingml/2011/main" val="0"/>
+              <ma14:wrappingTextBoxFlag xmlns:ma14="http://schemas.microsoft.com/office/mac/drawingml/2011/main" xmlns="" val="0"/>
             </a:ext>
           </a:extLst>
         </p:spPr>
@@ -20660,7 +20442,7 @@
           <a:p>
             <a:pPr algn="r"/>
             <a:fld id="{F7021451-1387-4CA6-816F-3879F97B5CBC}" type="slidenum">
-              <a:rPr b="0" lang="en-US"/>
+              <a:rPr lang="en-US" b="0"/>
               <a:t>28</a:t>
             </a:fld>
             <a:endParaRPr lang="en-US"/>
@@ -20695,9 +20477,11 @@
       <p:sp>
         <p:nvSpPr>
           <p:cNvPr id="2" name="Text 0"/>
-          <p:cNvSpPr/>
+          <p:cNvSpPr>
+            <a:spLocks noGrp="1"/>
+          </p:cNvSpPr>
           <p:nvPr>
-            <p:ph idx="100" type="title" hasCustomPrompt="1"/>
+            <p:ph type="title" idx="100" hasCustomPrompt="1"/>
           </p:nvPr>
         </p:nvSpPr>
         <p:spPr>
@@ -20715,7 +20499,7 @@
           <a:bodyPr wrap="square" lIns="0" tIns="0" rIns="0" bIns="0" rtlCol="0" anchor="ctr"/>
           <a:lstStyle/>
           <a:p>
-            <a:pPr algn="l" indent="0" marL="0">
+            <a:pPr marL="0" indent="0" algn="l">
               <a:buNone/>
             </a:pPr>
             <a:r>
@@ -20784,14 +20568,14 @@
       </p:sp>
       <p:pic>
         <p:nvPicPr>
-          <p:cNvPr id="6" name="icon FaSearch" descr="preencoded.png">    </p:cNvPr>
+          <p:cNvPr id="6" name="icon FaSearch" descr="preencoded.png"/>
           <p:cNvPicPr>
             <a:picLocks noChangeAspect="1"/>
           </p:cNvPicPr>
           <p:nvPr/>
         </p:nvPicPr>
         <p:blipFill>
-          <a:blip r:embed="rId1"/>
+          <a:blip r:embed="rId3"/>
           <a:stretch>
             <a:fillRect/>
           </a:stretch>
@@ -20827,7 +20611,7 @@
           <a:bodyPr wrap="square" lIns="0" tIns="0" rIns="0" bIns="0" rtlCol="0" anchor="t"/>
           <a:lstStyle/>
           <a:p>
-            <a:pPr indent="0" marL="0">
+            <a:pPr marL="0" indent="0">
               <a:buNone/>
             </a:pPr>
             <a:r>
@@ -20866,7 +20650,7 @@
           <a:bodyPr wrap="square" lIns="0" tIns="0" rIns="0" bIns="0" rtlCol="0" anchor="t"/>
           <a:lstStyle/>
           <a:p>
-            <a:pPr indent="0" marL="0">
+            <a:pPr marL="0" indent="0">
               <a:buNone/>
             </a:pPr>
             <a:r>
@@ -20935,14 +20719,14 @@
       </p:sp>
       <p:pic>
         <p:nvPicPr>
-          <p:cNvPr id="11" name="icon FaUserCheck" descr="preencoded.png">    </p:cNvPr>
+          <p:cNvPr id="11" name="icon FaUserCheck" descr="preencoded.png"/>
           <p:cNvPicPr>
             <a:picLocks noChangeAspect="1"/>
           </p:cNvPicPr>
           <p:nvPr/>
         </p:nvPicPr>
         <p:blipFill>
-          <a:blip r:embed="rId2"/>
+          <a:blip r:embed="rId4"/>
           <a:stretch>
             <a:fillRect/>
           </a:stretch>
@@ -20978,7 +20762,7 @@
           <a:bodyPr wrap="square" lIns="0" tIns="0" rIns="0" bIns="0" rtlCol="0" anchor="t"/>
           <a:lstStyle/>
           <a:p>
-            <a:pPr indent="0" marL="0">
+            <a:pPr marL="0" indent="0">
               <a:buNone/>
             </a:pPr>
             <a:r>
@@ -21017,7 +20801,7 @@
           <a:bodyPr wrap="square" lIns="0" tIns="0" rIns="0" bIns="0" rtlCol="0" anchor="t"/>
           <a:lstStyle/>
           <a:p>
-            <a:pPr indent="0" marL="0">
+            <a:pPr marL="0" indent="0">
               <a:buNone/>
             </a:pPr>
             <a:r>
@@ -21086,14 +20870,14 @@
       </p:sp>
       <p:pic>
         <p:nvPicPr>
-          <p:cNvPr id="16" name="icon FaShip" descr="preencoded.png">    </p:cNvPr>
+          <p:cNvPr id="16" name="icon FaShip" descr="preencoded.png"/>
           <p:cNvPicPr>
             <a:picLocks noChangeAspect="1"/>
           </p:cNvPicPr>
           <p:nvPr/>
         </p:nvPicPr>
         <p:blipFill>
-          <a:blip r:embed="rId3"/>
+          <a:blip r:embed="rId5"/>
           <a:stretch>
             <a:fillRect/>
           </a:stretch>
@@ -21129,7 +20913,7 @@
           <a:bodyPr wrap="square" lIns="0" tIns="0" rIns="0" bIns="0" rtlCol="0" anchor="t"/>
           <a:lstStyle/>
           <a:p>
-            <a:pPr indent="0" marL="0">
+            <a:pPr marL="0" indent="0">
               <a:buNone/>
             </a:pPr>
             <a:r>
@@ -21168,7 +20952,7 @@
           <a:bodyPr wrap="square" lIns="0" tIns="0" rIns="0" bIns="0" rtlCol="0" anchor="t"/>
           <a:lstStyle/>
           <a:p>
-            <a:pPr indent="0" marL="0">
+            <a:pPr marL="0" indent="0">
               <a:buNone/>
             </a:pPr>
             <a:r>
@@ -21237,14 +21021,14 @@
       </p:sp>
       <p:pic>
         <p:nvPicPr>
-          <p:cNvPr id="21" name="icon FaCalculator" descr="preencoded.png">    </p:cNvPr>
+          <p:cNvPr id="21" name="icon FaCalculator" descr="preencoded.png"/>
           <p:cNvPicPr>
             <a:picLocks noChangeAspect="1"/>
           </p:cNvPicPr>
           <p:nvPr/>
         </p:nvPicPr>
         <p:blipFill>
-          <a:blip r:embed="rId4"/>
+          <a:blip r:embed="rId6"/>
           <a:stretch>
             <a:fillRect/>
           </a:stretch>
@@ -21280,7 +21064,7 @@
           <a:bodyPr wrap="square" lIns="0" tIns="0" rIns="0" bIns="0" rtlCol="0" anchor="t"/>
           <a:lstStyle/>
           <a:p>
-            <a:pPr indent="0" marL="0">
+            <a:pPr marL="0" indent="0">
               <a:buNone/>
             </a:pPr>
             <a:r>
@@ -21319,7 +21103,7 @@
           <a:bodyPr wrap="square" lIns="0" tIns="0" rIns="0" bIns="0" rtlCol="0" anchor="t"/>
           <a:lstStyle/>
           <a:p>
-            <a:pPr indent="0" marL="0">
+            <a:pPr marL="0" indent="0">
               <a:buNone/>
             </a:pPr>
             <a:r>
@@ -21355,7 +21139,7 @@
           <a:bodyPr wrap="square" lIns="0" tIns="0" rIns="0" bIns="0" rtlCol="0" anchor="t"/>
           <a:lstStyle/>
           <a:p>
-            <a:pPr indent="0" marL="0">
+            <a:pPr marL="0" indent="0">
               <a:buNone/>
             </a:pPr>
             <a:r>
@@ -21390,7 +21174,7 @@
           </a:prstGeom>
           <a:extLst>
             <a:ext uri="{C572A759-6A51-4108-AA02-DFA0A04FC94B}">
-              <ma14:wrappingTextBoxFlag xmlns:ma14="http://schemas.microsoft.com/office/mac/drawingml/2011/main" val="0"/>
+              <ma14:wrappingTextBoxFlag xmlns:ma14="http://schemas.microsoft.com/office/mac/drawingml/2011/main" xmlns="" val="0"/>
             </a:ext>
           </a:extLst>
         </p:spPr>
@@ -21408,7 +21192,7 @@
           <a:p>
             <a:pPr algn="r"/>
             <a:fld id="{F7021451-1387-4CA6-816F-3879F97B5CBC}" type="slidenum">
-              <a:rPr b="0" lang="en-US"/>
+              <a:rPr lang="en-US" b="0"/>
               <a:t>3</a:t>
             </a:fld>
             <a:endParaRPr lang="en-US"/>
@@ -21443,9 +21227,11 @@
       <p:sp>
         <p:nvSpPr>
           <p:cNvPr id="2" name="Text 0"/>
-          <p:cNvSpPr/>
+          <p:cNvSpPr>
+            <a:spLocks noGrp="1"/>
+          </p:cNvSpPr>
           <p:nvPr>
-            <p:ph idx="100" type="title" hasCustomPrompt="1"/>
+            <p:ph type="title" idx="100" hasCustomPrompt="1"/>
           </p:nvPr>
         </p:nvSpPr>
         <p:spPr>
@@ -21463,7 +21249,7 @@
           <a:bodyPr wrap="square" lIns="0" tIns="0" rIns="0" bIns="0" rtlCol="0" anchor="ctr"/>
           <a:lstStyle/>
           <a:p>
-            <a:pPr algn="l" indent="0" marL="0">
+            <a:pPr marL="0" indent="0" algn="l">
               <a:buNone/>
             </a:pPr>
             <a:r>
@@ -21532,14 +21318,14 @@
       </p:sp>
       <p:pic>
         <p:nvPicPr>
-          <p:cNvPr id="6" name="icon FaBoxOpen" descr="preencoded.png">    </p:cNvPr>
+          <p:cNvPr id="6" name="icon FaBoxOpen" descr="preencoded.png"/>
           <p:cNvPicPr>
             <a:picLocks noChangeAspect="1"/>
           </p:cNvPicPr>
           <p:nvPr/>
         </p:nvPicPr>
         <p:blipFill>
-          <a:blip r:embed="rId1"/>
+          <a:blip r:embed="rId3"/>
           <a:stretch>
             <a:fillRect/>
           </a:stretch>
@@ -21575,7 +21361,7 @@
           <a:bodyPr wrap="square" lIns="0" tIns="0" rIns="0" bIns="0" rtlCol="0" anchor="t"/>
           <a:lstStyle/>
           <a:p>
-            <a:pPr indent="0" marL="0">
+            <a:pPr marL="0" indent="0">
               <a:buNone/>
             </a:pPr>
             <a:r>
@@ -21614,7 +21400,7 @@
           <a:bodyPr wrap="square" lIns="0" tIns="0" rIns="0" bIns="0" rtlCol="0" anchor="t"/>
           <a:lstStyle/>
           <a:p>
-            <a:pPr indent="0" marL="0">
+            <a:pPr marL="0" indent="0">
               <a:buNone/>
             </a:pPr>
             <a:r>
@@ -21683,14 +21469,14 @@
       </p:sp>
       <p:pic>
         <p:nvPicPr>
-          <p:cNvPr id="11" name="icon FaGlobeAfrica" descr="preencoded.png">    </p:cNvPr>
+          <p:cNvPr id="11" name="icon FaGlobeAfrica" descr="preencoded.png"/>
           <p:cNvPicPr>
             <a:picLocks noChangeAspect="1"/>
           </p:cNvPicPr>
           <p:nvPr/>
         </p:nvPicPr>
         <p:blipFill>
-          <a:blip r:embed="rId2"/>
+          <a:blip r:embed="rId4"/>
           <a:stretch>
             <a:fillRect/>
           </a:stretch>
@@ -21726,7 +21512,7 @@
           <a:bodyPr wrap="square" lIns="0" tIns="0" rIns="0" bIns="0" rtlCol="0" anchor="t"/>
           <a:lstStyle/>
           <a:p>
-            <a:pPr indent="0" marL="0">
+            <a:pPr marL="0" indent="0">
               <a:buNone/>
             </a:pPr>
             <a:r>
@@ -21765,7 +21551,7 @@
           <a:bodyPr wrap="square" lIns="0" tIns="0" rIns="0" bIns="0" rtlCol="0" anchor="t"/>
           <a:lstStyle/>
           <a:p>
-            <a:pPr indent="0" marL="0">
+            <a:pPr marL="0" indent="0">
               <a:buNone/>
             </a:pPr>
             <a:r>
@@ -21828,11 +21614,11 @@
           <a:bodyPr wrap="square" lIns="0" tIns="0" rIns="0" bIns="0" rtlCol="0" anchor="t"/>
           <a:lstStyle/>
           <a:p>
-            <a:pPr indent="0" marL="0">
-              <a:buNone/>
-            </a:pPr>
-            <a:r>
-              <a:rPr lang="en-US" sz="1200" b="1" spc="200" kern="0" dirty="0">
+            <a:pPr marL="0" indent="0">
+              <a:buNone/>
+            </a:pPr>
+            <a:r>
+              <a:rPr lang="en-US" sz="1200" b="1" kern="0" spc="200" dirty="0">
                 <a:solidFill>
                   <a:schemeClr val="accent1"/>
                 </a:solidFill>
@@ -21891,7 +21677,7 @@
           <a:bodyPr wrap="square" lIns="0" tIns="0" rIns="0" bIns="0" rtlCol="0" anchor="t"/>
           <a:lstStyle/>
           <a:p>
-            <a:pPr indent="0" marL="0">
+            <a:pPr marL="0" indent="0">
               <a:buNone/>
             </a:pPr>
             <a:r>
@@ -21905,7 +21691,7 @@
             <a:endParaRPr lang="en-US" sz="1400" dirty="0"/>
           </a:p>
           <a:p>
-            <a:pPr indent="0" marL="0">
+            <a:pPr marL="0" indent="0">
               <a:buNone/>
             </a:pPr>
             <a:r>
@@ -21993,7 +21779,7 @@
           <a:bodyPr wrap="square" lIns="0" tIns="0" rIns="0" bIns="0" rtlCol="0" anchor="t"/>
           <a:lstStyle/>
           <a:p>
-            <a:pPr indent="0" marL="0">
+            <a:pPr marL="0" indent="0">
               <a:buNone/>
             </a:pPr>
             <a:r>
@@ -22007,7 +21793,7 @@
             <a:endParaRPr lang="en-US" sz="1400" dirty="0"/>
           </a:p>
           <a:p>
-            <a:pPr indent="0" marL="0">
+            <a:pPr marL="0" indent="0">
               <a:buNone/>
             </a:pPr>
             <a:r>
@@ -22043,7 +21829,7 @@
           <a:bodyPr wrap="square" lIns="0" tIns="0" rIns="0" bIns="0" rtlCol="0" anchor="t"/>
           <a:lstStyle/>
           <a:p>
-            <a:pPr indent="0" marL="0">
+            <a:pPr marL="0" indent="0">
               <a:buNone/>
             </a:pPr>
             <a:r>
@@ -22079,7 +21865,7 @@
           <a:bodyPr wrap="square" lIns="0" tIns="0" rIns="0" bIns="0" rtlCol="0" anchor="t"/>
           <a:lstStyle/>
           <a:p>
-            <a:pPr indent="0" marL="0">
+            <a:pPr marL="0" indent="0">
               <a:buNone/>
             </a:pPr>
             <a:r>
@@ -22114,7 +21900,7 @@
           </a:prstGeom>
           <a:extLst>
             <a:ext uri="{C572A759-6A51-4108-AA02-DFA0A04FC94B}">
-              <ma14:wrappingTextBoxFlag xmlns:ma14="http://schemas.microsoft.com/office/mac/drawingml/2011/main" val="0"/>
+              <ma14:wrappingTextBoxFlag xmlns:ma14="http://schemas.microsoft.com/office/mac/drawingml/2011/main" xmlns="" val="0"/>
             </a:ext>
           </a:extLst>
         </p:spPr>
@@ -22132,7 +21918,7 @@
           <a:p>
             <a:pPr algn="r"/>
             <a:fld id="{F7021451-1387-4CA6-816F-3879F97B5CBC}" type="slidenum">
-              <a:rPr b="0" lang="en-US"/>
+              <a:rPr lang="en-US" b="0"/>
               <a:t>4</a:t>
             </a:fld>
             <a:endParaRPr lang="en-US"/>
@@ -22167,9 +21953,11 @@
       <p:sp>
         <p:nvSpPr>
           <p:cNvPr id="2" name="Text 0"/>
-          <p:cNvSpPr/>
+          <p:cNvSpPr>
+            <a:spLocks noGrp="1"/>
+          </p:cNvSpPr>
           <p:nvPr>
-            <p:ph idx="100" type="title" hasCustomPrompt="1"/>
+            <p:ph type="title" idx="100" hasCustomPrompt="1"/>
           </p:nvPr>
         </p:nvSpPr>
         <p:spPr>
@@ -22187,7 +21975,7 @@
           <a:bodyPr wrap="square" lIns="0" tIns="0" rIns="0" bIns="0" rtlCol="0" anchor="ctr"/>
           <a:lstStyle/>
           <a:p>
-            <a:pPr algn="l" indent="0" marL="0">
+            <a:pPr marL="0" indent="0" algn="l">
               <a:buNone/>
             </a:pPr>
             <a:r>
@@ -22256,14 +22044,14 @@
       </p:sp>
       <p:pic>
         <p:nvPicPr>
-          <p:cNvPr id="6" name="icon FaBoxOpen" descr="preencoded.png">    </p:cNvPr>
+          <p:cNvPr id="6" name="icon FaBoxOpen" descr="preencoded.png"/>
           <p:cNvPicPr>
             <a:picLocks noChangeAspect="1"/>
           </p:cNvPicPr>
           <p:nvPr/>
         </p:nvPicPr>
         <p:blipFill>
-          <a:blip r:embed="rId1"/>
+          <a:blip r:embed="rId3"/>
           <a:stretch>
             <a:fillRect/>
           </a:stretch>
@@ -22299,7 +22087,7 @@
           <a:bodyPr wrap="square" lIns="0" tIns="0" rIns="0" bIns="0" rtlCol="0" anchor="t"/>
           <a:lstStyle/>
           <a:p>
-            <a:pPr indent="0" marL="0">
+            <a:pPr marL="0" indent="0">
               <a:buNone/>
             </a:pPr>
             <a:r>
@@ -22483,14 +22271,14 @@
       </p:sp>
       <p:pic>
         <p:nvPicPr>
-          <p:cNvPr id="11" name="icon FaShip" descr="preencoded.png">    </p:cNvPr>
+          <p:cNvPr id="11" name="icon FaShip" descr="preencoded.png"/>
           <p:cNvPicPr>
             <a:picLocks noChangeAspect="1"/>
           </p:cNvPicPr>
           <p:nvPr/>
         </p:nvPicPr>
         <p:blipFill>
-          <a:blip r:embed="rId2"/>
+          <a:blip r:embed="rId4"/>
           <a:stretch>
             <a:fillRect/>
           </a:stretch>
@@ -22526,7 +22314,7 @@
           <a:bodyPr wrap="square" lIns="0" tIns="0" rIns="0" bIns="0" rtlCol="0" anchor="t"/>
           <a:lstStyle/>
           <a:p>
-            <a:pPr indent="0" marL="0">
+            <a:pPr marL="0" indent="0">
               <a:buNone/>
             </a:pPr>
             <a:r>
@@ -22704,7 +22492,7 @@
           <a:bodyPr wrap="square" lIns="0" tIns="0" rIns="0" bIns="0" rtlCol="0" anchor="t"/>
           <a:lstStyle/>
           <a:p>
-            <a:pPr indent="0" marL="0">
+            <a:pPr marL="0" indent="0">
               <a:buNone/>
             </a:pPr>
             <a:r>
@@ -22739,7 +22527,7 @@
           </a:prstGeom>
           <a:extLst>
             <a:ext uri="{C572A759-6A51-4108-AA02-DFA0A04FC94B}">
-              <ma14:wrappingTextBoxFlag xmlns:ma14="http://schemas.microsoft.com/office/mac/drawingml/2011/main" val="0"/>
+              <ma14:wrappingTextBoxFlag xmlns:ma14="http://schemas.microsoft.com/office/mac/drawingml/2011/main" xmlns="" val="0"/>
             </a:ext>
           </a:extLst>
         </p:spPr>
@@ -22757,7 +22545,7 @@
           <a:p>
             <a:pPr algn="r"/>
             <a:fld id="{F7021451-1387-4CA6-816F-3879F97B5CBC}" type="slidenum">
-              <a:rPr b="0" lang="en-US"/>
+              <a:rPr lang="en-US" b="0"/>
               <a:t>5</a:t>
             </a:fld>
             <a:endParaRPr lang="en-US"/>
@@ -22792,9 +22580,11 @@
       <p:sp>
         <p:nvSpPr>
           <p:cNvPr id="2" name="Text 0"/>
-          <p:cNvSpPr/>
+          <p:cNvSpPr>
+            <a:spLocks noGrp="1"/>
+          </p:cNvSpPr>
           <p:nvPr>
-            <p:ph idx="100" type="title" hasCustomPrompt="1"/>
+            <p:ph type="title" idx="100" hasCustomPrompt="1"/>
           </p:nvPr>
         </p:nvSpPr>
         <p:spPr>
@@ -22812,7 +22602,7 @@
           <a:bodyPr wrap="square" lIns="0" tIns="0" rIns="0" bIns="0" rtlCol="0" anchor="ctr"/>
           <a:lstStyle/>
           <a:p>
-            <a:pPr algn="l" indent="0" marL="0">
+            <a:pPr marL="0" indent="0" algn="l">
               <a:buNone/>
             </a:pPr>
             <a:r>
@@ -22875,7 +22665,7 @@
           <a:bodyPr wrap="square" lIns="0" tIns="0" rIns="0" bIns="0" rtlCol="0" anchor="t"/>
           <a:lstStyle/>
           <a:p>
-            <a:pPr algn="ctr" indent="0" marL="0">
+            <a:pPr marL="0" indent="0" algn="ctr">
               <a:buNone/>
             </a:pPr>
             <a:r>
@@ -22914,7 +22704,7 @@
           <a:bodyPr wrap="square" lIns="0" tIns="0" rIns="0" bIns="0" rtlCol="0" anchor="t"/>
           <a:lstStyle/>
           <a:p>
-            <a:pPr algn="ctr" indent="0" marL="0">
+            <a:pPr marL="0" indent="0" algn="ctr">
               <a:buNone/>
             </a:pPr>
             <a:r>
@@ -22928,7 +22718,7 @@
             <a:endParaRPr lang="en-US" sz="1400" dirty="0"/>
           </a:p>
           <a:p>
-            <a:pPr algn="ctr" indent="0" marL="0">
+            <a:pPr marL="0" indent="0" algn="ctr">
               <a:buNone/>
             </a:pPr>
             <a:r>
@@ -22991,7 +22781,7 @@
           <a:bodyPr wrap="square" lIns="0" tIns="0" rIns="0" bIns="0" rtlCol="0" anchor="t"/>
           <a:lstStyle/>
           <a:p>
-            <a:pPr algn="ctr" indent="0" marL="0">
+            <a:pPr marL="0" indent="0" algn="ctr">
               <a:buNone/>
             </a:pPr>
             <a:r>
@@ -23030,7 +22820,7 @@
           <a:bodyPr wrap="square" lIns="0" tIns="0" rIns="0" bIns="0" rtlCol="0" anchor="t"/>
           <a:lstStyle/>
           <a:p>
-            <a:pPr algn="ctr" indent="0" marL="0">
+            <a:pPr marL="0" indent="0" algn="ctr">
               <a:buNone/>
             </a:pPr>
             <a:r>
@@ -23044,7 +22834,7 @@
             <a:endParaRPr lang="en-US" sz="1400" dirty="0"/>
           </a:p>
           <a:p>
-            <a:pPr algn="ctr" indent="0" marL="0">
+            <a:pPr marL="0" indent="0" algn="ctr">
               <a:buNone/>
             </a:pPr>
             <a:r>
@@ -23107,7 +22897,7 @@
           <a:bodyPr wrap="square" lIns="0" tIns="0" rIns="0" bIns="0" rtlCol="0" anchor="t"/>
           <a:lstStyle/>
           <a:p>
-            <a:pPr algn="ctr" indent="0" marL="0">
+            <a:pPr marL="0" indent="0" algn="ctr">
               <a:buNone/>
             </a:pPr>
             <a:r>
@@ -23146,7 +22936,7 @@
           <a:bodyPr wrap="square" lIns="0" tIns="0" rIns="0" bIns="0" rtlCol="0" anchor="t"/>
           <a:lstStyle/>
           <a:p>
-            <a:pPr algn="ctr" indent="0" marL="0">
+            <a:pPr marL="0" indent="0" algn="ctr">
               <a:buNone/>
             </a:pPr>
             <a:r>
@@ -23160,7 +22950,7 @@
             <a:endParaRPr lang="en-US" sz="1400" dirty="0"/>
           </a:p>
           <a:p>
-            <a:pPr algn="ctr" indent="0" marL="0">
+            <a:pPr marL="0" indent="0" algn="ctr">
               <a:buNone/>
             </a:pPr>
             <a:r>
@@ -23196,7 +22986,7 @@
           <a:bodyPr wrap="square" lIns="0" tIns="0" rIns="0" bIns="0" rtlCol="0" anchor="t"/>
           <a:lstStyle/>
           <a:p>
-            <a:pPr indent="0" marL="0">
+            <a:pPr marL="0" indent="0">
               <a:buNone/>
             </a:pPr>
             <a:r>
@@ -23232,7 +23022,7 @@
           <a:bodyPr wrap="square" lIns="0" tIns="0" rIns="0" bIns="0" rtlCol="0" anchor="t"/>
           <a:lstStyle/>
           <a:p>
-            <a:pPr indent="0" marL="0">
+            <a:pPr marL="0" indent="0">
               <a:buNone/>
             </a:pPr>
             <a:r>
@@ -23267,7 +23057,7 @@
           </a:prstGeom>
           <a:extLst>
             <a:ext uri="{C572A759-6A51-4108-AA02-DFA0A04FC94B}">
-              <ma14:wrappingTextBoxFlag xmlns:ma14="http://schemas.microsoft.com/office/mac/drawingml/2011/main" val="0"/>
+              <ma14:wrappingTextBoxFlag xmlns:ma14="http://schemas.microsoft.com/office/mac/drawingml/2011/main" xmlns="" val="0"/>
             </a:ext>
           </a:extLst>
         </p:spPr>
@@ -23285,7 +23075,7 @@
           <a:p>
             <a:pPr algn="r"/>
             <a:fld id="{F7021451-1387-4CA6-816F-3879F97B5CBC}" type="slidenum">
-              <a:rPr b="0" lang="en-US"/>
+              <a:rPr lang="en-US" b="0"/>
               <a:t>6</a:t>
             </a:fld>
             <a:endParaRPr lang="en-US"/>
@@ -23320,9 +23110,11 @@
       <p:sp>
         <p:nvSpPr>
           <p:cNvPr id="2" name="Text 0"/>
-          <p:cNvSpPr/>
+          <p:cNvSpPr>
+            <a:spLocks noGrp="1"/>
+          </p:cNvSpPr>
           <p:nvPr>
-            <p:ph idx="100" type="title" hasCustomPrompt="1"/>
+            <p:ph type="title" idx="100" hasCustomPrompt="1"/>
           </p:nvPr>
         </p:nvSpPr>
         <p:spPr>
@@ -23340,7 +23132,7 @@
           <a:bodyPr wrap="square" lIns="0" tIns="0" rIns="0" bIns="0" rtlCol="0" anchor="ctr"/>
           <a:lstStyle/>
           <a:p>
-            <a:pPr algn="l" indent="0" marL="0">
+            <a:pPr marL="0" indent="0" algn="l">
               <a:buNone/>
             </a:pPr>
             <a:r>
@@ -23428,7 +23220,7 @@
           <a:bodyPr wrap="square" lIns="0" tIns="0" rIns="0" bIns="0" rtlCol="0" anchor="ctr"/>
           <a:lstStyle/>
           <a:p>
-            <a:pPr algn="ctr" indent="0" marL="0">
+            <a:pPr marL="0" indent="0" algn="ctr">
               <a:buNone/>
             </a:pPr>
             <a:r>
@@ -23464,7 +23256,7 @@
           <a:bodyPr wrap="square" lIns="0" tIns="0" rIns="0" bIns="0" rtlCol="0" anchor="t"/>
           <a:lstStyle/>
           <a:p>
-            <a:pPr indent="0" marL="0">
+            <a:pPr marL="0" indent="0">
               <a:buNone/>
             </a:pPr>
             <a:r>
@@ -23500,7 +23292,7 @@
           <a:bodyPr wrap="square" lIns="0" tIns="0" rIns="0" bIns="0" rtlCol="0" anchor="t"/>
           <a:lstStyle/>
           <a:p>
-            <a:pPr indent="0" marL="0">
+            <a:pPr marL="0" indent="0">
               <a:buNone/>
             </a:pPr>
             <a:r>
@@ -23539,7 +23331,7 @@
           <a:bodyPr wrap="square" lIns="0" tIns="0" rIns="0" bIns="0" rtlCol="0" anchor="t"/>
           <a:lstStyle/>
           <a:p>
-            <a:pPr indent="0" marL="0">
+            <a:pPr marL="0" indent="0">
               <a:buNone/>
             </a:pPr>
             <a:r>
@@ -23627,7 +23419,7 @@
           <a:bodyPr wrap="square" lIns="0" tIns="0" rIns="0" bIns="0" rtlCol="0" anchor="ctr"/>
           <a:lstStyle/>
           <a:p>
-            <a:pPr algn="ctr" indent="0" marL="0">
+            <a:pPr marL="0" indent="0" algn="ctr">
               <a:buNone/>
             </a:pPr>
             <a:r>
@@ -23663,7 +23455,7 @@
           <a:bodyPr wrap="square" lIns="0" tIns="0" rIns="0" bIns="0" rtlCol="0" anchor="t"/>
           <a:lstStyle/>
           <a:p>
-            <a:pPr indent="0" marL="0">
+            <a:pPr marL="0" indent="0">
               <a:buNone/>
             </a:pPr>
             <a:r>
@@ -23699,7 +23491,7 @@
           <a:bodyPr wrap="square" lIns="0" tIns="0" rIns="0" bIns="0" rtlCol="0" anchor="t"/>
           <a:lstStyle/>
           <a:p>
-            <a:pPr indent="0" marL="0">
+            <a:pPr marL="0" indent="0">
               <a:buNone/>
             </a:pPr>
             <a:r>
@@ -23738,7 +23530,7 @@
           <a:bodyPr wrap="square" lIns="0" tIns="0" rIns="0" bIns="0" rtlCol="0" anchor="t"/>
           <a:lstStyle/>
           <a:p>
-            <a:pPr indent="0" marL="0">
+            <a:pPr marL="0" indent="0">
               <a:buNone/>
             </a:pPr>
             <a:r>
@@ -23826,7 +23618,7 @@
           <a:bodyPr wrap="square" lIns="0" tIns="0" rIns="0" bIns="0" rtlCol="0" anchor="ctr"/>
           <a:lstStyle/>
           <a:p>
-            <a:pPr algn="ctr" indent="0" marL="0">
+            <a:pPr marL="0" indent="0" algn="ctr">
               <a:buNone/>
             </a:pPr>
             <a:r>
@@ -23862,7 +23654,7 @@
           <a:bodyPr wrap="square" lIns="0" tIns="0" rIns="0" bIns="0" rtlCol="0" anchor="t"/>
           <a:lstStyle/>
           <a:p>
-            <a:pPr indent="0" marL="0">
+            <a:pPr marL="0" indent="0">
               <a:buNone/>
             </a:pPr>
             <a:r>
@@ -23898,7 +23690,7 @@
           <a:bodyPr wrap="square" lIns="0" tIns="0" rIns="0" bIns="0" rtlCol="0" anchor="t"/>
           <a:lstStyle/>
           <a:p>
-            <a:pPr indent="0" marL="0">
+            <a:pPr marL="0" indent="0">
               <a:buNone/>
             </a:pPr>
             <a:r>
@@ -23937,7 +23729,7 @@
           <a:bodyPr wrap="square" lIns="0" tIns="0" rIns="0" bIns="0" rtlCol="0" anchor="t"/>
           <a:lstStyle/>
           <a:p>
-            <a:pPr indent="0" marL="0">
+            <a:pPr marL="0" indent="0">
               <a:buNone/>
             </a:pPr>
             <a:r>
@@ -24025,7 +23817,7 @@
           <a:bodyPr wrap="square" lIns="0" tIns="0" rIns="0" bIns="0" rtlCol="0" anchor="ctr"/>
           <a:lstStyle/>
           <a:p>
-            <a:pPr algn="ctr" indent="0" marL="0">
+            <a:pPr marL="0" indent="0" algn="ctr">
               <a:buNone/>
             </a:pPr>
             <a:r>
@@ -24061,7 +23853,7 @@
           <a:bodyPr wrap="square" lIns="0" tIns="0" rIns="0" bIns="0" rtlCol="0" anchor="t"/>
           <a:lstStyle/>
           <a:p>
-            <a:pPr indent="0" marL="0">
+            <a:pPr marL="0" indent="0">
               <a:buNone/>
             </a:pPr>
             <a:r>
@@ -24097,7 +23889,7 @@
           <a:bodyPr wrap="square" lIns="0" tIns="0" rIns="0" bIns="0" rtlCol="0" anchor="t"/>
           <a:lstStyle/>
           <a:p>
-            <a:pPr indent="0" marL="0">
+            <a:pPr marL="0" indent="0">
               <a:buNone/>
             </a:pPr>
             <a:r>
@@ -24136,7 +23928,7 @@
           <a:bodyPr wrap="square" lIns="0" tIns="0" rIns="0" bIns="0" rtlCol="0" anchor="t"/>
           <a:lstStyle/>
           <a:p>
-            <a:pPr indent="0" marL="0">
+            <a:pPr marL="0" indent="0">
               <a:buNone/>
             </a:pPr>
             <a:r>
@@ -24224,7 +24016,7 @@
           <a:bodyPr wrap="square" lIns="0" tIns="0" rIns="0" bIns="0" rtlCol="0" anchor="ctr"/>
           <a:lstStyle/>
           <a:p>
-            <a:pPr algn="ctr" indent="0" marL="0">
+            <a:pPr marL="0" indent="0" algn="ctr">
               <a:buNone/>
             </a:pPr>
             <a:r>
@@ -24260,7 +24052,7 @@
           <a:bodyPr wrap="square" lIns="0" tIns="0" rIns="0" bIns="0" rtlCol="0" anchor="t"/>
           <a:lstStyle/>
           <a:p>
-            <a:pPr indent="0" marL="0">
+            <a:pPr marL="0" indent="0">
               <a:buNone/>
             </a:pPr>
             <a:r>
@@ -24296,7 +24088,7 @@
           <a:bodyPr wrap="square" lIns="0" tIns="0" rIns="0" bIns="0" rtlCol="0" anchor="t"/>
           <a:lstStyle/>
           <a:p>
-            <a:pPr indent="0" marL="0">
+            <a:pPr marL="0" indent="0">
               <a:buNone/>
             </a:pPr>
             <a:r>
@@ -24335,7 +24127,7 @@
           <a:bodyPr wrap="square" lIns="0" tIns="0" rIns="0" bIns="0" rtlCol="0" anchor="t"/>
           <a:lstStyle/>
           <a:p>
-            <a:pPr indent="0" marL="0">
+            <a:pPr marL="0" indent="0">
               <a:buNone/>
             </a:pPr>
             <a:r>
@@ -24423,7 +24215,7 @@
           <a:bodyPr wrap="square" lIns="0" tIns="0" rIns="0" bIns="0" rtlCol="0" anchor="ctr"/>
           <a:lstStyle/>
           <a:p>
-            <a:pPr algn="ctr" indent="0" marL="0">
+            <a:pPr marL="0" indent="0" algn="ctr">
               <a:buNone/>
             </a:pPr>
             <a:r>
@@ -24459,7 +24251,7 @@
           <a:bodyPr wrap="square" lIns="0" tIns="0" rIns="0" bIns="0" rtlCol="0" anchor="t"/>
           <a:lstStyle/>
           <a:p>
-            <a:pPr indent="0" marL="0">
+            <a:pPr marL="0" indent="0">
               <a:buNone/>
             </a:pPr>
             <a:r>
@@ -24495,7 +24287,7 @@
           <a:bodyPr wrap="square" lIns="0" tIns="0" rIns="0" bIns="0" rtlCol="0" anchor="t"/>
           <a:lstStyle/>
           <a:p>
-            <a:pPr indent="0" marL="0">
+            <a:pPr marL="0" indent="0">
               <a:buNone/>
             </a:pPr>
             <a:r>
@@ -24534,7 +24326,7 @@
           <a:bodyPr wrap="square" lIns="0" tIns="0" rIns="0" bIns="0" rtlCol="0" anchor="t"/>
           <a:lstStyle/>
           <a:p>
-            <a:pPr indent="0" marL="0">
+            <a:pPr marL="0" indent="0">
               <a:buNone/>
             </a:pPr>
             <a:r>
@@ -24622,7 +24414,7 @@
           <a:bodyPr wrap="square" lIns="0" tIns="0" rIns="0" bIns="0" rtlCol="0" anchor="ctr"/>
           <a:lstStyle/>
           <a:p>
-            <a:pPr algn="ctr" indent="0" marL="0">
+            <a:pPr marL="0" indent="0" algn="ctr">
               <a:buNone/>
             </a:pPr>
             <a:r>
@@ -24658,7 +24450,7 @@
           <a:bodyPr wrap="square" lIns="0" tIns="0" rIns="0" bIns="0" rtlCol="0" anchor="t"/>
           <a:lstStyle/>
           <a:p>
-            <a:pPr indent="0" marL="0">
+            <a:pPr marL="0" indent="0">
               <a:buNone/>
             </a:pPr>
             <a:r>
@@ -24694,7 +24486,7 @@
           <a:bodyPr wrap="square" lIns="0" tIns="0" rIns="0" bIns="0" rtlCol="0" anchor="t"/>
           <a:lstStyle/>
           <a:p>
-            <a:pPr indent="0" marL="0">
+            <a:pPr marL="0" indent="0">
               <a:buNone/>
             </a:pPr>
             <a:r>
@@ -24733,7 +24525,7 @@
           <a:bodyPr wrap="square" lIns="0" tIns="0" rIns="0" bIns="0" rtlCol="0" anchor="t"/>
           <a:lstStyle/>
           <a:p>
-            <a:pPr indent="0" marL="0">
+            <a:pPr marL="0" indent="0">
               <a:buNone/>
             </a:pPr>
             <a:r>
@@ -24821,7 +24613,7 @@
           <a:bodyPr wrap="square" lIns="0" tIns="0" rIns="0" bIns="0" rtlCol="0" anchor="ctr"/>
           <a:lstStyle/>
           <a:p>
-            <a:pPr algn="ctr" indent="0" marL="0">
+            <a:pPr marL="0" indent="0" algn="ctr">
               <a:buNone/>
             </a:pPr>
             <a:r>
@@ -24857,7 +24649,7 @@
           <a:bodyPr wrap="square" lIns="0" tIns="0" rIns="0" bIns="0" rtlCol="0" anchor="t"/>
           <a:lstStyle/>
           <a:p>
-            <a:pPr indent="0" marL="0">
+            <a:pPr marL="0" indent="0">
               <a:buNone/>
             </a:pPr>
             <a:r>
@@ -24893,7 +24685,7 @@
           <a:bodyPr wrap="square" lIns="0" tIns="0" rIns="0" bIns="0" rtlCol="0" anchor="t"/>
           <a:lstStyle/>
           <a:p>
-            <a:pPr indent="0" marL="0">
+            <a:pPr marL="0" indent="0">
               <a:buNone/>
             </a:pPr>
             <a:r>
@@ -24932,7 +24724,7 @@
           <a:bodyPr wrap="square" lIns="0" tIns="0" rIns="0" bIns="0" rtlCol="0" anchor="t"/>
           <a:lstStyle/>
           <a:p>
-            <a:pPr indent="0" marL="0">
+            <a:pPr marL="0" indent="0">
               <a:buNone/>
             </a:pPr>
             <a:r>
@@ -25020,7 +24812,7 @@
           <a:bodyPr wrap="square" lIns="0" tIns="0" rIns="0" bIns="0" rtlCol="0" anchor="ctr"/>
           <a:lstStyle/>
           <a:p>
-            <a:pPr algn="ctr" indent="0" marL="0">
+            <a:pPr marL="0" indent="0" algn="ctr">
               <a:buNone/>
             </a:pPr>
             <a:r>
@@ -25056,7 +24848,7 @@
           <a:bodyPr wrap="square" lIns="0" tIns="0" rIns="0" bIns="0" rtlCol="0" anchor="t"/>
           <a:lstStyle/>
           <a:p>
-            <a:pPr indent="0" marL="0">
+            <a:pPr marL="0" indent="0">
               <a:buNone/>
             </a:pPr>
             <a:r>
@@ -25092,7 +24884,7 @@
           <a:bodyPr wrap="square" lIns="0" tIns="0" rIns="0" bIns="0" rtlCol="0" anchor="t"/>
           <a:lstStyle/>
           <a:p>
-            <a:pPr indent="0" marL="0">
+            <a:pPr marL="0" indent="0">
               <a:buNone/>
             </a:pPr>
             <a:r>
@@ -25131,7 +24923,7 @@
           <a:bodyPr wrap="square" lIns="0" tIns="0" rIns="0" bIns="0" rtlCol="0" anchor="t"/>
           <a:lstStyle/>
           <a:p>
-            <a:pPr indent="0" marL="0">
+            <a:pPr marL="0" indent="0">
               <a:buNone/>
             </a:pPr>
             <a:r>
@@ -25219,7 +25011,7 @@
           <a:bodyPr wrap="square" lIns="0" tIns="0" rIns="0" bIns="0" rtlCol="0" anchor="ctr"/>
           <a:lstStyle/>
           <a:p>
-            <a:pPr algn="ctr" indent="0" marL="0">
+            <a:pPr marL="0" indent="0" algn="ctr">
               <a:buNone/>
             </a:pPr>
             <a:r>
@@ -25255,7 +25047,7 @@
           <a:bodyPr wrap="square" lIns="0" tIns="0" rIns="0" bIns="0" rtlCol="0" anchor="t"/>
           <a:lstStyle/>
           <a:p>
-            <a:pPr indent="0" marL="0">
+            <a:pPr marL="0" indent="0">
               <a:buNone/>
             </a:pPr>
             <a:r>
@@ -25291,7 +25083,7 @@
           <a:bodyPr wrap="square" lIns="0" tIns="0" rIns="0" bIns="0" rtlCol="0" anchor="t"/>
           <a:lstStyle/>
           <a:p>
-            <a:pPr indent="0" marL="0">
+            <a:pPr marL="0" indent="0">
               <a:buNone/>
             </a:pPr>
             <a:r>
@@ -25330,7 +25122,7 @@
           <a:bodyPr wrap="square" lIns="0" tIns="0" rIns="0" bIns="0" rtlCol="0" anchor="t"/>
           <a:lstStyle/>
           <a:p>
-            <a:pPr indent="0" marL="0">
+            <a:pPr marL="0" indent="0">
               <a:buNone/>
             </a:pPr>
             <a:r>
@@ -25366,7 +25158,7 @@
           <a:bodyPr wrap="square" lIns="0" tIns="0" rIns="0" bIns="0" rtlCol="0" anchor="t"/>
           <a:lstStyle/>
           <a:p>
-            <a:pPr indent="0" marL="0">
+            <a:pPr marL="0" indent="0">
               <a:buNone/>
             </a:pPr>
             <a:r>
@@ -25383,7 +25175,7 @@
       </p:sp>
       <p:sp>
         <p:nvSpPr>
-          <p:cNvPr id="25" name="Slide Number Placeholder 0"/>
+          <p:cNvPr id="3" name="Slide Number Placeholder 0"/>
           <p:cNvSpPr>
             <a:spLocks noGrp="1"/>
           </p:cNvSpPr>
@@ -25401,7 +25193,7 @@
           </a:prstGeom>
           <a:extLst>
             <a:ext uri="{C572A759-6A51-4108-AA02-DFA0A04FC94B}">
-              <ma14:wrappingTextBoxFlag xmlns:ma14="http://schemas.microsoft.com/office/mac/drawingml/2011/main" val="0"/>
+              <ma14:wrappingTextBoxFlag xmlns:ma14="http://schemas.microsoft.com/office/mac/drawingml/2011/main" xmlns="" val="0"/>
             </a:ext>
           </a:extLst>
         </p:spPr>
@@ -25419,7 +25211,7 @@
           <a:p>
             <a:pPr algn="r"/>
             <a:fld id="{F7021451-1387-4CA6-816F-3879F97B5CBC}" type="slidenum">
-              <a:rPr b="0" lang="en-US"/>
+              <a:rPr lang="en-US" b="0"/>
               <a:t>7</a:t>
             </a:fld>
             <a:endParaRPr lang="en-US"/>
@@ -25454,9 +25246,11 @@
       <p:sp>
         <p:nvSpPr>
           <p:cNvPr id="2" name="Text 0"/>
-          <p:cNvSpPr/>
+          <p:cNvSpPr>
+            <a:spLocks noGrp="1"/>
+          </p:cNvSpPr>
           <p:nvPr>
-            <p:ph idx="100" type="title" hasCustomPrompt="1"/>
+            <p:ph type="title" idx="100" hasCustomPrompt="1"/>
           </p:nvPr>
         </p:nvSpPr>
         <p:spPr>
@@ -25474,7 +25268,7 @@
           <a:bodyPr wrap="square" lIns="0" tIns="0" rIns="0" bIns="0" rtlCol="0" anchor="ctr"/>
           <a:lstStyle/>
           <a:p>
-            <a:pPr algn="l" indent="0" marL="0">
+            <a:pPr marL="0" indent="0" algn="l">
               <a:buNone/>
             </a:pPr>
             <a:r>
@@ -25543,14 +25337,14 @@
       </p:sp>
       <p:pic>
         <p:nvPicPr>
-          <p:cNvPr id="6" name="icon FaChartLine" descr="preencoded.png">    </p:cNvPr>
+          <p:cNvPr id="6" name="icon FaChartLine" descr="preencoded.png"/>
           <p:cNvPicPr>
             <a:picLocks noChangeAspect="1"/>
           </p:cNvPicPr>
           <p:nvPr/>
         </p:nvPicPr>
         <p:blipFill>
-          <a:blip r:embed="rId1"/>
+          <a:blip r:embed="rId3"/>
           <a:stretch>
             <a:fillRect/>
           </a:stretch>
@@ -25586,7 +25380,7 @@
           <a:bodyPr wrap="square" lIns="0" tIns="0" rIns="0" bIns="0" rtlCol="0" anchor="t"/>
           <a:lstStyle/>
           <a:p>
-            <a:pPr indent="0" marL="0">
+            <a:pPr marL="0" indent="0">
               <a:buNone/>
             </a:pPr>
             <a:r>
@@ -25625,7 +25419,7 @@
           <a:bodyPr wrap="square" lIns="0" tIns="0" rIns="0" bIns="0" rtlCol="0" anchor="t"/>
           <a:lstStyle/>
           <a:p>
-            <a:pPr indent="0" marL="0">
+            <a:pPr marL="0" indent="0">
               <a:buNone/>
             </a:pPr>
             <a:r>
@@ -25694,14 +25488,14 @@
       </p:sp>
       <p:pic>
         <p:nvPicPr>
-          <p:cNvPr id="11" name="icon FaSearch" descr="preencoded.png">    </p:cNvPr>
+          <p:cNvPr id="11" name="icon FaSearch" descr="preencoded.png"/>
           <p:cNvPicPr>
             <a:picLocks noChangeAspect="1"/>
           </p:cNvPicPr>
           <p:nvPr/>
         </p:nvPicPr>
         <p:blipFill>
-          <a:blip r:embed="rId2"/>
+          <a:blip r:embed="rId4"/>
           <a:stretch>
             <a:fillRect/>
           </a:stretch>
@@ -25737,7 +25531,7 @@
           <a:bodyPr wrap="square" lIns="0" tIns="0" rIns="0" bIns="0" rtlCol="0" anchor="t"/>
           <a:lstStyle/>
           <a:p>
-            <a:pPr indent="0" marL="0">
+            <a:pPr marL="0" indent="0">
               <a:buNone/>
             </a:pPr>
             <a:r>
@@ -25776,7 +25570,7 @@
           <a:bodyPr wrap="square" lIns="0" tIns="0" rIns="0" bIns="0" rtlCol="0" anchor="t"/>
           <a:lstStyle/>
           <a:p>
-            <a:pPr indent="0" marL="0">
+            <a:pPr marL="0" indent="0">
               <a:buNone/>
             </a:pPr>
             <a:r>
@@ -25845,14 +25639,14 @@
       </p:sp>
       <p:pic>
         <p:nvPicPr>
-          <p:cNvPr id="16" name="icon FaMoneyBillWave" descr="preencoded.png">    </p:cNvPr>
+          <p:cNvPr id="16" name="icon FaMoneyBillWave" descr="preencoded.png"/>
           <p:cNvPicPr>
             <a:picLocks noChangeAspect="1"/>
           </p:cNvPicPr>
           <p:nvPr/>
         </p:nvPicPr>
         <p:blipFill>
-          <a:blip r:embed="rId3"/>
+          <a:blip r:embed="rId5"/>
           <a:stretch>
             <a:fillRect/>
           </a:stretch>
@@ -25888,7 +25682,7 @@
           <a:bodyPr wrap="square" lIns="0" tIns="0" rIns="0" bIns="0" rtlCol="0" anchor="t"/>
           <a:lstStyle/>
           <a:p>
-            <a:pPr indent="0" marL="0">
+            <a:pPr marL="0" indent="0">
               <a:buNone/>
             </a:pPr>
             <a:r>
@@ -25927,7 +25721,7 @@
           <a:bodyPr wrap="square" lIns="0" tIns="0" rIns="0" bIns="0" rtlCol="0" anchor="t"/>
           <a:lstStyle/>
           <a:p>
-            <a:pPr indent="0" marL="0">
+            <a:pPr marL="0" indent="0">
               <a:buNone/>
             </a:pPr>
             <a:r>
@@ -25990,11 +25784,11 @@
           <a:bodyPr wrap="square" lIns="0" tIns="0" rIns="0" bIns="0" rtlCol="0" anchor="t"/>
           <a:lstStyle/>
           <a:p>
-            <a:pPr indent="0" marL="0">
-              <a:buNone/>
-            </a:pPr>
-            <a:r>
-              <a:rPr lang="en-US" sz="1200" b="1" spc="200" kern="0" dirty="0">
+            <a:pPr marL="0" indent="0">
+              <a:buNone/>
+            </a:pPr>
+            <a:r>
+              <a:rPr lang="en-US" sz="1200" b="1" kern="0" spc="200" dirty="0">
                 <a:solidFill>
                   <a:schemeClr val="accent1"/>
                 </a:solidFill>
@@ -26119,7 +25913,7 @@
           </a:prstGeom>
           <a:extLst>
             <a:ext uri="{C572A759-6A51-4108-AA02-DFA0A04FC94B}">
-              <ma14:wrappingTextBoxFlag xmlns:ma14="http://schemas.microsoft.com/office/mac/drawingml/2011/main" val="0"/>
+              <ma14:wrappingTextBoxFlag xmlns:ma14="http://schemas.microsoft.com/office/mac/drawingml/2011/main" xmlns="" val="0"/>
             </a:ext>
           </a:extLst>
         </p:spPr>
@@ -26137,7 +25931,7 @@
           <a:p>
             <a:pPr algn="r"/>
             <a:fld id="{F7021451-1387-4CA6-816F-3879F97B5CBC}" type="slidenum">
-              <a:rPr b="0" lang="en-US"/>
+              <a:rPr lang="en-US" b="0"/>
               <a:t>8</a:t>
             </a:fld>
             <a:endParaRPr lang="en-US"/>
@@ -26172,9 +25966,11 @@
       <p:sp>
         <p:nvSpPr>
           <p:cNvPr id="2" name="Text 0"/>
-          <p:cNvSpPr/>
+          <p:cNvSpPr>
+            <a:spLocks noGrp="1"/>
+          </p:cNvSpPr>
           <p:nvPr>
-            <p:ph idx="100" type="title" hasCustomPrompt="1"/>
+            <p:ph type="title" idx="100" hasCustomPrompt="1"/>
           </p:nvPr>
         </p:nvSpPr>
         <p:spPr>
@@ -26192,7 +25988,7 @@
           <a:bodyPr wrap="square" lIns="0" tIns="0" rIns="0" bIns="0" rtlCol="0" anchor="ctr"/>
           <a:lstStyle/>
           <a:p>
-            <a:pPr algn="l" indent="0" marL="0">
+            <a:pPr marL="0" indent="0" algn="l">
               <a:buNone/>
             </a:pPr>
             <a:r>
@@ -26261,14 +26057,14 @@
       </p:sp>
       <p:pic>
         <p:nvPicPr>
-          <p:cNvPr id="6" name="icon FaCheckCircle" descr="preencoded.png">    </p:cNvPr>
+          <p:cNvPr id="6" name="icon FaCheckCircle" descr="preencoded.png"/>
           <p:cNvPicPr>
             <a:picLocks noChangeAspect="1"/>
           </p:cNvPicPr>
           <p:nvPr/>
         </p:nvPicPr>
         <p:blipFill>
-          <a:blip r:embed="rId1"/>
+          <a:blip r:embed="rId3"/>
           <a:stretch>
             <a:fillRect/>
           </a:stretch>
@@ -26304,7 +26100,7 @@
           <a:bodyPr wrap="square" lIns="0" tIns="0" rIns="0" bIns="0" rtlCol="0" anchor="t"/>
           <a:lstStyle/>
           <a:p>
-            <a:pPr indent="0" marL="0">
+            <a:pPr marL="0" indent="0">
               <a:buNone/>
             </a:pPr>
             <a:r>
@@ -26488,14 +26284,14 @@
       </p:sp>
       <p:pic>
         <p:nvPicPr>
-          <p:cNvPr id="11" name="icon FaExclamationTriangle" descr="preencoded.png">    </p:cNvPr>
+          <p:cNvPr id="11" name="icon FaExclamationTriangle" descr="preencoded.png"/>
           <p:cNvPicPr>
             <a:picLocks noChangeAspect="1"/>
           </p:cNvPicPr>
           <p:nvPr/>
         </p:nvPicPr>
         <p:blipFill>
-          <a:blip r:embed="rId2"/>
+          <a:blip r:embed="rId4"/>
           <a:stretch>
             <a:fillRect/>
           </a:stretch>
@@ -26531,7 +26327,7 @@
           <a:bodyPr wrap="square" lIns="0" tIns="0" rIns="0" bIns="0" rtlCol="0" anchor="t"/>
           <a:lstStyle/>
           <a:p>
-            <a:pPr indent="0" marL="0">
+            <a:pPr marL="0" indent="0">
               <a:buNone/>
             </a:pPr>
             <a:r>
@@ -26709,7 +26505,7 @@
           <a:bodyPr wrap="square" lIns="0" tIns="0" rIns="0" bIns="0" rtlCol="0" anchor="t"/>
           <a:lstStyle/>
           <a:p>
-            <a:pPr indent="0" marL="0">
+            <a:pPr marL="0" indent="0">
               <a:buNone/>
             </a:pPr>
             <a:r>
@@ -26720,9 +26516,6 @@
               </a:rPr>
               <a:t>Tunde's power banks: </a:t>
             </a:r>
-            <a:pPr indent="0" marL="0">
-              <a:buNone/>
-            </a:pPr>
             <a:r>
               <a:rPr lang="en-US" sz="1400" dirty="0">
                 <a:solidFill>
@@ -26755,7 +26548,7 @@
           </a:prstGeom>
           <a:extLst>
             <a:ext uri="{C572A759-6A51-4108-AA02-DFA0A04FC94B}">
-              <ma14:wrappingTextBoxFlag xmlns:ma14="http://schemas.microsoft.com/office/mac/drawingml/2011/main" val="0"/>
+              <ma14:wrappingTextBoxFlag xmlns:ma14="http://schemas.microsoft.com/office/mac/drawingml/2011/main" xmlns="" val="0"/>
             </a:ext>
           </a:extLst>
         </p:spPr>
@@ -26773,7 +26566,7 @@
           <a:p>
             <a:pPr algn="r"/>
             <a:fld id="{F7021451-1387-4CA6-816F-3879F97B5CBC}" type="slidenum">
-              <a:rPr b="0" lang="en-US"/>
+              <a:rPr lang="en-US" b="0"/>
               <a:t>9</a:t>
             </a:fld>
             <a:endParaRPr lang="en-US"/>
@@ -27081,4 +26874,319 @@
     </a:ext>
   </a:extLst>
 </a:theme>
+</file>
+
+<file path=ppt/theme/theme2.xml><?xml version="1.0" encoding="utf-8"?>
+<a:theme xmlns:a="http://schemas.openxmlformats.org/drawingml/2006/main" name="Office Theme">
+  <a:themeElements>
+    <a:clrScheme name="Office">
+      <a:dk1>
+        <a:sysClr val="windowText" lastClr="000000"/>
+      </a:dk1>
+      <a:lt1>
+        <a:sysClr val="window" lastClr="FFFFFF"/>
+      </a:lt1>
+      <a:dk2>
+        <a:srgbClr val="0E2841"/>
+      </a:dk2>
+      <a:lt2>
+        <a:srgbClr val="E8E8E8"/>
+      </a:lt2>
+      <a:accent1>
+        <a:srgbClr val="156082"/>
+      </a:accent1>
+      <a:accent2>
+        <a:srgbClr val="E97132"/>
+      </a:accent2>
+      <a:accent3>
+        <a:srgbClr val="196B24"/>
+      </a:accent3>
+      <a:accent4>
+        <a:srgbClr val="0F9ED5"/>
+      </a:accent4>
+      <a:accent5>
+        <a:srgbClr val="A02B93"/>
+      </a:accent5>
+      <a:accent6>
+        <a:srgbClr val="4EA72E"/>
+      </a:accent6>
+      <a:hlink>
+        <a:srgbClr val="467886"/>
+      </a:hlink>
+      <a:folHlink>
+        <a:srgbClr val="96607D"/>
+      </a:folHlink>
+    </a:clrScheme>
+    <a:fontScheme name="Office">
+      <a:majorFont>
+        <a:latin typeface="Aptos Display" panose="02110004020202020204"/>
+        <a:ea typeface=""/>
+        <a:cs typeface=""/>
+        <a:font script="Jpan" typeface="游ゴシック Light"/>
+        <a:font script="Hang" typeface="맑은 고딕"/>
+        <a:font script="Hans" typeface="等线 Light"/>
+        <a:font script="Hant" typeface="新細明體"/>
+        <a:font script="Arab" typeface="Times New Roman"/>
+        <a:font script="Hebr" typeface="Times New Roman"/>
+        <a:font script="Thai" typeface="Angsana New"/>
+        <a:font script="Ethi" typeface="Nyala"/>
+        <a:font script="Beng" typeface="Vrinda"/>
+        <a:font script="Gujr" typeface="Shruti"/>
+        <a:font script="Khmr" typeface="MoolBoran"/>
+        <a:font script="Knda" typeface="Tunga"/>
+        <a:font script="Guru" typeface="Raavi"/>
+        <a:font script="Cans" typeface="Euphemia"/>
+        <a:font script="Cher" typeface="Plantagenet Cherokee"/>
+        <a:font script="Yiii" typeface="Microsoft Yi Baiti"/>
+        <a:font script="Tibt" typeface="Microsoft Himalaya"/>
+        <a:font script="Thaa" typeface="MV Boli"/>
+        <a:font script="Deva" typeface="Mangal"/>
+        <a:font script="Telu" typeface="Gautami"/>
+        <a:font script="Taml" typeface="Latha"/>
+        <a:font script="Syrc" typeface="Estrangelo Edessa"/>
+        <a:font script="Orya" typeface="Kalinga"/>
+        <a:font script="Mlym" typeface="Kartika"/>
+        <a:font script="Laoo" typeface="DokChampa"/>
+        <a:font script="Sinh" typeface="Iskoola Pota"/>
+        <a:font script="Mong" typeface="Mongolian Baiti"/>
+        <a:font script="Viet" typeface="Times New Roman"/>
+        <a:font script="Uigh" typeface="Microsoft Uighur"/>
+        <a:font script="Geor" typeface="Sylfaen"/>
+        <a:font script="Armn" typeface="Arial"/>
+        <a:font script="Bugi" typeface="Leelawadee UI"/>
+        <a:font script="Bopo" typeface="Microsoft JhengHei"/>
+        <a:font script="Java" typeface="Javanese Text"/>
+        <a:font script="Lisu" typeface="Segoe UI"/>
+        <a:font script="Mymr" typeface="Myanmar Text"/>
+        <a:font script="Nkoo" typeface="Ebrima"/>
+        <a:font script="Olck" typeface="Nirmala UI"/>
+        <a:font script="Osma" typeface="Ebrima"/>
+        <a:font script="Phag" typeface="Phagspa"/>
+        <a:font script="Syrn" typeface="Estrangelo Edessa"/>
+        <a:font script="Syrj" typeface="Estrangelo Edessa"/>
+        <a:font script="Syre" typeface="Estrangelo Edessa"/>
+        <a:font script="Sora" typeface="Nirmala UI"/>
+        <a:font script="Tale" typeface="Microsoft Tai Le"/>
+        <a:font script="Talu" typeface="Microsoft New Tai Lue"/>
+        <a:font script="Tfng" typeface="Ebrima"/>
+      </a:majorFont>
+      <a:minorFont>
+        <a:latin typeface="Aptos" panose="02110004020202020204"/>
+        <a:ea typeface=""/>
+        <a:cs typeface=""/>
+        <a:font script="Jpan" typeface="游ゴシック"/>
+        <a:font script="Hang" typeface="맑은 고딕"/>
+        <a:font script="Hans" typeface="等线"/>
+        <a:font script="Hant" typeface="新細明體"/>
+        <a:font script="Arab" typeface="Arial"/>
+        <a:font script="Hebr" typeface="Arial"/>
+        <a:font script="Thai" typeface="Cordia New"/>
+        <a:font script="Ethi" typeface="Nyala"/>
+        <a:font script="Beng" typeface="Vrinda"/>
+        <a:font script="Gujr" typeface="Shruti"/>
+        <a:font script="Khmr" typeface="DaunPenh"/>
+        <a:font script="Knda" typeface="Tunga"/>
+        <a:font script="Guru" typeface="Raavi"/>
+        <a:font script="Cans" typeface="Euphemia"/>
+        <a:font script="Cher" typeface="Plantagenet Cherokee"/>
+        <a:font script="Yiii" typeface="Microsoft Yi Baiti"/>
+        <a:font script="Tibt" typeface="Microsoft Himalaya"/>
+        <a:font script="Thaa" typeface="MV Boli"/>
+        <a:font script="Deva" typeface="Mangal"/>
+        <a:font script="Telu" typeface="Gautami"/>
+        <a:font script="Taml" typeface="Latha"/>
+        <a:font script="Syrc" typeface="Estrangelo Edessa"/>
+        <a:font script="Orya" typeface="Kalinga"/>
+        <a:font script="Mlym" typeface="Kartika"/>
+        <a:font script="Laoo" typeface="DokChampa"/>
+        <a:font script="Sinh" typeface="Iskoola Pota"/>
+        <a:font script="Mong" typeface="Mongolian Baiti"/>
+        <a:font script="Viet" typeface="Arial"/>
+        <a:font script="Uigh" typeface="Microsoft Uighur"/>
+        <a:font script="Geor" typeface="Sylfaen"/>
+        <a:font script="Armn" typeface="Arial"/>
+        <a:font script="Bugi" typeface="Leelawadee UI"/>
+        <a:font script="Bopo" typeface="Microsoft JhengHei"/>
+        <a:font script="Java" typeface="Javanese Text"/>
+        <a:font script="Lisu" typeface="Segoe UI"/>
+        <a:font script="Mymr" typeface="Myanmar Text"/>
+        <a:font script="Nkoo" typeface="Ebrima"/>
+        <a:font script="Olck" typeface="Nirmala UI"/>
+        <a:font script="Osma" typeface="Ebrima"/>
+        <a:font script="Phag" typeface="Phagspa"/>
+        <a:font script="Syrn" typeface="Estrangelo Edessa"/>
+        <a:font script="Syrj" typeface="Estrangelo Edessa"/>
+        <a:font script="Syre" typeface="Estrangelo Edessa"/>
+        <a:font script="Sora" typeface="Nirmala UI"/>
+        <a:font script="Tale" typeface="Microsoft Tai Le"/>
+        <a:font script="Talu" typeface="Microsoft New Tai Lue"/>
+        <a:font script="Tfng" typeface="Ebrima"/>
+      </a:minorFont>
+    </a:fontScheme>
+    <a:fmtScheme name="Office">
+      <a:fillStyleLst>
+        <a:solidFill>
+          <a:schemeClr val="phClr"/>
+        </a:solidFill>
+        <a:gradFill rotWithShape="1">
+          <a:gsLst>
+            <a:gs pos="0">
+              <a:schemeClr val="phClr">
+                <a:lumMod val="110000"/>
+                <a:satMod val="105000"/>
+                <a:tint val="67000"/>
+              </a:schemeClr>
+            </a:gs>
+            <a:gs pos="50000">
+              <a:schemeClr val="phClr">
+                <a:lumMod val="105000"/>
+                <a:satMod val="103000"/>
+                <a:tint val="73000"/>
+              </a:schemeClr>
+            </a:gs>
+            <a:gs pos="100000">
+              <a:schemeClr val="phClr">
+                <a:lumMod val="105000"/>
+                <a:satMod val="109000"/>
+                <a:tint val="81000"/>
+              </a:schemeClr>
+            </a:gs>
+          </a:gsLst>
+          <a:lin ang="5400000" scaled="0"/>
+        </a:gradFill>
+        <a:gradFill rotWithShape="1">
+          <a:gsLst>
+            <a:gs pos="0">
+              <a:schemeClr val="phClr">
+                <a:satMod val="103000"/>
+                <a:lumMod val="102000"/>
+                <a:tint val="94000"/>
+              </a:schemeClr>
+            </a:gs>
+            <a:gs pos="50000">
+              <a:schemeClr val="phClr">
+                <a:satMod val="110000"/>
+                <a:lumMod val="100000"/>
+                <a:shade val="100000"/>
+              </a:schemeClr>
+            </a:gs>
+            <a:gs pos="100000">
+              <a:schemeClr val="phClr">
+                <a:lumMod val="99000"/>
+                <a:satMod val="120000"/>
+                <a:shade val="78000"/>
+              </a:schemeClr>
+            </a:gs>
+          </a:gsLst>
+          <a:lin ang="5400000" scaled="0"/>
+        </a:gradFill>
+      </a:fillStyleLst>
+      <a:lnStyleLst>
+        <a:ln w="12700" cap="flat" cmpd="sng" algn="ctr">
+          <a:solidFill>
+            <a:schemeClr val="phClr"/>
+          </a:solidFill>
+          <a:prstDash val="solid"/>
+          <a:miter lim="800000"/>
+        </a:ln>
+        <a:ln w="19050" cap="flat" cmpd="sng" algn="ctr">
+          <a:solidFill>
+            <a:schemeClr val="phClr"/>
+          </a:solidFill>
+          <a:prstDash val="solid"/>
+          <a:miter lim="800000"/>
+        </a:ln>
+        <a:ln w="25400" cap="flat" cmpd="sng" algn="ctr">
+          <a:solidFill>
+            <a:schemeClr val="phClr"/>
+          </a:solidFill>
+          <a:prstDash val="solid"/>
+          <a:miter lim="800000"/>
+        </a:ln>
+      </a:lnStyleLst>
+      <a:effectStyleLst>
+        <a:effectStyle>
+          <a:effectLst/>
+        </a:effectStyle>
+        <a:effectStyle>
+          <a:effectLst/>
+        </a:effectStyle>
+        <a:effectStyle>
+          <a:effectLst>
+            <a:outerShdw blurRad="57150" dist="19050" dir="5400000" algn="ctr" rotWithShape="0">
+              <a:srgbClr val="000000">
+                <a:alpha val="63000"/>
+              </a:srgbClr>
+            </a:outerShdw>
+          </a:effectLst>
+        </a:effectStyle>
+      </a:effectStyleLst>
+      <a:bgFillStyleLst>
+        <a:solidFill>
+          <a:schemeClr val="phClr"/>
+        </a:solidFill>
+        <a:solidFill>
+          <a:schemeClr val="phClr">
+            <a:tint val="95000"/>
+            <a:satMod val="170000"/>
+          </a:schemeClr>
+        </a:solidFill>
+        <a:gradFill rotWithShape="1">
+          <a:gsLst>
+            <a:gs pos="0">
+              <a:schemeClr val="phClr">
+                <a:tint val="93000"/>
+                <a:satMod val="150000"/>
+                <a:shade val="98000"/>
+                <a:lumMod val="102000"/>
+              </a:schemeClr>
+            </a:gs>
+            <a:gs pos="50000">
+              <a:schemeClr val="phClr">
+                <a:tint val="98000"/>
+                <a:satMod val="130000"/>
+                <a:shade val="90000"/>
+                <a:lumMod val="103000"/>
+              </a:schemeClr>
+            </a:gs>
+            <a:gs pos="100000">
+              <a:schemeClr val="phClr">
+                <a:shade val="63000"/>
+                <a:satMod val="120000"/>
+              </a:schemeClr>
+            </a:gs>
+          </a:gsLst>
+          <a:lin ang="5400000" scaled="0"/>
+        </a:gradFill>
+      </a:bgFillStyleLst>
+    </a:fmtScheme>
+  </a:themeElements>
+  <a:objectDefaults>
+    <a:lnDef>
+      <a:spPr/>
+      <a:bodyPr/>
+      <a:lstStyle/>
+      <a:style>
+        <a:lnRef idx="2">
+          <a:schemeClr val="accent1"/>
+        </a:lnRef>
+        <a:fillRef idx="0">
+          <a:schemeClr val="accent1"/>
+        </a:fillRef>
+        <a:effectRef idx="1">
+          <a:schemeClr val="accent1"/>
+        </a:effectRef>
+        <a:fontRef idx="minor">
+          <a:schemeClr val="tx1"/>
+        </a:fontRef>
+      </a:style>
+    </a:lnDef>
+  </a:objectDefaults>
+  <a:extraClrSchemeLst/>
+  <a:extLst>
+    <a:ext uri="{05A4C25C-085E-4340-85A3-A5531E510DB2}">
+      <thm15:themeFamily xmlns:thm15="http://schemas.microsoft.com/office/thememl/2012/main" name="Office Theme" id="{2E142A2C-CD16-42D6-873A-C26D2A0506FA}" vid="{1BDDFF52-6CD6-40A5-AB3C-68EB2F1E4D0A}"/>
+    </a:ext>
+  </a:extLst>
+</a:theme>
 </file>